--- a/static/ppts/G6_Sci_T2_Full_Revision.pptx
+++ b/static/ppts/G6_Sci_T2_Full_Revision.pptx
@@ -1302,7 +1302,7 @@
     <p:bg>
       <p:bgPr>
         <a:solidFill>
-          <a:srgbClr val="7C3AED"/>
+          <a:srgbClr val="1B2A4A"/>
         </a:solidFill>
       </p:bgPr>
     </p:bg>
@@ -1322,14 +1322,34 @@
       </p:grpSpPr>
       <p:sp>
         <p:nvSpPr>
-          <p:cNvPr id="2" name="Text 0"/>
+          <p:cNvPr id="2" name="Shape 0"/>
           <p:cNvSpPr/>
           <p:nvPr/>
         </p:nvSpPr>
         <p:spPr>
           <a:xfrm>
-            <a:off x="731520" y="1371600"/>
-            <a:ext cx="7680960" cy="1371600"/>
+            <a:off x="0" y="0"/>
+            <a:ext cx="109728" cy="5143500"/>
+          </a:xfrm>
+          <a:prstGeom prst="rect">
+            <a:avLst/>
+          </a:prstGeom>
+          <a:solidFill>
+            <a:srgbClr val="2A9D8F"/>
+          </a:solidFill>
+          <a:ln/>
+        </p:spPr>
+      </p:sp>
+      <p:sp>
+        <p:nvSpPr>
+          <p:cNvPr id="3" name="Text 1"/>
+          <p:cNvSpPr/>
+          <p:nvPr/>
+        </p:nvSpPr>
+        <p:spPr>
+          <a:xfrm>
+            <a:off x="731520" y="1280160"/>
+            <a:ext cx="7772400" cy="1371600"/>
           </a:xfrm>
           <a:prstGeom prst="rect">
             <a:avLst/>
@@ -1345,30 +1365,69 @@
               <a:buNone/>
             </a:pPr>
             <a:r>
-              <a:rPr lang="en-US" sz="4000" b="1" dirty="0">
+              <a:rPr lang="en-US" sz="3600" b="1" dirty="0">
                 <a:solidFill>
                   <a:srgbClr val="FFFFFF"/>
+                </a:solidFill>
+                <a:latin typeface="Georgia" pitchFamily="34" charset="0"/>
+                <a:ea typeface="Georgia" pitchFamily="34" charset="-122"/>
+                <a:cs typeface="Georgia" pitchFamily="34" charset="-120"/>
+              </a:rPr>
+              <a:t>Chemistry — Full Revision</a:t>
+            </a:r>
+            <a:endParaRPr lang="en-US" sz="3600" dirty="0"/>
+          </a:p>
+        </p:txBody>
+      </p:sp>
+      <p:sp>
+        <p:nvSpPr>
+          <p:cNvPr id="4" name="Text 2"/>
+          <p:cNvSpPr/>
+          <p:nvPr/>
+        </p:nvSpPr>
+        <p:spPr>
+          <a:xfrm>
+            <a:off x="731520" y="2743200"/>
+            <a:ext cx="7772400" cy="548640"/>
+          </a:xfrm>
+          <a:prstGeom prst="rect">
+            <a:avLst/>
+          </a:prstGeom>
+          <a:noFill/>
+          <a:ln/>
+        </p:spPr>
+        <p:txBody>
+          <a:bodyPr wrap="square" rtlCol="0" anchor="ctr"/>
+          <a:lstStyle/>
+          <a:p>
+            <a:pPr indent="0" marL="0">
+              <a:buNone/>
+            </a:pPr>
+            <a:r>
+              <a:rPr lang="en-US" sz="1600" dirty="0">
+                <a:solidFill>
+                  <a:srgbClr val="9B9690"/>
                 </a:solidFill>
                 <a:latin typeface="Calibri" pitchFamily="34" charset="0"/>
                 <a:ea typeface="Calibri" pitchFamily="34" charset="-122"/>
                 <a:cs typeface="Calibri" pitchFamily="34" charset="-120"/>
               </a:rPr>
-              <a:t>Chemistry — Full Revision</a:t>
-            </a:r>
-            <a:endParaRPr lang="en-US" sz="4000" dirty="0"/>
-          </a:p>
-        </p:txBody>
-      </p:sp>
-      <p:sp>
-        <p:nvSpPr>
-          <p:cNvPr id="3" name="Text 1"/>
+              <a:t>G6 Science · Term 2 Review</a:t>
+            </a:r>
+            <a:endParaRPr lang="en-US" sz="1600" dirty="0"/>
+          </a:p>
+        </p:txBody>
+      </p:sp>
+      <p:sp>
+        <p:nvSpPr>
+          <p:cNvPr id="5" name="Text 3"/>
           <p:cNvSpPr/>
           <p:nvPr/>
         </p:nvSpPr>
         <p:spPr>
           <a:xfrm>
-            <a:off x="731520" y="2926080"/>
-            <a:ext cx="7680960" cy="548640"/>
+            <a:off x="731520" y="4389120"/>
+            <a:ext cx="7772400" cy="457200"/>
           </a:xfrm>
           <a:prstGeom prst="rect">
             <a:avLst/>
@@ -1384,17 +1443,17 @@
               <a:buNone/>
             </a:pPr>
             <a:r>
-              <a:rPr lang="en-US" sz="1600" i="1" dirty="0">
-                <a:solidFill>
-                  <a:srgbClr val="FFFFFF"/>
+              <a:rPr lang="en-US" sz="1000" dirty="0">
+                <a:solidFill>
+                  <a:srgbClr val="6B6660"/>
                 </a:solidFill>
                 <a:latin typeface="Calibri" pitchFamily="34" charset="0"/>
                 <a:ea typeface="Calibri" pitchFamily="34" charset="-122"/>
                 <a:cs typeface="Calibri" pitchFamily="34" charset="-120"/>
               </a:rPr>
-              <a:t>Grade 6 Science · Mr Zocchi</a:t>
-            </a:r>
-            <a:endParaRPr lang="en-US" sz="1600" dirty="0"/>
+              <a:t>Mr Zocchi · mrzocchi.com</a:t>
+            </a:r>
+            <a:endParaRPr lang="en-US" sz="1000" dirty="0"/>
           </a:p>
         </p:txBody>
       </p:sp>
@@ -1409,6 +1468,13 @@
 <file path=ppt/slides/slide2.xml><?xml version="1.0" encoding="utf-8"?>
 <p:sld xmlns:a="http://schemas.openxmlformats.org/drawingml/2006/main" xmlns:r="http://schemas.openxmlformats.org/officeDocument/2006/relationships" xmlns:p="http://schemas.openxmlformats.org/presentationml/2006/main">
   <p:cSld name="Slide 2">
+    <p:bg>
+      <p:bgPr>
+        <a:solidFill>
+          <a:srgbClr val="FFFFFF"/>
+        </a:solidFill>
+      </p:bgPr>
+    </p:bg>
     <p:spTree>
       <p:nvGrpSpPr>
         <p:cNvPr id="1" name=""/>
@@ -1432,13 +1498,13 @@
         <p:spPr>
           <a:xfrm>
             <a:off x="0" y="0"/>
-            <a:ext cx="9144000" cy="548640"/>
-          </a:xfrm>
-          <a:prstGeom prst="rect">
-            <a:avLst/>
-          </a:prstGeom>
-          <a:solidFill>
-            <a:srgbClr val="7C3AED"/>
+            <a:ext cx="9144000" cy="54864"/>
+          </a:xfrm>
+          <a:prstGeom prst="rect">
+            <a:avLst/>
+          </a:prstGeom>
+          <a:solidFill>
+            <a:srgbClr val="2A9D8F"/>
           </a:solidFill>
           <a:ln/>
         </p:spPr>
@@ -1451,8 +1517,8 @@
         </p:nvSpPr>
         <p:spPr>
           <a:xfrm>
-            <a:off x="457200" y="45720"/>
-            <a:ext cx="8229600" cy="457200"/>
+            <a:off x="548640" y="274320"/>
+            <a:ext cx="8046720" cy="640080"/>
           </a:xfrm>
           <a:prstGeom prst="rect">
             <a:avLst/>
@@ -1461,125 +1527,186 @@
           <a:ln/>
         </p:spPr>
         <p:txBody>
-          <a:bodyPr wrap="square" rtlCol="0" anchor="ctr"/>
+          <a:bodyPr wrap="square" lIns="0" tIns="0" rIns="0" bIns="0" rtlCol="0" anchor="ctr"/>
           <a:lstStyle/>
           <a:p>
             <a:pPr indent="0" marL="0">
               <a:buNone/>
             </a:pPr>
             <a:r>
-              <a:rPr lang="en-US" sz="1800" b="1" dirty="0">
-                <a:solidFill>
-                  <a:srgbClr val="FFFFFF"/>
+              <a:rPr lang="en-US" sz="2600" b="1" dirty="0">
+                <a:solidFill>
+                  <a:srgbClr val="1B2A4A"/>
+                </a:solidFill>
+                <a:latin typeface="Georgia" pitchFamily="34" charset="0"/>
+                <a:ea typeface="Georgia" pitchFamily="34" charset="-122"/>
+                <a:cs typeface="Georgia" pitchFamily="34" charset="-120"/>
+              </a:rPr>
+              <a:t>Particle Model &amp; States</a:t>
+            </a:r>
+            <a:endParaRPr lang="en-US" sz="2600" dirty="0"/>
+          </a:p>
+        </p:txBody>
+      </p:sp>
+      <p:sp>
+        <p:nvSpPr>
+          <p:cNvPr id="4" name="Text 2"/>
+          <p:cNvSpPr/>
+          <p:nvPr/>
+        </p:nvSpPr>
+        <p:spPr>
+          <a:xfrm>
+            <a:off x="548640" y="1097280"/>
+            <a:ext cx="8046720" cy="3474720"/>
+          </a:xfrm>
+          <a:prstGeom prst="rect">
+            <a:avLst/>
+          </a:prstGeom>
+          <a:noFill/>
+          <a:ln/>
+        </p:spPr>
+        <p:txBody>
+          <a:bodyPr wrap="square" rtlCol="0" anchor="t"/>
+          <a:lstStyle/>
+          <a:p>
+            <a:pPr marL="342900" indent="-342900">
+              <a:spcAft>
+                <a:spcPts val="800"/>
+              </a:spcAft>
+              <a:buSzPct val="100000"/>
+              <a:buChar char="•"/>
+            </a:pPr>
+            <a:r>
+              <a:rPr lang="en-US" sz="1500" dirty="0">
+                <a:solidFill>
+                  <a:srgbClr val="3D3A36"/>
                 </a:solidFill>
                 <a:latin typeface="Calibri" pitchFamily="34" charset="0"/>
                 <a:ea typeface="Calibri" pitchFamily="34" charset="-122"/>
                 <a:cs typeface="Calibri" pitchFamily="34" charset="-120"/>
               </a:rPr>
-              <a:t>Particle model recap</a:t>
-            </a:r>
-            <a:endParaRPr lang="en-US" sz="1800" dirty="0"/>
-          </a:p>
-        </p:txBody>
-      </p:sp>
-      <p:sp>
-        <p:nvSpPr>
-          <p:cNvPr id="4" name="Text 2"/>
-          <p:cNvSpPr/>
-          <p:nvPr/>
-        </p:nvSpPr>
-        <p:spPr>
-          <a:xfrm>
-            <a:off x="731520" y="1097280"/>
-            <a:ext cx="7680960" cy="3200400"/>
-          </a:xfrm>
-          <a:prstGeom prst="rect">
-            <a:avLst/>
-          </a:prstGeom>
-          <a:noFill/>
-          <a:ln/>
-        </p:spPr>
-        <p:txBody>
-          <a:bodyPr wrap="square" rtlCol="0" anchor="ctr"/>
-          <a:lstStyle/>
-          <a:p>
-            <a:pPr indent="0" marL="0">
-              <a:buNone/>
-            </a:pPr>
-            <a:r>
-              <a:rPr lang="en-US" sz="1600" dirty="0">
-                <a:solidFill>
-                  <a:srgbClr val="363636"/>
+              <a:t>All matter = particles in constant motion</a:t>
+            </a:r>
+            <a:endParaRPr lang="en-US" sz="1500" dirty="0"/>
+          </a:p>
+          <a:p>
+            <a:pPr marL="342900" indent="-342900">
+              <a:spcAft>
+                <a:spcPts val="800"/>
+              </a:spcAft>
+              <a:buSzPct val="100000"/>
+              <a:buChar char="•"/>
+            </a:pPr>
+            <a:r>
+              <a:rPr lang="en-US" sz="1500" dirty="0">
+                <a:solidFill>
+                  <a:srgbClr val="3D3A36"/>
                 </a:solidFill>
                 <a:latin typeface="Calibri" pitchFamily="34" charset="0"/>
                 <a:ea typeface="Calibri" pitchFamily="34" charset="-122"/>
                 <a:cs typeface="Calibri" pitchFamily="34" charset="-120"/>
               </a:rPr>
-              <a:t>Content for: Particle model recap</a:t>
-            </a:r>
-            <a:endParaRPr lang="en-US" sz="1600" dirty="0"/>
-          </a:p>
-          <a:p>
-            <a:pPr indent="0" marL="0">
-              <a:buNone/>
-            </a:pPr>
-            <a:endParaRPr lang="en-US" sz="1600" dirty="0"/>
-          </a:p>
-          <a:p>
-            <a:pPr indent="0" marL="0">
-              <a:buNone/>
-            </a:pPr>
-            <a:r>
-              <a:rPr lang="en-US" sz="1600" dirty="0">
-                <a:solidFill>
-                  <a:srgbClr val="363636"/>
+              <a:t>Solid: fixed, vibrate | Liquid: close, slide | Gas: far, fast</a:t>
+            </a:r>
+            <a:endParaRPr lang="en-US" sz="1500" dirty="0"/>
+          </a:p>
+          <a:p>
+            <a:pPr marL="342900" indent="-342900">
+              <a:spcAft>
+                <a:spcPts val="800"/>
+              </a:spcAft>
+              <a:buSzPct val="100000"/>
+              <a:buChar char="•"/>
+            </a:pPr>
+            <a:r>
+              <a:rPr lang="en-US" sz="1500" dirty="0">
+                <a:solidFill>
+                  <a:srgbClr val="3D3A36"/>
                 </a:solidFill>
                 <a:latin typeface="Calibri" pitchFamily="34" charset="0"/>
                 <a:ea typeface="Calibri" pitchFamily="34" charset="-122"/>
                 <a:cs typeface="Calibri" pitchFamily="34" charset="-120"/>
               </a:rPr>
-              <a:t>Key points will be covered in class.</a:t>
-            </a:r>
-            <a:endParaRPr lang="en-US" sz="1600" dirty="0"/>
-          </a:p>
-        </p:txBody>
-      </p:sp>
-      <p:sp>
-        <p:nvSpPr>
-          <p:cNvPr id="5" name="Text 3"/>
-          <p:cNvSpPr/>
-          <p:nvPr/>
-        </p:nvSpPr>
-        <p:spPr>
-          <a:xfrm>
-            <a:off x="7772400" y="4663440"/>
-            <a:ext cx="1097280" cy="365760"/>
-          </a:xfrm>
-          <a:prstGeom prst="rect">
-            <a:avLst/>
-          </a:prstGeom>
-          <a:noFill/>
-          <a:ln/>
-        </p:spPr>
-        <p:txBody>
-          <a:bodyPr wrap="square" rtlCol="0" anchor="ctr"/>
-          <a:lstStyle/>
-          <a:p>
-            <a:pPr algn="r" indent="0" marL="0">
-              <a:buNone/>
-            </a:pPr>
-            <a:r>
-              <a:rPr lang="en-US" sz="1000" dirty="0">
-                <a:solidFill>
-                  <a:srgbClr val="999999"/>
+              <a:t>More energy = faster particles = higher temperature</a:t>
+            </a:r>
+            <a:endParaRPr lang="en-US" sz="1500" dirty="0"/>
+          </a:p>
+          <a:p>
+            <a:pPr marL="342900" indent="-342900">
+              <a:spcAft>
+                <a:spcPts val="800"/>
+              </a:spcAft>
+              <a:buSzPct val="100000"/>
+              <a:buChar char="•"/>
+            </a:pPr>
+            <a:r>
+              <a:rPr lang="en-US" sz="1500" dirty="0">
+                <a:solidFill>
+                  <a:srgbClr val="3D3A36"/>
                 </a:solidFill>
                 <a:latin typeface="Calibri" pitchFamily="34" charset="0"/>
                 <a:ea typeface="Calibri" pitchFamily="34" charset="-122"/>
                 <a:cs typeface="Calibri" pitchFamily="34" charset="-120"/>
               </a:rPr>
-              <a:t>2 / 6</a:t>
-            </a:r>
-            <a:endParaRPr lang="en-US" sz="1000" dirty="0"/>
+              <a:t>Gases can be compressed; solids and liquids cannot</a:t>
+            </a:r>
+            <a:endParaRPr lang="en-US" sz="1500" dirty="0"/>
+          </a:p>
+        </p:txBody>
+      </p:sp>
+      <p:sp>
+        <p:nvSpPr>
+          <p:cNvPr id="5" name="Shape 3"/>
+          <p:cNvSpPr/>
+          <p:nvPr/>
+        </p:nvSpPr>
+        <p:spPr>
+          <a:xfrm>
+            <a:off x="548640" y="4754880"/>
+            <a:ext cx="8046720" cy="9144"/>
+          </a:xfrm>
+          <a:prstGeom prst="rect">
+            <a:avLst/>
+          </a:prstGeom>
+          <a:solidFill>
+            <a:srgbClr val="F3F1EE"/>
+          </a:solidFill>
+          <a:ln/>
+        </p:spPr>
+      </p:sp>
+      <p:sp>
+        <p:nvSpPr>
+          <p:cNvPr id="6" name="Text 4"/>
+          <p:cNvSpPr/>
+          <p:nvPr/>
+        </p:nvSpPr>
+        <p:spPr>
+          <a:xfrm>
+            <a:off x="548640" y="4800600"/>
+            <a:ext cx="3657600" cy="274320"/>
+          </a:xfrm>
+          <a:prstGeom prst="rect">
+            <a:avLst/>
+          </a:prstGeom>
+          <a:noFill/>
+          <a:ln/>
+        </p:spPr>
+        <p:txBody>
+          <a:bodyPr wrap="square" rtlCol="0" anchor="ctr"/>
+          <a:lstStyle/>
+          <a:p>
+            <a:pPr indent="0" marL="0">
+              <a:buNone/>
+            </a:pPr>
+            <a:r>
+              <a:rPr lang="en-US" sz="800" dirty="0">
+                <a:solidFill>
+                  <a:srgbClr val="9B9690"/>
+                </a:solidFill>
+              </a:rPr>
+              <a:t>mrzocchi.com</a:t>
+            </a:r>
+            <a:endParaRPr lang="en-US" sz="800" dirty="0"/>
           </a:p>
         </p:txBody>
       </p:sp>
@@ -1594,6 +1721,13 @@
 <file path=ppt/slides/slide3.xml><?xml version="1.0" encoding="utf-8"?>
 <p:sld xmlns:a="http://schemas.openxmlformats.org/drawingml/2006/main" xmlns:r="http://schemas.openxmlformats.org/officeDocument/2006/relationships" xmlns:p="http://schemas.openxmlformats.org/presentationml/2006/main">
   <p:cSld name="Slide 3">
+    <p:bg>
+      <p:bgPr>
+        <a:solidFill>
+          <a:srgbClr val="FFFFFF"/>
+        </a:solidFill>
+      </p:bgPr>
+    </p:bg>
     <p:spTree>
       <p:nvGrpSpPr>
         <p:cNvPr id="1" name=""/>
@@ -1617,13 +1751,13 @@
         <p:spPr>
           <a:xfrm>
             <a:off x="0" y="0"/>
-            <a:ext cx="9144000" cy="548640"/>
-          </a:xfrm>
-          <a:prstGeom prst="rect">
-            <a:avLst/>
-          </a:prstGeom>
-          <a:solidFill>
-            <a:srgbClr val="7C3AED"/>
+            <a:ext cx="9144000" cy="54864"/>
+          </a:xfrm>
+          <a:prstGeom prst="rect">
+            <a:avLst/>
+          </a:prstGeom>
+          <a:solidFill>
+            <a:srgbClr val="2A9D8F"/>
           </a:solidFill>
           <a:ln/>
         </p:spPr>
@@ -1636,8 +1770,8 @@
         </p:nvSpPr>
         <p:spPr>
           <a:xfrm>
-            <a:off x="457200" y="45720"/>
-            <a:ext cx="8229600" cy="457200"/>
+            <a:off x="548640" y="274320"/>
+            <a:ext cx="8046720" cy="640080"/>
           </a:xfrm>
           <a:prstGeom prst="rect">
             <a:avLst/>
@@ -1646,125 +1780,186 @@
           <a:ln/>
         </p:spPr>
         <p:txBody>
-          <a:bodyPr wrap="square" rtlCol="0" anchor="ctr"/>
+          <a:bodyPr wrap="square" lIns="0" tIns="0" rIns="0" bIns="0" rtlCol="0" anchor="ctr"/>
           <a:lstStyle/>
           <a:p>
             <a:pPr indent="0" marL="0">
               <a:buNone/>
             </a:pPr>
             <a:r>
-              <a:rPr lang="en-US" sz="1800" b="1" dirty="0">
-                <a:solidFill>
-                  <a:srgbClr val="FFFFFF"/>
+              <a:rPr lang="en-US" sz="2600" b="1" dirty="0">
+                <a:solidFill>
+                  <a:srgbClr val="1B2A4A"/>
+                </a:solidFill>
+                <a:latin typeface="Georgia" pitchFamily="34" charset="0"/>
+                <a:ea typeface="Georgia" pitchFamily="34" charset="-122"/>
+                <a:cs typeface="Georgia" pitchFamily="34" charset="-120"/>
+              </a:rPr>
+              <a:t>Changes of State</a:t>
+            </a:r>
+            <a:endParaRPr lang="en-US" sz="2600" dirty="0"/>
+          </a:p>
+        </p:txBody>
+      </p:sp>
+      <p:sp>
+        <p:nvSpPr>
+          <p:cNvPr id="4" name="Text 2"/>
+          <p:cNvSpPr/>
+          <p:nvPr/>
+        </p:nvSpPr>
+        <p:spPr>
+          <a:xfrm>
+            <a:off x="548640" y="1097280"/>
+            <a:ext cx="8046720" cy="3474720"/>
+          </a:xfrm>
+          <a:prstGeom prst="rect">
+            <a:avLst/>
+          </a:prstGeom>
+          <a:noFill/>
+          <a:ln/>
+        </p:spPr>
+        <p:txBody>
+          <a:bodyPr wrap="square" rtlCol="0" anchor="t"/>
+          <a:lstStyle/>
+          <a:p>
+            <a:pPr marL="342900" indent="-342900">
+              <a:spcAft>
+                <a:spcPts val="800"/>
+              </a:spcAft>
+              <a:buSzPct val="100000"/>
+              <a:buChar char="•"/>
+            </a:pPr>
+            <a:r>
+              <a:rPr lang="en-US" sz="1500" dirty="0">
+                <a:solidFill>
+                  <a:srgbClr val="3D3A36"/>
                 </a:solidFill>
                 <a:latin typeface="Calibri" pitchFamily="34" charset="0"/>
                 <a:ea typeface="Calibri" pitchFamily="34" charset="-122"/>
                 <a:cs typeface="Calibri" pitchFamily="34" charset="-120"/>
               </a:rPr>
-              <a:t>States recap</a:t>
-            </a:r>
-            <a:endParaRPr lang="en-US" sz="1800" dirty="0"/>
-          </a:p>
-        </p:txBody>
-      </p:sp>
-      <p:sp>
-        <p:nvSpPr>
-          <p:cNvPr id="4" name="Text 2"/>
-          <p:cNvSpPr/>
-          <p:nvPr/>
-        </p:nvSpPr>
-        <p:spPr>
-          <a:xfrm>
-            <a:off x="731520" y="1097280"/>
-            <a:ext cx="7680960" cy="3200400"/>
-          </a:xfrm>
-          <a:prstGeom prst="rect">
-            <a:avLst/>
-          </a:prstGeom>
-          <a:noFill/>
-          <a:ln/>
-        </p:spPr>
-        <p:txBody>
-          <a:bodyPr wrap="square" rtlCol="0" anchor="ctr"/>
-          <a:lstStyle/>
-          <a:p>
-            <a:pPr indent="0" marL="0">
-              <a:buNone/>
-            </a:pPr>
-            <a:r>
-              <a:rPr lang="en-US" sz="1600" dirty="0">
-                <a:solidFill>
-                  <a:srgbClr val="363636"/>
+              <a:t>Melting (solid→liquid), Boiling (liquid→gas), Condensation (gas→liquid), Freezing (liquid→solid)</a:t>
+            </a:r>
+            <a:endParaRPr lang="en-US" sz="1500" dirty="0"/>
+          </a:p>
+          <a:p>
+            <a:pPr marL="342900" indent="-342900">
+              <a:spcAft>
+                <a:spcPts val="800"/>
+              </a:spcAft>
+              <a:buSzPct val="100000"/>
+              <a:buChar char="•"/>
+            </a:pPr>
+            <a:r>
+              <a:rPr lang="en-US" sz="1500" dirty="0">
+                <a:solidFill>
+                  <a:srgbClr val="3D3A36"/>
                 </a:solidFill>
                 <a:latin typeface="Calibri" pitchFamily="34" charset="0"/>
                 <a:ea typeface="Calibri" pitchFamily="34" charset="-122"/>
                 <a:cs typeface="Calibri" pitchFamily="34" charset="-120"/>
               </a:rPr>
-              <a:t>Content for: States recap</a:t>
-            </a:r>
-            <a:endParaRPr lang="en-US" sz="1600" dirty="0"/>
-          </a:p>
-          <a:p>
-            <a:pPr indent="0" marL="0">
-              <a:buNone/>
-            </a:pPr>
-            <a:endParaRPr lang="en-US" sz="1600" dirty="0"/>
-          </a:p>
-          <a:p>
-            <a:pPr indent="0" marL="0">
-              <a:buNone/>
-            </a:pPr>
-            <a:r>
-              <a:rPr lang="en-US" sz="1600" dirty="0">
-                <a:solidFill>
-                  <a:srgbClr val="363636"/>
+              <a:t>Adding heat = particles gain energy and move faster</a:t>
+            </a:r>
+            <a:endParaRPr lang="en-US" sz="1500" dirty="0"/>
+          </a:p>
+          <a:p>
+            <a:pPr marL="342900" indent="-342900">
+              <a:spcAft>
+                <a:spcPts val="800"/>
+              </a:spcAft>
+              <a:buSzPct val="100000"/>
+              <a:buChar char="•"/>
+            </a:pPr>
+            <a:r>
+              <a:rPr lang="en-US" sz="1500" dirty="0">
+                <a:solidFill>
+                  <a:srgbClr val="3D3A36"/>
                 </a:solidFill>
                 <a:latin typeface="Calibri" pitchFamily="34" charset="0"/>
                 <a:ea typeface="Calibri" pitchFamily="34" charset="-122"/>
                 <a:cs typeface="Calibri" pitchFamily="34" charset="-120"/>
               </a:rPr>
-              <a:t>Key points will be covered in class.</a:t>
-            </a:r>
-            <a:endParaRPr lang="en-US" sz="1600" dirty="0"/>
-          </a:p>
-        </p:txBody>
-      </p:sp>
-      <p:sp>
-        <p:nvSpPr>
-          <p:cNvPr id="5" name="Text 3"/>
-          <p:cNvSpPr/>
-          <p:nvPr/>
-        </p:nvSpPr>
-        <p:spPr>
-          <a:xfrm>
-            <a:off x="7772400" y="4663440"/>
-            <a:ext cx="1097280" cy="365760"/>
-          </a:xfrm>
-          <a:prstGeom prst="rect">
-            <a:avLst/>
-          </a:prstGeom>
-          <a:noFill/>
-          <a:ln/>
-        </p:spPr>
-        <p:txBody>
-          <a:bodyPr wrap="square" rtlCol="0" anchor="ctr"/>
-          <a:lstStyle/>
-          <a:p>
-            <a:pPr algn="r" indent="0" marL="0">
-              <a:buNone/>
-            </a:pPr>
-            <a:r>
-              <a:rPr lang="en-US" sz="1000" dirty="0">
-                <a:solidFill>
-                  <a:srgbClr val="999999"/>
+              <a:t>Temperature stays constant DURING a state change</a:t>
+            </a:r>
+            <a:endParaRPr lang="en-US" sz="1500" dirty="0"/>
+          </a:p>
+          <a:p>
+            <a:pPr marL="342900" indent="-342900">
+              <a:spcAft>
+                <a:spcPts val="800"/>
+              </a:spcAft>
+              <a:buSzPct val="100000"/>
+              <a:buChar char="•"/>
+            </a:pPr>
+            <a:r>
+              <a:rPr lang="en-US" sz="1500" dirty="0">
+                <a:solidFill>
+                  <a:srgbClr val="3D3A36"/>
                 </a:solidFill>
                 <a:latin typeface="Calibri" pitchFamily="34" charset="0"/>
                 <a:ea typeface="Calibri" pitchFamily="34" charset="-122"/>
                 <a:cs typeface="Calibri" pitchFamily="34" charset="-120"/>
               </a:rPr>
-              <a:t>3 / 6</a:t>
-            </a:r>
-            <a:endParaRPr lang="en-US" sz="1000" dirty="0"/>
+              <a:t>Sublimation: solid→gas directly (e.g., dry ice)</a:t>
+            </a:r>
+            <a:endParaRPr lang="en-US" sz="1500" dirty="0"/>
+          </a:p>
+        </p:txBody>
+      </p:sp>
+      <p:sp>
+        <p:nvSpPr>
+          <p:cNvPr id="5" name="Shape 3"/>
+          <p:cNvSpPr/>
+          <p:nvPr/>
+        </p:nvSpPr>
+        <p:spPr>
+          <a:xfrm>
+            <a:off x="548640" y="4754880"/>
+            <a:ext cx="8046720" cy="9144"/>
+          </a:xfrm>
+          <a:prstGeom prst="rect">
+            <a:avLst/>
+          </a:prstGeom>
+          <a:solidFill>
+            <a:srgbClr val="F3F1EE"/>
+          </a:solidFill>
+          <a:ln/>
+        </p:spPr>
+      </p:sp>
+      <p:sp>
+        <p:nvSpPr>
+          <p:cNvPr id="6" name="Text 4"/>
+          <p:cNvSpPr/>
+          <p:nvPr/>
+        </p:nvSpPr>
+        <p:spPr>
+          <a:xfrm>
+            <a:off x="548640" y="4800600"/>
+            <a:ext cx="3657600" cy="274320"/>
+          </a:xfrm>
+          <a:prstGeom prst="rect">
+            <a:avLst/>
+          </a:prstGeom>
+          <a:noFill/>
+          <a:ln/>
+        </p:spPr>
+        <p:txBody>
+          <a:bodyPr wrap="square" rtlCol="0" anchor="ctr"/>
+          <a:lstStyle/>
+          <a:p>
+            <a:pPr indent="0" marL="0">
+              <a:buNone/>
+            </a:pPr>
+            <a:r>
+              <a:rPr lang="en-US" sz="800" dirty="0">
+                <a:solidFill>
+                  <a:srgbClr val="9B9690"/>
+                </a:solidFill>
+              </a:rPr>
+              <a:t>mrzocchi.com</a:t>
+            </a:r>
+            <a:endParaRPr lang="en-US" sz="800" dirty="0"/>
           </a:p>
         </p:txBody>
       </p:sp>
@@ -1779,6 +1974,13 @@
 <file path=ppt/slides/slide4.xml><?xml version="1.0" encoding="utf-8"?>
 <p:sld xmlns:a="http://schemas.openxmlformats.org/drawingml/2006/main" xmlns:r="http://schemas.openxmlformats.org/officeDocument/2006/relationships" xmlns:p="http://schemas.openxmlformats.org/presentationml/2006/main">
   <p:cSld name="Slide 4">
+    <p:bg>
+      <p:bgPr>
+        <a:solidFill>
+          <a:srgbClr val="FFFFFF"/>
+        </a:solidFill>
+      </p:bgPr>
+    </p:bg>
     <p:spTree>
       <p:nvGrpSpPr>
         <p:cNvPr id="1" name=""/>
@@ -1802,13 +2004,13 @@
         <p:spPr>
           <a:xfrm>
             <a:off x="0" y="0"/>
-            <a:ext cx="9144000" cy="548640"/>
-          </a:xfrm>
-          <a:prstGeom prst="rect">
-            <a:avLst/>
-          </a:prstGeom>
-          <a:solidFill>
-            <a:srgbClr val="7C3AED"/>
+            <a:ext cx="9144000" cy="54864"/>
+          </a:xfrm>
+          <a:prstGeom prst="rect">
+            <a:avLst/>
+          </a:prstGeom>
+          <a:solidFill>
+            <a:srgbClr val="2A9D8F"/>
           </a:solidFill>
           <a:ln/>
         </p:spPr>
@@ -1821,8 +2023,8 @@
         </p:nvSpPr>
         <p:spPr>
           <a:xfrm>
-            <a:off x="457200" y="45720"/>
-            <a:ext cx="8229600" cy="457200"/>
+            <a:off x="548640" y="274320"/>
+            <a:ext cx="8046720" cy="640080"/>
           </a:xfrm>
           <a:prstGeom prst="rect">
             <a:avLst/>
@@ -1831,125 +2033,186 @@
           <a:ln/>
         </p:spPr>
         <p:txBody>
-          <a:bodyPr wrap="square" rtlCol="0" anchor="ctr"/>
+          <a:bodyPr wrap="square" lIns="0" tIns="0" rIns="0" bIns="0" rtlCol="0" anchor="ctr"/>
           <a:lstStyle/>
           <a:p>
             <a:pPr indent="0" marL="0">
               <a:buNone/>
             </a:pPr>
             <a:r>
-              <a:rPr lang="en-US" sz="1800" b="1" dirty="0">
-                <a:solidFill>
-                  <a:srgbClr val="FFFFFF"/>
+              <a:rPr lang="en-US" sz="2600" b="1" dirty="0">
+                <a:solidFill>
+                  <a:srgbClr val="1B2A4A"/>
+                </a:solidFill>
+                <a:latin typeface="Georgia" pitchFamily="34" charset="0"/>
+                <a:ea typeface="Georgia" pitchFamily="34" charset="-122"/>
+                <a:cs typeface="Georgia" pitchFamily="34" charset="-120"/>
+              </a:rPr>
+              <a:t>Mixtures &amp; Solutions</a:t>
+            </a:r>
+            <a:endParaRPr lang="en-US" sz="2600" dirty="0"/>
+          </a:p>
+        </p:txBody>
+      </p:sp>
+      <p:sp>
+        <p:nvSpPr>
+          <p:cNvPr id="4" name="Text 2"/>
+          <p:cNvSpPr/>
+          <p:nvPr/>
+        </p:nvSpPr>
+        <p:spPr>
+          <a:xfrm>
+            <a:off x="548640" y="1097280"/>
+            <a:ext cx="8046720" cy="3474720"/>
+          </a:xfrm>
+          <a:prstGeom prst="rect">
+            <a:avLst/>
+          </a:prstGeom>
+          <a:noFill/>
+          <a:ln/>
+        </p:spPr>
+        <p:txBody>
+          <a:bodyPr wrap="square" rtlCol="0" anchor="t"/>
+          <a:lstStyle/>
+          <a:p>
+            <a:pPr marL="342900" indent="-342900">
+              <a:spcAft>
+                <a:spcPts val="800"/>
+              </a:spcAft>
+              <a:buSzPct val="100000"/>
+              <a:buChar char="•"/>
+            </a:pPr>
+            <a:r>
+              <a:rPr lang="en-US" sz="1500" dirty="0">
+                <a:solidFill>
+                  <a:srgbClr val="3D3A36"/>
                 </a:solidFill>
                 <a:latin typeface="Calibri" pitchFamily="34" charset="0"/>
                 <a:ea typeface="Calibri" pitchFamily="34" charset="-122"/>
                 <a:cs typeface="Calibri" pitchFamily="34" charset="-120"/>
               </a:rPr>
-              <a:t>Changes recap</a:t>
-            </a:r>
-            <a:endParaRPr lang="en-US" sz="1800" dirty="0"/>
-          </a:p>
-        </p:txBody>
-      </p:sp>
-      <p:sp>
-        <p:nvSpPr>
-          <p:cNvPr id="4" name="Text 2"/>
-          <p:cNvSpPr/>
-          <p:nvPr/>
-        </p:nvSpPr>
-        <p:spPr>
-          <a:xfrm>
-            <a:off x="731520" y="1097280"/>
-            <a:ext cx="7680960" cy="3200400"/>
-          </a:xfrm>
-          <a:prstGeom prst="rect">
-            <a:avLst/>
-          </a:prstGeom>
-          <a:noFill/>
-          <a:ln/>
-        </p:spPr>
-        <p:txBody>
-          <a:bodyPr wrap="square" rtlCol="0" anchor="ctr"/>
-          <a:lstStyle/>
-          <a:p>
-            <a:pPr indent="0" marL="0">
-              <a:buNone/>
-            </a:pPr>
-            <a:r>
-              <a:rPr lang="en-US" sz="1600" dirty="0">
-                <a:solidFill>
-                  <a:srgbClr val="363636"/>
+              <a:t>Mixture: substances combined but not chemically bonded</a:t>
+            </a:r>
+            <a:endParaRPr lang="en-US" sz="1500" dirty="0"/>
+          </a:p>
+          <a:p>
+            <a:pPr marL="342900" indent="-342900">
+              <a:spcAft>
+                <a:spcPts val="800"/>
+              </a:spcAft>
+              <a:buSzPct val="100000"/>
+              <a:buChar char="•"/>
+            </a:pPr>
+            <a:r>
+              <a:rPr lang="en-US" sz="1500" dirty="0">
+                <a:solidFill>
+                  <a:srgbClr val="3D3A36"/>
                 </a:solidFill>
                 <a:latin typeface="Calibri" pitchFamily="34" charset="0"/>
                 <a:ea typeface="Calibri" pitchFamily="34" charset="-122"/>
                 <a:cs typeface="Calibri" pitchFamily="34" charset="-120"/>
               </a:rPr>
-              <a:t>Content for: Changes recap</a:t>
-            </a:r>
-            <a:endParaRPr lang="en-US" sz="1600" dirty="0"/>
-          </a:p>
-          <a:p>
-            <a:pPr indent="0" marL="0">
-              <a:buNone/>
-            </a:pPr>
-            <a:endParaRPr lang="en-US" sz="1600" dirty="0"/>
-          </a:p>
-          <a:p>
-            <a:pPr indent="0" marL="0">
-              <a:buNone/>
-            </a:pPr>
-            <a:r>
-              <a:rPr lang="en-US" sz="1600" dirty="0">
-                <a:solidFill>
-                  <a:srgbClr val="363636"/>
+              <a:t>Solution = solute (dissolves) + solvent (the liquid)</a:t>
+            </a:r>
+            <a:endParaRPr lang="en-US" sz="1500" dirty="0"/>
+          </a:p>
+          <a:p>
+            <a:pPr marL="342900" indent="-342900">
+              <a:spcAft>
+                <a:spcPts val="800"/>
+              </a:spcAft>
+              <a:buSzPct val="100000"/>
+              <a:buChar char="•"/>
+            </a:pPr>
+            <a:r>
+              <a:rPr lang="en-US" sz="1500" dirty="0">
+                <a:solidFill>
+                  <a:srgbClr val="3D3A36"/>
                 </a:solidFill>
                 <a:latin typeface="Calibri" pitchFamily="34" charset="0"/>
                 <a:ea typeface="Calibri" pitchFamily="34" charset="-122"/>
                 <a:cs typeface="Calibri" pitchFamily="34" charset="-120"/>
               </a:rPr>
-              <a:t>Key points will be covered in class.</a:t>
-            </a:r>
-            <a:endParaRPr lang="en-US" sz="1600" dirty="0"/>
-          </a:p>
-        </p:txBody>
-      </p:sp>
-      <p:sp>
-        <p:nvSpPr>
-          <p:cNvPr id="5" name="Text 3"/>
-          <p:cNvSpPr/>
-          <p:nvPr/>
-        </p:nvSpPr>
-        <p:spPr>
-          <a:xfrm>
-            <a:off x="7772400" y="4663440"/>
-            <a:ext cx="1097280" cy="365760"/>
-          </a:xfrm>
-          <a:prstGeom prst="rect">
-            <a:avLst/>
-          </a:prstGeom>
-          <a:noFill/>
-          <a:ln/>
-        </p:spPr>
-        <p:txBody>
-          <a:bodyPr wrap="square" rtlCol="0" anchor="ctr"/>
-          <a:lstStyle/>
-          <a:p>
-            <a:pPr algn="r" indent="0" marL="0">
-              <a:buNone/>
-            </a:pPr>
-            <a:r>
-              <a:rPr lang="en-US" sz="1000" dirty="0">
-                <a:solidFill>
-                  <a:srgbClr val="999999"/>
+              <a:t>Soluble = dissolves, Insoluble = doesn't dissolve</a:t>
+            </a:r>
+            <a:endParaRPr lang="en-US" sz="1500" dirty="0"/>
+          </a:p>
+          <a:p>
+            <a:pPr marL="342900" indent="-342900">
+              <a:spcAft>
+                <a:spcPts val="800"/>
+              </a:spcAft>
+              <a:buSzPct val="100000"/>
+              <a:buChar char="•"/>
+            </a:pPr>
+            <a:r>
+              <a:rPr lang="en-US" sz="1500" dirty="0">
+                <a:solidFill>
+                  <a:srgbClr val="3D3A36"/>
                 </a:solidFill>
                 <a:latin typeface="Calibri" pitchFamily="34" charset="0"/>
                 <a:ea typeface="Calibri" pitchFamily="34" charset="-122"/>
                 <a:cs typeface="Calibri" pitchFamily="34" charset="-120"/>
               </a:rPr>
-              <a:t>4 / 6</a:t>
-            </a:r>
-            <a:endParaRPr lang="en-US" sz="1000" dirty="0"/>
+              <a:t>Saturated solution: no more solute can dissolve</a:t>
+            </a:r>
+            <a:endParaRPr lang="en-US" sz="1500" dirty="0"/>
+          </a:p>
+        </p:txBody>
+      </p:sp>
+      <p:sp>
+        <p:nvSpPr>
+          <p:cNvPr id="5" name="Shape 3"/>
+          <p:cNvSpPr/>
+          <p:nvPr/>
+        </p:nvSpPr>
+        <p:spPr>
+          <a:xfrm>
+            <a:off x="548640" y="4754880"/>
+            <a:ext cx="8046720" cy="9144"/>
+          </a:xfrm>
+          <a:prstGeom prst="rect">
+            <a:avLst/>
+          </a:prstGeom>
+          <a:solidFill>
+            <a:srgbClr val="F3F1EE"/>
+          </a:solidFill>
+          <a:ln/>
+        </p:spPr>
+      </p:sp>
+      <p:sp>
+        <p:nvSpPr>
+          <p:cNvPr id="6" name="Text 4"/>
+          <p:cNvSpPr/>
+          <p:nvPr/>
+        </p:nvSpPr>
+        <p:spPr>
+          <a:xfrm>
+            <a:off x="548640" y="4800600"/>
+            <a:ext cx="3657600" cy="274320"/>
+          </a:xfrm>
+          <a:prstGeom prst="rect">
+            <a:avLst/>
+          </a:prstGeom>
+          <a:noFill/>
+          <a:ln/>
+        </p:spPr>
+        <p:txBody>
+          <a:bodyPr wrap="square" rtlCol="0" anchor="ctr"/>
+          <a:lstStyle/>
+          <a:p>
+            <a:pPr indent="0" marL="0">
+              <a:buNone/>
+            </a:pPr>
+            <a:r>
+              <a:rPr lang="en-US" sz="800" dirty="0">
+                <a:solidFill>
+                  <a:srgbClr val="9B9690"/>
+                </a:solidFill>
+              </a:rPr>
+              <a:t>mrzocchi.com</a:t>
+            </a:r>
+            <a:endParaRPr lang="en-US" sz="800" dirty="0"/>
           </a:p>
         </p:txBody>
       </p:sp>
@@ -1964,6 +2227,13 @@
 <file path=ppt/slides/slide5.xml><?xml version="1.0" encoding="utf-8"?>
 <p:sld xmlns:a="http://schemas.openxmlformats.org/drawingml/2006/main" xmlns:r="http://schemas.openxmlformats.org/officeDocument/2006/relationships" xmlns:p="http://schemas.openxmlformats.org/presentationml/2006/main">
   <p:cSld name="Slide 5">
+    <p:bg>
+      <p:bgPr>
+        <a:solidFill>
+          <a:srgbClr val="FFFFFF"/>
+        </a:solidFill>
+      </p:bgPr>
+    </p:bg>
     <p:spTree>
       <p:nvGrpSpPr>
         <p:cNvPr id="1" name=""/>
@@ -1987,13 +2257,13 @@
         <p:spPr>
           <a:xfrm>
             <a:off x="0" y="0"/>
-            <a:ext cx="9144000" cy="548640"/>
-          </a:xfrm>
-          <a:prstGeom prst="rect">
-            <a:avLst/>
-          </a:prstGeom>
-          <a:solidFill>
-            <a:srgbClr val="7C3AED"/>
+            <a:ext cx="9144000" cy="54864"/>
+          </a:xfrm>
+          <a:prstGeom prst="rect">
+            <a:avLst/>
+          </a:prstGeom>
+          <a:solidFill>
+            <a:srgbClr val="2A9D8F"/>
           </a:solidFill>
           <a:ln/>
         </p:spPr>
@@ -2006,8 +2276,8 @@
         </p:nvSpPr>
         <p:spPr>
           <a:xfrm>
-            <a:off x="457200" y="45720"/>
-            <a:ext cx="8229600" cy="457200"/>
+            <a:off x="548640" y="274320"/>
+            <a:ext cx="8046720" cy="640080"/>
           </a:xfrm>
           <a:prstGeom prst="rect">
             <a:avLst/>
@@ -2016,125 +2286,207 @@
           <a:ln/>
         </p:spPr>
         <p:txBody>
-          <a:bodyPr wrap="square" rtlCol="0" anchor="ctr"/>
+          <a:bodyPr wrap="square" lIns="0" tIns="0" rIns="0" bIns="0" rtlCol="0" anchor="ctr"/>
           <a:lstStyle/>
           <a:p>
             <a:pPr indent="0" marL="0">
               <a:buNone/>
             </a:pPr>
             <a:r>
-              <a:rPr lang="en-US" sz="1800" b="1" dirty="0">
-                <a:solidFill>
-                  <a:srgbClr val="FFFFFF"/>
+              <a:rPr lang="en-US" sz="2600" b="1" dirty="0">
+                <a:solidFill>
+                  <a:srgbClr val="1B2A4A"/>
+                </a:solidFill>
+                <a:latin typeface="Georgia" pitchFamily="34" charset="0"/>
+                <a:ea typeface="Georgia" pitchFamily="34" charset="-122"/>
+                <a:cs typeface="Georgia" pitchFamily="34" charset="-120"/>
+              </a:rPr>
+              <a:t>Separating Mixtures</a:t>
+            </a:r>
+            <a:endParaRPr lang="en-US" sz="2600" dirty="0"/>
+          </a:p>
+        </p:txBody>
+      </p:sp>
+      <p:sp>
+        <p:nvSpPr>
+          <p:cNvPr id="4" name="Text 2"/>
+          <p:cNvSpPr/>
+          <p:nvPr/>
+        </p:nvSpPr>
+        <p:spPr>
+          <a:xfrm>
+            <a:off x="548640" y="1097280"/>
+            <a:ext cx="8046720" cy="3474720"/>
+          </a:xfrm>
+          <a:prstGeom prst="rect">
+            <a:avLst/>
+          </a:prstGeom>
+          <a:noFill/>
+          <a:ln/>
+        </p:spPr>
+        <p:txBody>
+          <a:bodyPr wrap="square" rtlCol="0" anchor="t"/>
+          <a:lstStyle/>
+          <a:p>
+            <a:pPr marL="342900" indent="-342900">
+              <a:spcAft>
+                <a:spcPts val="800"/>
+              </a:spcAft>
+              <a:buSzPct val="100000"/>
+              <a:buChar char="•"/>
+            </a:pPr>
+            <a:r>
+              <a:rPr lang="en-US" sz="1500" dirty="0">
+                <a:solidFill>
+                  <a:srgbClr val="3D3A36"/>
                 </a:solidFill>
                 <a:latin typeface="Calibri" pitchFamily="34" charset="0"/>
                 <a:ea typeface="Calibri" pitchFamily="34" charset="-122"/>
                 <a:cs typeface="Calibri" pitchFamily="34" charset="-120"/>
               </a:rPr>
-              <a:t>Mixtures recap</a:t>
-            </a:r>
-            <a:endParaRPr lang="en-US" sz="1800" dirty="0"/>
-          </a:p>
-        </p:txBody>
-      </p:sp>
-      <p:sp>
-        <p:nvSpPr>
-          <p:cNvPr id="4" name="Text 2"/>
-          <p:cNvSpPr/>
-          <p:nvPr/>
-        </p:nvSpPr>
-        <p:spPr>
-          <a:xfrm>
-            <a:off x="731520" y="1097280"/>
-            <a:ext cx="7680960" cy="3200400"/>
-          </a:xfrm>
-          <a:prstGeom prst="rect">
-            <a:avLst/>
-          </a:prstGeom>
-          <a:noFill/>
-          <a:ln/>
-        </p:spPr>
-        <p:txBody>
-          <a:bodyPr wrap="square" rtlCol="0" anchor="ctr"/>
-          <a:lstStyle/>
-          <a:p>
-            <a:pPr indent="0" marL="0">
-              <a:buNone/>
-            </a:pPr>
-            <a:r>
-              <a:rPr lang="en-US" sz="1600" dirty="0">
-                <a:solidFill>
-                  <a:srgbClr val="363636"/>
+              <a:t>Filtration: remove insoluble solids from liquid</a:t>
+            </a:r>
+            <a:endParaRPr lang="en-US" sz="1500" dirty="0"/>
+          </a:p>
+          <a:p>
+            <a:pPr marL="342900" indent="-342900">
+              <a:spcAft>
+                <a:spcPts val="800"/>
+              </a:spcAft>
+              <a:buSzPct val="100000"/>
+              <a:buChar char="•"/>
+            </a:pPr>
+            <a:r>
+              <a:rPr lang="en-US" sz="1500" dirty="0">
+                <a:solidFill>
+                  <a:srgbClr val="3D3A36"/>
                 </a:solidFill>
                 <a:latin typeface="Calibri" pitchFamily="34" charset="0"/>
                 <a:ea typeface="Calibri" pitchFamily="34" charset="-122"/>
                 <a:cs typeface="Calibri" pitchFamily="34" charset="-120"/>
               </a:rPr>
-              <a:t>Content for: Mixtures recap</a:t>
-            </a:r>
-            <a:endParaRPr lang="en-US" sz="1600" dirty="0"/>
-          </a:p>
-          <a:p>
-            <a:pPr indent="0" marL="0">
-              <a:buNone/>
-            </a:pPr>
-            <a:endParaRPr lang="en-US" sz="1600" dirty="0"/>
-          </a:p>
-          <a:p>
-            <a:pPr indent="0" marL="0">
-              <a:buNone/>
-            </a:pPr>
-            <a:r>
-              <a:rPr lang="en-US" sz="1600" dirty="0">
-                <a:solidFill>
-                  <a:srgbClr val="363636"/>
+              <a:t>Evaporation: recover dissolved solid from solution</a:t>
+            </a:r>
+            <a:endParaRPr lang="en-US" sz="1500" dirty="0"/>
+          </a:p>
+          <a:p>
+            <a:pPr marL="342900" indent="-342900">
+              <a:spcAft>
+                <a:spcPts val="800"/>
+              </a:spcAft>
+              <a:buSzPct val="100000"/>
+              <a:buChar char="•"/>
+            </a:pPr>
+            <a:r>
+              <a:rPr lang="en-US" sz="1500" dirty="0">
+                <a:solidFill>
+                  <a:srgbClr val="3D3A36"/>
                 </a:solidFill>
                 <a:latin typeface="Calibri" pitchFamily="34" charset="0"/>
                 <a:ea typeface="Calibri" pitchFamily="34" charset="-122"/>
                 <a:cs typeface="Calibri" pitchFamily="34" charset="-120"/>
               </a:rPr>
-              <a:t>Key points will be covered in class.</a:t>
-            </a:r>
-            <a:endParaRPr lang="en-US" sz="1600" dirty="0"/>
-          </a:p>
-        </p:txBody>
-      </p:sp>
-      <p:sp>
-        <p:nvSpPr>
-          <p:cNvPr id="5" name="Text 3"/>
-          <p:cNvSpPr/>
-          <p:nvPr/>
-        </p:nvSpPr>
-        <p:spPr>
-          <a:xfrm>
-            <a:off x="7772400" y="4663440"/>
-            <a:ext cx="1097280" cy="365760"/>
-          </a:xfrm>
-          <a:prstGeom prst="rect">
-            <a:avLst/>
-          </a:prstGeom>
-          <a:noFill/>
-          <a:ln/>
-        </p:spPr>
-        <p:txBody>
-          <a:bodyPr wrap="square" rtlCol="0" anchor="ctr"/>
-          <a:lstStyle/>
-          <a:p>
-            <a:pPr algn="r" indent="0" marL="0">
-              <a:buNone/>
-            </a:pPr>
-            <a:r>
-              <a:rPr lang="en-US" sz="1000" dirty="0">
-                <a:solidFill>
-                  <a:srgbClr val="999999"/>
+              <a:t>Distillation: recover both solid AND liquid</a:t>
+            </a:r>
+            <a:endParaRPr lang="en-US" sz="1500" dirty="0"/>
+          </a:p>
+          <a:p>
+            <a:pPr marL="342900" indent="-342900">
+              <a:spcAft>
+                <a:spcPts val="800"/>
+              </a:spcAft>
+              <a:buSzPct val="100000"/>
+              <a:buChar char="•"/>
+            </a:pPr>
+            <a:r>
+              <a:rPr lang="en-US" sz="1500" dirty="0">
+                <a:solidFill>
+                  <a:srgbClr val="3D3A36"/>
                 </a:solidFill>
                 <a:latin typeface="Calibri" pitchFamily="34" charset="0"/>
                 <a:ea typeface="Calibri" pitchFamily="34" charset="-122"/>
                 <a:cs typeface="Calibri" pitchFamily="34" charset="-120"/>
               </a:rPr>
-              <a:t>5 / 6</a:t>
-            </a:r>
-            <a:endParaRPr lang="en-US" sz="1000" dirty="0"/>
+              <a:t>Chromatography: separate colours/dissolved substances</a:t>
+            </a:r>
+            <a:endParaRPr lang="en-US" sz="1500" dirty="0"/>
+          </a:p>
+          <a:p>
+            <a:pPr marL="342900" indent="-342900">
+              <a:spcAft>
+                <a:spcPts val="800"/>
+              </a:spcAft>
+              <a:buSzPct val="100000"/>
+              <a:buChar char="•"/>
+            </a:pPr>
+            <a:r>
+              <a:rPr lang="en-US" sz="1500" dirty="0">
+                <a:solidFill>
+                  <a:srgbClr val="3D3A36"/>
+                </a:solidFill>
+                <a:latin typeface="Calibri" pitchFamily="34" charset="0"/>
+                <a:ea typeface="Calibri" pitchFamily="34" charset="-122"/>
+                <a:cs typeface="Calibri" pitchFamily="34" charset="-120"/>
+              </a:rPr>
+              <a:t>Magnetism: separate magnetic materials</a:t>
+            </a:r>
+            <a:endParaRPr lang="en-US" sz="1500" dirty="0"/>
+          </a:p>
+        </p:txBody>
+      </p:sp>
+      <p:sp>
+        <p:nvSpPr>
+          <p:cNvPr id="5" name="Shape 3"/>
+          <p:cNvSpPr/>
+          <p:nvPr/>
+        </p:nvSpPr>
+        <p:spPr>
+          <a:xfrm>
+            <a:off x="548640" y="4754880"/>
+            <a:ext cx="8046720" cy="9144"/>
+          </a:xfrm>
+          <a:prstGeom prst="rect">
+            <a:avLst/>
+          </a:prstGeom>
+          <a:solidFill>
+            <a:srgbClr val="F3F1EE"/>
+          </a:solidFill>
+          <a:ln/>
+        </p:spPr>
+      </p:sp>
+      <p:sp>
+        <p:nvSpPr>
+          <p:cNvPr id="6" name="Text 4"/>
+          <p:cNvSpPr/>
+          <p:nvPr/>
+        </p:nvSpPr>
+        <p:spPr>
+          <a:xfrm>
+            <a:off x="548640" y="4800600"/>
+            <a:ext cx="3657600" cy="274320"/>
+          </a:xfrm>
+          <a:prstGeom prst="rect">
+            <a:avLst/>
+          </a:prstGeom>
+          <a:noFill/>
+          <a:ln/>
+        </p:spPr>
+        <p:txBody>
+          <a:bodyPr wrap="square" rtlCol="0" anchor="ctr"/>
+          <a:lstStyle/>
+          <a:p>
+            <a:pPr indent="0" marL="0">
+              <a:buNone/>
+            </a:pPr>
+            <a:r>
+              <a:rPr lang="en-US" sz="800" dirty="0">
+                <a:solidFill>
+                  <a:srgbClr val="9B9690"/>
+                </a:solidFill>
+              </a:rPr>
+              <a:t>mrzocchi.com</a:t>
+            </a:r>
+            <a:endParaRPr lang="en-US" sz="800" dirty="0"/>
           </a:p>
         </p:txBody>
       </p:sp>
@@ -2149,6 +2501,13 @@
 <file path=ppt/slides/slide6.xml><?xml version="1.0" encoding="utf-8"?>
 <p:sld xmlns:a="http://schemas.openxmlformats.org/drawingml/2006/main" xmlns:r="http://schemas.openxmlformats.org/officeDocument/2006/relationships" xmlns:p="http://schemas.openxmlformats.org/presentationml/2006/main">
   <p:cSld name="Slide 6">
+    <p:bg>
+      <p:bgPr>
+        <a:solidFill>
+          <a:srgbClr val="1B2A4A"/>
+        </a:solidFill>
+      </p:bgPr>
+    </p:bg>
     <p:spTree>
       <p:nvGrpSpPr>
         <p:cNvPr id="1" name=""/>
@@ -2172,13 +2531,13 @@
         <p:spPr>
           <a:xfrm>
             <a:off x="0" y="0"/>
-            <a:ext cx="9144000" cy="548640"/>
-          </a:xfrm>
-          <a:prstGeom prst="rect">
-            <a:avLst/>
-          </a:prstGeom>
-          <a:solidFill>
-            <a:srgbClr val="7C3AED"/>
+            <a:ext cx="9144000" cy="54864"/>
+          </a:xfrm>
+          <a:prstGeom prst="rect">
+            <a:avLst/>
+          </a:prstGeom>
+          <a:solidFill>
+            <a:srgbClr val="2A9D8F"/>
           </a:solidFill>
           <a:ln/>
         </p:spPr>
@@ -2191,8 +2550,8 @@
         </p:nvSpPr>
         <p:spPr>
           <a:xfrm>
-            <a:off x="457200" y="45720"/>
-            <a:ext cx="8229600" cy="457200"/>
+            <a:off x="548640" y="457200"/>
+            <a:ext cx="8046720" cy="640080"/>
           </a:xfrm>
           <a:prstGeom prst="rect">
             <a:avLst/>
@@ -2208,77 +2567,121 @@
               <a:buNone/>
             </a:pPr>
             <a:r>
-              <a:rPr lang="en-US" sz="1800" b="1" dirty="0">
+              <a:rPr lang="en-US" sz="2800" b="1" dirty="0">
                 <a:solidFill>
                   <a:srgbClr val="FFFFFF"/>
+                </a:solidFill>
+                <a:latin typeface="Georgia" pitchFamily="34" charset="0"/>
+                <a:ea typeface="Georgia" pitchFamily="34" charset="-122"/>
+                <a:cs typeface="Georgia" pitchFamily="34" charset="-120"/>
+              </a:rPr>
+              <a:t>Key Takeaways</a:t>
+            </a:r>
+            <a:endParaRPr lang="en-US" sz="2800" dirty="0"/>
+          </a:p>
+        </p:txBody>
+      </p:sp>
+      <p:sp>
+        <p:nvSpPr>
+          <p:cNvPr id="4" name="Text 2"/>
+          <p:cNvSpPr/>
+          <p:nvPr/>
+        </p:nvSpPr>
+        <p:spPr>
+          <a:xfrm>
+            <a:off x="731520" y="1371600"/>
+            <a:ext cx="7680960" cy="3200400"/>
+          </a:xfrm>
+          <a:prstGeom prst="rect">
+            <a:avLst/>
+          </a:prstGeom>
+          <a:noFill/>
+          <a:ln/>
+        </p:spPr>
+        <p:txBody>
+          <a:bodyPr wrap="square" rtlCol="0" anchor="t"/>
+          <a:lstStyle/>
+          <a:p>
+            <a:pPr marL="342900" indent="-342900">
+              <a:spcAft>
+                <a:spcPts val="1000"/>
+              </a:spcAft>
+              <a:buSzPct val="100000"/>
+              <a:buChar char="•"/>
+            </a:pPr>
+            <a:r>
+              <a:rPr lang="en-US" sz="1600" dirty="0">
+                <a:solidFill>
+                  <a:srgbClr val="CADCFC"/>
                 </a:solidFill>
                 <a:latin typeface="Calibri" pitchFamily="34" charset="0"/>
                 <a:ea typeface="Calibri" pitchFamily="34" charset="-122"/>
                 <a:cs typeface="Calibri" pitchFamily="34" charset="-120"/>
               </a:rPr>
-              <a:t>Separation recap</a:t>
-            </a:r>
-            <a:endParaRPr lang="en-US" sz="1800" dirty="0"/>
-          </a:p>
-        </p:txBody>
-      </p:sp>
-      <p:sp>
-        <p:nvSpPr>
-          <p:cNvPr id="4" name="Text 2"/>
-          <p:cNvSpPr/>
-          <p:nvPr/>
-        </p:nvSpPr>
-        <p:spPr>
-          <a:xfrm>
-            <a:off x="731520" y="1097280"/>
-            <a:ext cx="7680960" cy="3200400"/>
-          </a:xfrm>
-          <a:prstGeom prst="rect">
-            <a:avLst/>
-          </a:prstGeom>
-          <a:noFill/>
-          <a:ln/>
-        </p:spPr>
-        <p:txBody>
-          <a:bodyPr wrap="square" rtlCol="0" anchor="ctr"/>
-          <a:lstStyle/>
-          <a:p>
-            <a:pPr indent="0" marL="0">
-              <a:buNone/>
+              <a:t>Particles explain solid/liquid/gas behaviour</a:t>
+            </a:r>
+            <a:endParaRPr lang="en-US" sz="1600" dirty="0"/>
+          </a:p>
+          <a:p>
+            <a:pPr marL="342900" indent="-342900">
+              <a:spcAft>
+                <a:spcPts val="1000"/>
+              </a:spcAft>
+              <a:buSzPct val="100000"/>
+              <a:buChar char="•"/>
             </a:pPr>
             <a:r>
               <a:rPr lang="en-US" sz="1600" dirty="0">
                 <a:solidFill>
-                  <a:srgbClr val="363636"/>
+                  <a:srgbClr val="CADCFC"/>
                 </a:solidFill>
                 <a:latin typeface="Calibri" pitchFamily="34" charset="0"/>
                 <a:ea typeface="Calibri" pitchFamily="34" charset="-122"/>
                 <a:cs typeface="Calibri" pitchFamily="34" charset="-120"/>
               </a:rPr>
-              <a:t>Content for: Separation recap</a:t>
+              <a:t>State changes need energy added or removed</a:t>
             </a:r>
             <a:endParaRPr lang="en-US" sz="1600" dirty="0"/>
           </a:p>
           <a:p>
-            <a:pPr indent="0" marL="0">
-              <a:buNone/>
-            </a:pPr>
-            <a:endParaRPr lang="en-US" sz="1600" dirty="0"/>
-          </a:p>
-          <a:p>
-            <a:pPr indent="0" marL="0">
-              <a:buNone/>
+            <a:pPr marL="342900" indent="-342900">
+              <a:spcAft>
+                <a:spcPts val="1000"/>
+              </a:spcAft>
+              <a:buSzPct val="100000"/>
+              <a:buChar char="•"/>
             </a:pPr>
             <a:r>
               <a:rPr lang="en-US" sz="1600" dirty="0">
                 <a:solidFill>
-                  <a:srgbClr val="363636"/>
+                  <a:srgbClr val="CADCFC"/>
                 </a:solidFill>
                 <a:latin typeface="Calibri" pitchFamily="34" charset="0"/>
                 <a:ea typeface="Calibri" pitchFamily="34" charset="-122"/>
                 <a:cs typeface="Calibri" pitchFamily="34" charset="-120"/>
               </a:rPr>
-              <a:t>Key points will be covered in class.</a:t>
+              <a:t>Mixtures can be separated by physical methods</a:t>
+            </a:r>
+            <a:endParaRPr lang="en-US" sz="1600" dirty="0"/>
+          </a:p>
+          <a:p>
+            <a:pPr marL="342900" indent="-342900">
+              <a:spcAft>
+                <a:spcPts val="1000"/>
+              </a:spcAft>
+              <a:buSzPct val="100000"/>
+              <a:buChar char="•"/>
+            </a:pPr>
+            <a:r>
+              <a:rPr lang="en-US" sz="1600" dirty="0">
+                <a:solidFill>
+                  <a:srgbClr val="CADCFC"/>
+                </a:solidFill>
+                <a:latin typeface="Calibri" pitchFamily="34" charset="0"/>
+                <a:ea typeface="Calibri" pitchFamily="34" charset="-122"/>
+                <a:cs typeface="Calibri" pitchFamily="34" charset="-120"/>
+              </a:rPr>
+              <a:t>Choose separation method based on substance properties</a:t>
             </a:r>
             <a:endParaRPr lang="en-US" sz="1600" dirty="0"/>
           </a:p>
@@ -2292,8 +2695,8 @@
         </p:nvSpPr>
         <p:spPr>
           <a:xfrm>
-            <a:off x="7772400" y="4663440"/>
-            <a:ext cx="1097280" cy="365760"/>
+            <a:off x="548640" y="4572000"/>
+            <a:ext cx="3657600" cy="274320"/>
           </a:xfrm>
           <a:prstGeom prst="rect">
             <a:avLst/>
@@ -2305,19 +2708,16 @@
           <a:bodyPr wrap="square" rtlCol="0" anchor="ctr"/>
           <a:lstStyle/>
           <a:p>
-            <a:pPr algn="r" indent="0" marL="0">
+            <a:pPr indent="0" marL="0">
               <a:buNone/>
             </a:pPr>
             <a:r>
               <a:rPr lang="en-US" sz="1000" dirty="0">
                 <a:solidFill>
-                  <a:srgbClr val="999999"/>
-                </a:solidFill>
-                <a:latin typeface="Calibri" pitchFamily="34" charset="0"/>
-                <a:ea typeface="Calibri" pitchFamily="34" charset="-122"/>
-                <a:cs typeface="Calibri" pitchFamily="34" charset="-120"/>
-              </a:rPr>
-              <a:t>6 / 6</a:t>
+                  <a:srgbClr val="6B6660"/>
+                </a:solidFill>
+              </a:rPr>
+              <a:t>mrzocchi.com</a:t>
             </a:r>
             <a:endParaRPr lang="en-US" sz="1000" dirty="0"/>
           </a:p>

--- a/static/ppts/G6_Sci_T2_Full_Revision.pptx
+++ b/static/ppts/G6_Sci_T2_Full_Revision.pptx
@@ -9,11 +9,9 @@
     <p:sldId id="257" r:id="rId3"/>
     <p:sldId id="258" r:id="rId4"/>
     <p:sldId id="259" r:id="rId5"/>
-    <p:sldId id="260" r:id="rId6"/>
-    <p:sldId id="261" r:id="rId7"/>
   </p:sldIdLst>
   <p:notesMasterIdLst>
-    <p:notesMasterId r:id="rId8"/>
+    <p:notesMasterId r:id="rId6"/>
   </p:notesMasterIdLst>
   <p:sldSz cx="9144000" cy="5143500"/>
   <p:notesSz cx="5143500" cy="9144000"/>
@@ -813,182 +811,6 @@
 </p:notes>
 </file>
 
-<file path=ppt/notesSlides/notesSlide5.xml><?xml version="1.0" encoding="utf-8"?>
-<p:notes xmlns:a="http://schemas.openxmlformats.org/drawingml/2006/main" xmlns:r="http://schemas.openxmlformats.org/officeDocument/2006/relationships" xmlns:p="http://schemas.openxmlformats.org/presentationml/2006/main">
-  <p:cSld>
-    <p:spTree>
-      <p:nvGrpSpPr>
-        <p:cNvPr id="1" name=""/>
-        <p:cNvGrpSpPr/>
-        <p:nvPr/>
-      </p:nvGrpSpPr>
-      <p:grpSpPr>
-        <a:xfrm>
-          <a:off x="0" y="0"/>
-          <a:ext cx="0" cy="0"/>
-          <a:chOff x="0" y="0"/>
-          <a:chExt cx="0" cy="0"/>
-        </a:xfrm>
-      </p:grpSpPr>
-      <p:sp>
-        <p:nvSpPr>
-          <p:cNvPr id="2" name="Slide Image Placeholder 1"/>
-          <p:cNvSpPr>
-            <a:spLocks noGrp="1" noRot="1" noChangeAspect="1"/>
-          </p:cNvSpPr>
-          <p:nvPr>
-            <p:ph type="sldImg"/>
-          </p:nvPr>
-        </p:nvSpPr>
-        <p:spPr/>
-      </p:sp>
-      <p:sp>
-        <p:nvSpPr>
-          <p:cNvPr id="3" name="Notes Placeholder 2"/>
-          <p:cNvSpPr>
-            <a:spLocks noGrp="1"/>
-          </p:cNvSpPr>
-          <p:nvPr>
-            <p:ph type="body" idx="1"/>
-          </p:nvPr>
-        </p:nvSpPr>
-        <p:spPr/>
-        <p:txBody>
-          <a:bodyPr/>
-          <a:lstStyle/>
-          <a:p>
-            <a:r>
-              <a:rPr lang="en-US" dirty="0"/>
-              <a:t/>
-            </a:r>
-            <a:endParaRPr lang="en-US" dirty="0"/>
-          </a:p>
-        </p:txBody>
-      </p:sp>
-      <p:sp>
-        <p:nvSpPr>
-          <p:cNvPr id="4" name="Slide Number Placeholder 3"/>
-          <p:cNvSpPr>
-            <a:spLocks noGrp="1"/>
-          </p:cNvSpPr>
-          <p:nvPr>
-            <p:ph type="sldNum" sz="quarter" idx="10"/>
-          </p:nvPr>
-        </p:nvSpPr>
-        <p:spPr/>
-        <p:txBody>
-          <a:bodyPr/>
-          <a:lstStyle/>
-          <a:p>
-            <a:fld id="{F7021451-1387-4CA6-816F-3879F97B5CBC}" type="slidenum">
-              <a:rPr lang="en-US"/>
-              <a:t>5</a:t>
-            </a:fld>
-            <a:endParaRPr lang="en-US"/>
-          </a:p>
-        </p:txBody>
-      </p:sp>
-    </p:spTree>
-    <p:extLst>
-      <p:ext uri="{BB962C8B-B14F-4D97-AF65-F5344CB8AC3E}">
-        <p14:creationId xmlns:p14="http://schemas.microsoft.com/office/powerpoint/2010/main" val="1024086991"/>
-      </p:ext>
-    </p:extLst>
-  </p:cSld>
-  <p:clrMapOvr>
-    <a:masterClrMapping/>
-  </p:clrMapOvr>
-</p:notes>
-</file>
-
-<file path=ppt/notesSlides/notesSlide6.xml><?xml version="1.0" encoding="utf-8"?>
-<p:notes xmlns:a="http://schemas.openxmlformats.org/drawingml/2006/main" xmlns:r="http://schemas.openxmlformats.org/officeDocument/2006/relationships" xmlns:p="http://schemas.openxmlformats.org/presentationml/2006/main">
-  <p:cSld>
-    <p:spTree>
-      <p:nvGrpSpPr>
-        <p:cNvPr id="1" name=""/>
-        <p:cNvGrpSpPr/>
-        <p:nvPr/>
-      </p:nvGrpSpPr>
-      <p:grpSpPr>
-        <a:xfrm>
-          <a:off x="0" y="0"/>
-          <a:ext cx="0" cy="0"/>
-          <a:chOff x="0" y="0"/>
-          <a:chExt cx="0" cy="0"/>
-        </a:xfrm>
-      </p:grpSpPr>
-      <p:sp>
-        <p:nvSpPr>
-          <p:cNvPr id="2" name="Slide Image Placeholder 1"/>
-          <p:cNvSpPr>
-            <a:spLocks noGrp="1" noRot="1" noChangeAspect="1"/>
-          </p:cNvSpPr>
-          <p:nvPr>
-            <p:ph type="sldImg"/>
-          </p:nvPr>
-        </p:nvSpPr>
-        <p:spPr/>
-      </p:sp>
-      <p:sp>
-        <p:nvSpPr>
-          <p:cNvPr id="3" name="Notes Placeholder 2"/>
-          <p:cNvSpPr>
-            <a:spLocks noGrp="1"/>
-          </p:cNvSpPr>
-          <p:nvPr>
-            <p:ph type="body" idx="1"/>
-          </p:nvPr>
-        </p:nvSpPr>
-        <p:spPr/>
-        <p:txBody>
-          <a:bodyPr/>
-          <a:lstStyle/>
-          <a:p>
-            <a:r>
-              <a:rPr lang="en-US" dirty="0"/>
-              <a:t/>
-            </a:r>
-            <a:endParaRPr lang="en-US" dirty="0"/>
-          </a:p>
-        </p:txBody>
-      </p:sp>
-      <p:sp>
-        <p:nvSpPr>
-          <p:cNvPr id="4" name="Slide Number Placeholder 3"/>
-          <p:cNvSpPr>
-            <a:spLocks noGrp="1"/>
-          </p:cNvSpPr>
-          <p:nvPr>
-            <p:ph type="sldNum" sz="quarter" idx="10"/>
-          </p:nvPr>
-        </p:nvSpPr>
-        <p:spPr/>
-        <p:txBody>
-          <a:bodyPr/>
-          <a:lstStyle/>
-          <a:p>
-            <a:fld id="{F7021451-1387-4CA6-816F-3879F97B5CBC}" type="slidenum">
-              <a:rPr lang="en-US"/>
-              <a:t>6</a:t>
-            </a:fld>
-            <a:endParaRPr lang="en-US"/>
-          </a:p>
-        </p:txBody>
-      </p:sp>
-    </p:spTree>
-    <p:extLst>
-      <p:ext uri="{BB962C8B-B14F-4D97-AF65-F5344CB8AC3E}">
-        <p14:creationId xmlns:p14="http://schemas.microsoft.com/office/powerpoint/2010/main" val="1024086991"/>
-      </p:ext>
-    </p:extLst>
-  </p:cSld>
-  <p:clrMapOvr>
-    <a:masterClrMapping/>
-  </p:clrMapOvr>
-</p:notes>
-</file>
-
 <file path=ppt/slideLayouts/slideLayout1.xml><?xml version="1.0" encoding="utf-8"?>
 <p:sldLayout xmlns:a="http://schemas.openxmlformats.org/drawingml/2006/main" xmlns:r="http://schemas.openxmlformats.org/officeDocument/2006/relationships" xmlns:p="http://schemas.openxmlformats.org/presentationml/2006/main" preserve="1">
   <p:cSld name="DEFAULT">
@@ -1348,7 +1170,7 @@
         </p:nvSpPr>
         <p:spPr>
           <a:xfrm>
-            <a:off x="731520" y="1280160"/>
+            <a:off x="731520" y="1097280"/>
             <a:ext cx="7772400" cy="1371600"/>
           </a:xfrm>
           <a:prstGeom prst="rect">
@@ -1365,7 +1187,7 @@
               <a:buNone/>
             </a:pPr>
             <a:r>
-              <a:rPr lang="en-US" sz="3600" b="1" dirty="0">
+              <a:rPr lang="en-US" sz="4000" b="1" dirty="0">
                 <a:solidFill>
                   <a:srgbClr val="FFFFFF"/>
                 </a:solidFill>
@@ -1375,7 +1197,7 @@
               </a:rPr>
               <a:t>Chemistry — Full Revision</a:t>
             </a:r>
-            <a:endParaRPr lang="en-US" sz="3600" dirty="0"/>
+            <a:endParaRPr lang="en-US" sz="4000" dirty="0"/>
           </a:p>
         </p:txBody>
       </p:sp>
@@ -1387,7 +1209,7 @@
         </p:nvSpPr>
         <p:spPr>
           <a:xfrm>
-            <a:off x="731520" y="2743200"/>
+            <a:off x="731520" y="2560320"/>
             <a:ext cx="7772400" cy="548640"/>
           </a:xfrm>
           <a:prstGeom prst="rect">
@@ -1406,13 +1228,13 @@
             <a:r>
               <a:rPr lang="en-US" sz="1600" dirty="0">
                 <a:solidFill>
-                  <a:srgbClr val="9B9690"/>
+                  <a:srgbClr val="E9C46A"/>
                 </a:solidFill>
                 <a:latin typeface="Calibri" pitchFamily="34" charset="0"/>
                 <a:ea typeface="Calibri" pitchFamily="34" charset="-122"/>
                 <a:cs typeface="Calibri" pitchFamily="34" charset="-120"/>
               </a:rPr>
-              <a:t>G6 Science · Term 2 Review</a:t>
+              <a:t>Grade 6 Science · Mr Zocchi</a:t>
             </a:r>
             <a:endParaRPr lang="en-US" sz="1600" dirty="0"/>
           </a:p>
@@ -1420,14 +1242,36 @@
       </p:sp>
       <p:sp>
         <p:nvSpPr>
-          <p:cNvPr id="5" name="Text 3"/>
-          <p:cNvSpPr/>
-          <p:nvPr/>
-        </p:nvSpPr>
-        <p:spPr>
-          <a:xfrm>
-            <a:off x="731520" y="4389120"/>
-            <a:ext cx="7772400" cy="457200"/>
+          <p:cNvPr id="5" name="Shape 3"/>
+          <p:cNvSpPr/>
+          <p:nvPr/>
+        </p:nvSpPr>
+        <p:spPr>
+          <a:xfrm>
+            <a:off x="731520" y="3474720"/>
+            <a:ext cx="2011680" cy="411480"/>
+          </a:xfrm>
+          <a:prstGeom prst="roundRect">
+            <a:avLst>
+              <a:gd name="adj" fmla="val 17778"/>
+            </a:avLst>
+          </a:prstGeom>
+          <a:solidFill>
+            <a:srgbClr val="2A9D8F"/>
+          </a:solidFill>
+          <a:ln/>
+        </p:spPr>
+      </p:sp>
+      <p:sp>
+        <p:nvSpPr>
+          <p:cNvPr id="6" name="Text 4"/>
+          <p:cNvSpPr/>
+          <p:nvPr/>
+        </p:nvSpPr>
+        <p:spPr>
+          <a:xfrm>
+            <a:off x="731520" y="3474720"/>
+            <a:ext cx="2011680" cy="411480"/>
           </a:xfrm>
           <a:prstGeom prst="rect">
             <a:avLst/>
@@ -1439,21 +1283,21 @@
           <a:bodyPr wrap="square" rtlCol="0" anchor="ctr"/>
           <a:lstStyle/>
           <a:p>
-            <a:pPr indent="0" marL="0">
+            <a:pPr algn="ctr" indent="0" marL="0">
               <a:buNone/>
             </a:pPr>
             <a:r>
-              <a:rPr lang="en-US" sz="1000" dirty="0">
+              <a:rPr lang="en-US" sz="1200" b="1" dirty="0">
                 <a:solidFill>
-                  <a:srgbClr val="6B6660"/>
+                  <a:srgbClr val="FFFFFF"/>
                 </a:solidFill>
                 <a:latin typeface="Calibri" pitchFamily="34" charset="0"/>
                 <a:ea typeface="Calibri" pitchFamily="34" charset="-122"/>
                 <a:cs typeface="Calibri" pitchFamily="34" charset="-120"/>
               </a:rPr>
-              <a:t>Mr Zocchi · mrzocchi.com</a:t>
-            </a:r>
-            <a:endParaRPr lang="en-US" sz="1000" dirty="0"/>
+              <a:t>Term 2 · Chemistry</a:t>
+            </a:r>
+            <a:endParaRPr lang="en-US" sz="1200" dirty="0"/>
           </a:p>
         </p:txBody>
       </p:sp>
@@ -1471,7 +1315,7 @@
     <p:bg>
       <p:bgPr>
         <a:solidFill>
-          <a:srgbClr val="FFFFFF"/>
+          <a:srgbClr val="FAF8F5"/>
         </a:solidFill>
       </p:bgPr>
     </p:bg>
@@ -1517,8 +1361,8 @@
         </p:nvSpPr>
         <p:spPr>
           <a:xfrm>
-            <a:off x="548640" y="274320"/>
-            <a:ext cx="8046720" cy="640080"/>
+            <a:off x="7772400" y="4709160"/>
+            <a:ext cx="1097280" cy="320040"/>
           </a:xfrm>
           <a:prstGeom prst="rect">
             <a:avLst/>
@@ -1527,7 +1371,46 @@
           <a:ln/>
         </p:spPr>
         <p:txBody>
-          <a:bodyPr wrap="square" lIns="0" tIns="0" rIns="0" bIns="0" rtlCol="0" anchor="ctr"/>
+          <a:bodyPr wrap="square" rtlCol="0" anchor="ctr"/>
+          <a:lstStyle/>
+          <a:p>
+            <a:pPr algn="r" indent="0" marL="0">
+              <a:buNone/>
+            </a:pPr>
+            <a:r>
+              <a:rPr lang="en-US" sz="900" dirty="0">
+                <a:solidFill>
+                  <a:srgbClr val="6B6660"/>
+                </a:solidFill>
+                <a:latin typeface="Calibri" pitchFamily="34" charset="0"/>
+                <a:ea typeface="Calibri" pitchFamily="34" charset="-122"/>
+                <a:cs typeface="Calibri" pitchFamily="34" charset="-120"/>
+              </a:rPr>
+              <a:t>2 / 4</a:t>
+            </a:r>
+            <a:endParaRPr lang="en-US" sz="900" dirty="0"/>
+          </a:p>
+        </p:txBody>
+      </p:sp>
+      <p:sp>
+        <p:nvSpPr>
+          <p:cNvPr id="4" name="Text 2"/>
+          <p:cNvSpPr/>
+          <p:nvPr/>
+        </p:nvSpPr>
+        <p:spPr>
+          <a:xfrm>
+            <a:off x="457200" y="274320"/>
+            <a:ext cx="8229600" cy="640080"/>
+          </a:xfrm>
+          <a:prstGeom prst="rect">
+            <a:avLst/>
+          </a:prstGeom>
+          <a:noFill/>
+          <a:ln/>
+        </p:spPr>
+        <p:txBody>
+          <a:bodyPr wrap="square" rtlCol="0" anchor="ctr"/>
           <a:lstStyle/>
           <a:p>
             <a:pPr indent="0" marL="0">
@@ -1542,7 +1425,7 @@
                 <a:ea typeface="Georgia" pitchFamily="34" charset="-122"/>
                 <a:cs typeface="Georgia" pitchFamily="34" charset="-120"/>
               </a:rPr>
-              <a:t>Particle Model &amp; States</a:t>
+              <a:t>Particles &amp; States</a:t>
             </a:r>
             <a:endParaRPr lang="en-US" sz="2600" dirty="0"/>
           </a:p>
@@ -1550,14 +1433,66 @@
       </p:sp>
       <p:sp>
         <p:nvSpPr>
-          <p:cNvPr id="4" name="Text 2"/>
-          <p:cNvSpPr/>
-          <p:nvPr/>
-        </p:nvSpPr>
-        <p:spPr>
-          <a:xfrm>
-            <a:off x="548640" y="1097280"/>
-            <a:ext cx="8046720" cy="3474720"/>
+          <p:cNvPr id="5" name="Shape 3"/>
+          <p:cNvSpPr/>
+          <p:nvPr/>
+        </p:nvSpPr>
+        <p:spPr>
+          <a:xfrm>
+            <a:off x="457200" y="1188720"/>
+            <a:ext cx="2560320" cy="1828800"/>
+          </a:xfrm>
+          <a:prstGeom prst="rect">
+            <a:avLst/>
+          </a:prstGeom>
+          <a:solidFill>
+            <a:srgbClr val="FFFFFF"/>
+          </a:solidFill>
+          <a:ln w="12700">
+            <a:solidFill>
+              <a:srgbClr val="E5E2DC"/>
+            </a:solidFill>
+            <a:prstDash val="solid"/>
+          </a:ln>
+          <a:effectLst>
+            <a:outerShdw sx="100000" sy="100000" kx="0" ky="0" algn="bl" rotWithShape="0" blurRad="50800" dist="25400" dir="8100000">
+              <a:srgbClr val="000000">
+                <a:alpha val="10000"/>
+              </a:srgbClr>
+            </a:outerShdw>
+          </a:effectLst>
+        </p:spPr>
+      </p:sp>
+      <p:sp>
+        <p:nvSpPr>
+          <p:cNvPr id="6" name="Shape 4"/>
+          <p:cNvSpPr/>
+          <p:nvPr/>
+        </p:nvSpPr>
+        <p:spPr>
+          <a:xfrm>
+            <a:off x="457200" y="1188720"/>
+            <a:ext cx="2560320" cy="54864"/>
+          </a:xfrm>
+          <a:prstGeom prst="rect">
+            <a:avLst/>
+          </a:prstGeom>
+          <a:solidFill>
+            <a:srgbClr val="2A9D8F"/>
+          </a:solidFill>
+          <a:ln/>
+        </p:spPr>
+      </p:sp>
+      <p:sp>
+        <p:nvSpPr>
+          <p:cNvPr id="7" name="Text 5"/>
+          <p:cNvSpPr/>
+          <p:nvPr/>
+        </p:nvSpPr>
+        <p:spPr>
+          <a:xfrm>
+            <a:off x="594360" y="1325880"/>
+            <a:ext cx="2286000" cy="365760"/>
           </a:xfrm>
           <a:prstGeom prst="rect">
             <a:avLst/>
@@ -1566,18 +1501,53 @@
           <a:ln/>
         </p:spPr>
         <p:txBody>
+          <a:bodyPr wrap="square" rtlCol="0" anchor="ctr"/>
+          <a:lstStyle/>
+          <a:p>
+            <a:pPr indent="0" marL="0">
+              <a:buNone/>
+            </a:pPr>
+            <a:r>
+              <a:rPr lang="en-US" sz="1400" b="1" dirty="0">
+                <a:solidFill>
+                  <a:srgbClr val="1B2A4A"/>
+                </a:solidFill>
+                <a:latin typeface="Calibri" pitchFamily="34" charset="0"/>
+                <a:ea typeface="Calibri" pitchFamily="34" charset="-122"/>
+                <a:cs typeface="Calibri" pitchFamily="34" charset="-120"/>
+              </a:rPr>
+              <a:t>Particle Model</a:t>
+            </a:r>
+            <a:endParaRPr lang="en-US" sz="1400" dirty="0"/>
+          </a:p>
+        </p:txBody>
+      </p:sp>
+      <p:sp>
+        <p:nvSpPr>
+          <p:cNvPr id="8" name="Text 6"/>
+          <p:cNvSpPr/>
+          <p:nvPr/>
+        </p:nvSpPr>
+        <p:spPr>
+          <a:xfrm>
+            <a:off x="594360" y="1737360"/>
+            <a:ext cx="2286000" cy="1097280"/>
+          </a:xfrm>
+          <a:prstGeom prst="rect">
+            <a:avLst/>
+          </a:prstGeom>
+          <a:noFill/>
+          <a:ln/>
+        </p:spPr>
+        <p:txBody>
           <a:bodyPr wrap="square" rtlCol="0" anchor="t"/>
           <a:lstStyle/>
           <a:p>
-            <a:pPr marL="342900" indent="-342900">
-              <a:spcAft>
-                <a:spcPts val="800"/>
-              </a:spcAft>
-              <a:buSzPct val="100000"/>
-              <a:buChar char="•"/>
+            <a:pPr indent="0" marL="0">
+              <a:buNone/>
             </a:pPr>
             <a:r>
-              <a:rPr lang="en-US" sz="1500" dirty="0">
+              <a:rPr lang="en-US" sz="1100" dirty="0">
                 <a:solidFill>
                   <a:srgbClr val="3D3A36"/>
                 </a:solidFill>
@@ -1585,20 +1555,129 @@
                 <a:ea typeface="Calibri" pitchFamily="34" charset="-122"/>
                 <a:cs typeface="Calibri" pitchFamily="34" charset="-120"/>
               </a:rPr>
-              <a:t>All matter = particles in constant motion</a:t>
-            </a:r>
-            <a:endParaRPr lang="en-US" sz="1500" dirty="0"/>
-          </a:p>
-          <a:p>
-            <a:pPr marL="342900" indent="-342900">
-              <a:spcAft>
-                <a:spcPts val="800"/>
-              </a:spcAft>
-              <a:buSzPct val="100000"/>
-              <a:buChar char="•"/>
+              <a:t>All matter = particles. Solids: regular, vibrate. Liquids: close, slide. Gases: far, fast. Heating = more energy = faster movement.</a:t>
+            </a:r>
+            <a:endParaRPr lang="en-US" sz="1100" dirty="0"/>
+          </a:p>
+        </p:txBody>
+      </p:sp>
+      <p:sp>
+        <p:nvSpPr>
+          <p:cNvPr id="9" name="Shape 7"/>
+          <p:cNvSpPr/>
+          <p:nvPr/>
+        </p:nvSpPr>
+        <p:spPr>
+          <a:xfrm>
+            <a:off x="3291840" y="1188720"/>
+            <a:ext cx="2560320" cy="1828800"/>
+          </a:xfrm>
+          <a:prstGeom prst="rect">
+            <a:avLst/>
+          </a:prstGeom>
+          <a:solidFill>
+            <a:srgbClr val="FFFFFF"/>
+          </a:solidFill>
+          <a:ln w="12700">
+            <a:solidFill>
+              <a:srgbClr val="E5E2DC"/>
+            </a:solidFill>
+            <a:prstDash val="solid"/>
+          </a:ln>
+          <a:effectLst>
+            <a:outerShdw sx="100000" sy="100000" kx="0" ky="0" algn="bl" rotWithShape="0" blurRad="50800" dist="25400" dir="8100000">
+              <a:srgbClr val="000000">
+                <a:alpha val="10000"/>
+              </a:srgbClr>
+            </a:outerShdw>
+          </a:effectLst>
+        </p:spPr>
+      </p:sp>
+      <p:sp>
+        <p:nvSpPr>
+          <p:cNvPr id="10" name="Shape 8"/>
+          <p:cNvSpPr/>
+          <p:nvPr/>
+        </p:nvSpPr>
+        <p:spPr>
+          <a:xfrm>
+            <a:off x="3291840" y="1188720"/>
+            <a:ext cx="2560320" cy="54864"/>
+          </a:xfrm>
+          <a:prstGeom prst="rect">
+            <a:avLst/>
+          </a:prstGeom>
+          <a:solidFill>
+            <a:srgbClr val="2A9D8F"/>
+          </a:solidFill>
+          <a:ln/>
+        </p:spPr>
+      </p:sp>
+      <p:sp>
+        <p:nvSpPr>
+          <p:cNvPr id="11" name="Text 9"/>
+          <p:cNvSpPr/>
+          <p:nvPr/>
+        </p:nvSpPr>
+        <p:spPr>
+          <a:xfrm>
+            <a:off x="3429000" y="1325880"/>
+            <a:ext cx="2286000" cy="365760"/>
+          </a:xfrm>
+          <a:prstGeom prst="rect">
+            <a:avLst/>
+          </a:prstGeom>
+          <a:noFill/>
+          <a:ln/>
+        </p:spPr>
+        <p:txBody>
+          <a:bodyPr wrap="square" rtlCol="0" anchor="ctr"/>
+          <a:lstStyle/>
+          <a:p>
+            <a:pPr indent="0" marL="0">
+              <a:buNone/>
             </a:pPr>
             <a:r>
-              <a:rPr lang="en-US" sz="1500" dirty="0">
+              <a:rPr lang="en-US" sz="1400" b="1" dirty="0">
+                <a:solidFill>
+                  <a:srgbClr val="1B2A4A"/>
+                </a:solidFill>
+                <a:latin typeface="Calibri" pitchFamily="34" charset="0"/>
+                <a:ea typeface="Calibri" pitchFamily="34" charset="-122"/>
+                <a:cs typeface="Calibri" pitchFamily="34" charset="-120"/>
+              </a:rPr>
+              <a:t>Changes of State</a:t>
+            </a:r>
+            <a:endParaRPr lang="en-US" sz="1400" dirty="0"/>
+          </a:p>
+        </p:txBody>
+      </p:sp>
+      <p:sp>
+        <p:nvSpPr>
+          <p:cNvPr id="12" name="Text 10"/>
+          <p:cNvSpPr/>
+          <p:nvPr/>
+        </p:nvSpPr>
+        <p:spPr>
+          <a:xfrm>
+            <a:off x="3429000" y="1737360"/>
+            <a:ext cx="2286000" cy="1097280"/>
+          </a:xfrm>
+          <a:prstGeom prst="rect">
+            <a:avLst/>
+          </a:prstGeom>
+          <a:noFill/>
+          <a:ln/>
+        </p:spPr>
+        <p:txBody>
+          <a:bodyPr wrap="square" rtlCol="0" anchor="t"/>
+          <a:lstStyle/>
+          <a:p>
+            <a:pPr indent="0" marL="0">
+              <a:buNone/>
+            </a:pPr>
+            <a:r>
+              <a:rPr lang="en-US" sz="1100" dirty="0">
                 <a:solidFill>
                   <a:srgbClr val="3D3A36"/>
                 </a:solidFill>
@@ -1606,20 +1685,129 @@
                 <a:ea typeface="Calibri" pitchFamily="34" charset="-122"/>
                 <a:cs typeface="Calibri" pitchFamily="34" charset="-120"/>
               </a:rPr>
-              <a:t>Solid: fixed, vibrate | Liquid: close, slide | Gas: far, fast</a:t>
-            </a:r>
-            <a:endParaRPr lang="en-US" sz="1500" dirty="0"/>
-          </a:p>
-          <a:p>
-            <a:pPr marL="342900" indent="-342900">
-              <a:spcAft>
-                <a:spcPts val="800"/>
-              </a:spcAft>
-              <a:buSzPct val="100000"/>
-              <a:buChar char="•"/>
+              <a:t>Melting, freezing, evaporation, condensation, sublimation, deposition. Physical changes — reversible. Temperature flat during change.</a:t>
+            </a:r>
+            <a:endParaRPr lang="en-US" sz="1100" dirty="0"/>
+          </a:p>
+        </p:txBody>
+      </p:sp>
+      <p:sp>
+        <p:nvSpPr>
+          <p:cNvPr id="13" name="Shape 11"/>
+          <p:cNvSpPr/>
+          <p:nvPr/>
+        </p:nvSpPr>
+        <p:spPr>
+          <a:xfrm>
+            <a:off x="6126480" y="1188720"/>
+            <a:ext cx="2560320" cy="1828800"/>
+          </a:xfrm>
+          <a:prstGeom prst="rect">
+            <a:avLst/>
+          </a:prstGeom>
+          <a:solidFill>
+            <a:srgbClr val="FFFFFF"/>
+          </a:solidFill>
+          <a:ln w="12700">
+            <a:solidFill>
+              <a:srgbClr val="E5E2DC"/>
+            </a:solidFill>
+            <a:prstDash val="solid"/>
+          </a:ln>
+          <a:effectLst>
+            <a:outerShdw sx="100000" sy="100000" kx="0" ky="0" algn="bl" rotWithShape="0" blurRad="50800" dist="25400" dir="8100000">
+              <a:srgbClr val="000000">
+                <a:alpha val="10000"/>
+              </a:srgbClr>
+            </a:outerShdw>
+          </a:effectLst>
+        </p:spPr>
+      </p:sp>
+      <p:sp>
+        <p:nvSpPr>
+          <p:cNvPr id="14" name="Shape 12"/>
+          <p:cNvSpPr/>
+          <p:nvPr/>
+        </p:nvSpPr>
+        <p:spPr>
+          <a:xfrm>
+            <a:off x="6126480" y="1188720"/>
+            <a:ext cx="2560320" cy="54864"/>
+          </a:xfrm>
+          <a:prstGeom prst="rect">
+            <a:avLst/>
+          </a:prstGeom>
+          <a:solidFill>
+            <a:srgbClr val="2A9D8F"/>
+          </a:solidFill>
+          <a:ln/>
+        </p:spPr>
+      </p:sp>
+      <p:sp>
+        <p:nvSpPr>
+          <p:cNvPr id="15" name="Text 13"/>
+          <p:cNvSpPr/>
+          <p:nvPr/>
+        </p:nvSpPr>
+        <p:spPr>
+          <a:xfrm>
+            <a:off x="6263640" y="1325880"/>
+            <a:ext cx="2286000" cy="365760"/>
+          </a:xfrm>
+          <a:prstGeom prst="rect">
+            <a:avLst/>
+          </a:prstGeom>
+          <a:noFill/>
+          <a:ln/>
+        </p:spPr>
+        <p:txBody>
+          <a:bodyPr wrap="square" rtlCol="0" anchor="ctr"/>
+          <a:lstStyle/>
+          <a:p>
+            <a:pPr indent="0" marL="0">
+              <a:buNone/>
             </a:pPr>
             <a:r>
-              <a:rPr lang="en-US" sz="1500" dirty="0">
+              <a:rPr lang="en-US" sz="1400" b="1" dirty="0">
+                <a:solidFill>
+                  <a:srgbClr val="1B2A4A"/>
+                </a:solidFill>
+                <a:latin typeface="Calibri" pitchFamily="34" charset="0"/>
+                <a:ea typeface="Calibri" pitchFamily="34" charset="-122"/>
+                <a:cs typeface="Calibri" pitchFamily="34" charset="-120"/>
+              </a:rPr>
+              <a:t>Density</a:t>
+            </a:r>
+            <a:endParaRPr lang="en-US" sz="1400" dirty="0"/>
+          </a:p>
+        </p:txBody>
+      </p:sp>
+      <p:sp>
+        <p:nvSpPr>
+          <p:cNvPr id="16" name="Text 14"/>
+          <p:cNvSpPr/>
+          <p:nvPr/>
+        </p:nvSpPr>
+        <p:spPr>
+          <a:xfrm>
+            <a:off x="6263640" y="1737360"/>
+            <a:ext cx="2286000" cy="1097280"/>
+          </a:xfrm>
+          <a:prstGeom prst="rect">
+            <a:avLst/>
+          </a:prstGeom>
+          <a:noFill/>
+          <a:ln/>
+        </p:spPr>
+        <p:txBody>
+          <a:bodyPr wrap="square" rtlCol="0" anchor="t"/>
+          <a:lstStyle/>
+          <a:p>
+            <a:pPr indent="0" marL="0">
+              <a:buNone/>
+            </a:pPr>
+            <a:r>
+              <a:rPr lang="en-US" sz="1100" dirty="0">
                 <a:solidFill>
                   <a:srgbClr val="3D3A36"/>
                 </a:solidFill>
@@ -1627,86 +1815,9 @@
                 <a:ea typeface="Calibri" pitchFamily="34" charset="-122"/>
                 <a:cs typeface="Calibri" pitchFamily="34" charset="-120"/>
               </a:rPr>
-              <a:t>More energy = faster particles = higher temperature</a:t>
-            </a:r>
-            <a:endParaRPr lang="en-US" sz="1500" dirty="0"/>
-          </a:p>
-          <a:p>
-            <a:pPr marL="342900" indent="-342900">
-              <a:spcAft>
-                <a:spcPts val="800"/>
-              </a:spcAft>
-              <a:buSzPct val="100000"/>
-              <a:buChar char="•"/>
-            </a:pPr>
-            <a:r>
-              <a:rPr lang="en-US" sz="1500" dirty="0">
-                <a:solidFill>
-                  <a:srgbClr val="3D3A36"/>
-                </a:solidFill>
-                <a:latin typeface="Calibri" pitchFamily="34" charset="0"/>
-                <a:ea typeface="Calibri" pitchFamily="34" charset="-122"/>
-                <a:cs typeface="Calibri" pitchFamily="34" charset="-120"/>
-              </a:rPr>
-              <a:t>Gases can be compressed; solids and liquids cannot</a:t>
-            </a:r>
-            <a:endParaRPr lang="en-US" sz="1500" dirty="0"/>
-          </a:p>
-        </p:txBody>
-      </p:sp>
-      <p:sp>
-        <p:nvSpPr>
-          <p:cNvPr id="5" name="Shape 3"/>
-          <p:cNvSpPr/>
-          <p:nvPr/>
-        </p:nvSpPr>
-        <p:spPr>
-          <a:xfrm>
-            <a:off x="548640" y="4754880"/>
-            <a:ext cx="8046720" cy="9144"/>
-          </a:xfrm>
-          <a:prstGeom prst="rect">
-            <a:avLst/>
-          </a:prstGeom>
-          <a:solidFill>
-            <a:srgbClr val="F3F1EE"/>
-          </a:solidFill>
-          <a:ln/>
-        </p:spPr>
-      </p:sp>
-      <p:sp>
-        <p:nvSpPr>
-          <p:cNvPr id="6" name="Text 4"/>
-          <p:cNvSpPr/>
-          <p:nvPr/>
-        </p:nvSpPr>
-        <p:spPr>
-          <a:xfrm>
-            <a:off x="548640" y="4800600"/>
-            <a:ext cx="3657600" cy="274320"/>
-          </a:xfrm>
-          <a:prstGeom prst="rect">
-            <a:avLst/>
-          </a:prstGeom>
-          <a:noFill/>
-          <a:ln/>
-        </p:spPr>
-        <p:txBody>
-          <a:bodyPr wrap="square" rtlCol="0" anchor="ctr"/>
-          <a:lstStyle/>
-          <a:p>
-            <a:pPr indent="0" marL="0">
-              <a:buNone/>
-            </a:pPr>
-            <a:r>
-              <a:rPr lang="en-US" sz="800" dirty="0">
-                <a:solidFill>
-                  <a:srgbClr val="9B9690"/>
-                </a:solidFill>
-              </a:rPr>
-              <a:t>mrzocchi.com</a:t>
-            </a:r>
-            <a:endParaRPr lang="en-US" sz="800" dirty="0"/>
+              <a:t>Density = mass ÷ volume. Solid &gt; liquid &gt; gas (usually). Exception: ice floats because it's less dense than water.</a:t>
+            </a:r>
+            <a:endParaRPr lang="en-US" sz="1100" dirty="0"/>
           </a:p>
         </p:txBody>
       </p:sp>
@@ -1724,7 +1835,7 @@
     <p:bg>
       <p:bgPr>
         <a:solidFill>
-          <a:srgbClr val="FFFFFF"/>
+          <a:srgbClr val="FAF8F5"/>
         </a:solidFill>
       </p:bgPr>
     </p:bg>
@@ -1770,8 +1881,8 @@
         </p:nvSpPr>
         <p:spPr>
           <a:xfrm>
-            <a:off x="548640" y="274320"/>
-            <a:ext cx="8046720" cy="640080"/>
+            <a:off x="7772400" y="4709160"/>
+            <a:ext cx="1097280" cy="320040"/>
           </a:xfrm>
           <a:prstGeom prst="rect">
             <a:avLst/>
@@ -1780,7 +1891,46 @@
           <a:ln/>
         </p:spPr>
         <p:txBody>
-          <a:bodyPr wrap="square" lIns="0" tIns="0" rIns="0" bIns="0" rtlCol="0" anchor="ctr"/>
+          <a:bodyPr wrap="square" rtlCol="0" anchor="ctr"/>
+          <a:lstStyle/>
+          <a:p>
+            <a:pPr algn="r" indent="0" marL="0">
+              <a:buNone/>
+            </a:pPr>
+            <a:r>
+              <a:rPr lang="en-US" sz="900" dirty="0">
+                <a:solidFill>
+                  <a:srgbClr val="6B6660"/>
+                </a:solidFill>
+                <a:latin typeface="Calibri" pitchFamily="34" charset="0"/>
+                <a:ea typeface="Calibri" pitchFamily="34" charset="-122"/>
+                <a:cs typeface="Calibri" pitchFamily="34" charset="-120"/>
+              </a:rPr>
+              <a:t>3 / 4</a:t>
+            </a:r>
+            <a:endParaRPr lang="en-US" sz="900" dirty="0"/>
+          </a:p>
+        </p:txBody>
+      </p:sp>
+      <p:sp>
+        <p:nvSpPr>
+          <p:cNvPr id="4" name="Text 2"/>
+          <p:cNvSpPr/>
+          <p:nvPr/>
+        </p:nvSpPr>
+        <p:spPr>
+          <a:xfrm>
+            <a:off x="457200" y="274320"/>
+            <a:ext cx="8229600" cy="640080"/>
+          </a:xfrm>
+          <a:prstGeom prst="rect">
+            <a:avLst/>
+          </a:prstGeom>
+          <a:noFill/>
+          <a:ln/>
+        </p:spPr>
+        <p:txBody>
+          <a:bodyPr wrap="square" rtlCol="0" anchor="ctr"/>
           <a:lstStyle/>
           <a:p>
             <a:pPr indent="0" marL="0">
@@ -1795,7 +1945,7 @@
                 <a:ea typeface="Georgia" pitchFamily="34" charset="-122"/>
                 <a:cs typeface="Georgia" pitchFamily="34" charset="-120"/>
               </a:rPr>
-              <a:t>Changes of State</a:t>
+              <a:t>Mixtures &amp; Separating</a:t>
             </a:r>
             <a:endParaRPr lang="en-US" sz="2600" dirty="0"/>
           </a:p>
@@ -1803,14 +1953,66 @@
       </p:sp>
       <p:sp>
         <p:nvSpPr>
-          <p:cNvPr id="4" name="Text 2"/>
-          <p:cNvSpPr/>
-          <p:nvPr/>
-        </p:nvSpPr>
-        <p:spPr>
-          <a:xfrm>
-            <a:off x="548640" y="1097280"/>
-            <a:ext cx="8046720" cy="3474720"/>
+          <p:cNvPr id="5" name="Shape 3"/>
+          <p:cNvSpPr/>
+          <p:nvPr/>
+        </p:nvSpPr>
+        <p:spPr>
+          <a:xfrm>
+            <a:off x="457200" y="1188720"/>
+            <a:ext cx="2560320" cy="1828800"/>
+          </a:xfrm>
+          <a:prstGeom prst="rect">
+            <a:avLst/>
+          </a:prstGeom>
+          <a:solidFill>
+            <a:srgbClr val="FFFFFF"/>
+          </a:solidFill>
+          <a:ln w="12700">
+            <a:solidFill>
+              <a:srgbClr val="E5E2DC"/>
+            </a:solidFill>
+            <a:prstDash val="solid"/>
+          </a:ln>
+          <a:effectLst>
+            <a:outerShdw sx="100000" sy="100000" kx="0" ky="0" algn="bl" rotWithShape="0" blurRad="50800" dist="25400" dir="8100000">
+              <a:srgbClr val="000000">
+                <a:alpha val="10000"/>
+              </a:srgbClr>
+            </a:outerShdw>
+          </a:effectLst>
+        </p:spPr>
+      </p:sp>
+      <p:sp>
+        <p:nvSpPr>
+          <p:cNvPr id="6" name="Shape 4"/>
+          <p:cNvSpPr/>
+          <p:nvPr/>
+        </p:nvSpPr>
+        <p:spPr>
+          <a:xfrm>
+            <a:off x="457200" y="1188720"/>
+            <a:ext cx="2560320" cy="54864"/>
+          </a:xfrm>
+          <a:prstGeom prst="rect">
+            <a:avLst/>
+          </a:prstGeom>
+          <a:solidFill>
+            <a:srgbClr val="2A9D8F"/>
+          </a:solidFill>
+          <a:ln/>
+        </p:spPr>
+      </p:sp>
+      <p:sp>
+        <p:nvSpPr>
+          <p:cNvPr id="7" name="Text 5"/>
+          <p:cNvSpPr/>
+          <p:nvPr/>
+        </p:nvSpPr>
+        <p:spPr>
+          <a:xfrm>
+            <a:off x="594360" y="1325880"/>
+            <a:ext cx="2286000" cy="365760"/>
           </a:xfrm>
           <a:prstGeom prst="rect">
             <a:avLst/>
@@ -1819,18 +2021,53 @@
           <a:ln/>
         </p:spPr>
         <p:txBody>
+          <a:bodyPr wrap="square" rtlCol="0" anchor="ctr"/>
+          <a:lstStyle/>
+          <a:p>
+            <a:pPr indent="0" marL="0">
+              <a:buNone/>
+            </a:pPr>
+            <a:r>
+              <a:rPr lang="en-US" sz="1400" b="1" dirty="0">
+                <a:solidFill>
+                  <a:srgbClr val="1B2A4A"/>
+                </a:solidFill>
+                <a:latin typeface="Calibri" pitchFamily="34" charset="0"/>
+                <a:ea typeface="Calibri" pitchFamily="34" charset="-122"/>
+                <a:cs typeface="Calibri" pitchFamily="34" charset="-120"/>
+              </a:rPr>
+              <a:t>Mixtures</a:t>
+            </a:r>
+            <a:endParaRPr lang="en-US" sz="1400" dirty="0"/>
+          </a:p>
+        </p:txBody>
+      </p:sp>
+      <p:sp>
+        <p:nvSpPr>
+          <p:cNvPr id="8" name="Text 6"/>
+          <p:cNvSpPr/>
+          <p:nvPr/>
+        </p:nvSpPr>
+        <p:spPr>
+          <a:xfrm>
+            <a:off x="594360" y="1737360"/>
+            <a:ext cx="2286000" cy="1097280"/>
+          </a:xfrm>
+          <a:prstGeom prst="rect">
+            <a:avLst/>
+          </a:prstGeom>
+          <a:noFill/>
+          <a:ln/>
+        </p:spPr>
+        <p:txBody>
           <a:bodyPr wrap="square" rtlCol="0" anchor="t"/>
           <a:lstStyle/>
           <a:p>
-            <a:pPr marL="342900" indent="-342900">
-              <a:spcAft>
-                <a:spcPts val="800"/>
-              </a:spcAft>
-              <a:buSzPct val="100000"/>
-              <a:buChar char="•"/>
+            <a:pPr indent="0" marL="0">
+              <a:buNone/>
             </a:pPr>
             <a:r>
-              <a:rPr lang="en-US" sz="1500" dirty="0">
+              <a:rPr lang="en-US" sz="1100" dirty="0">
                 <a:solidFill>
                   <a:srgbClr val="3D3A36"/>
                 </a:solidFill>
@@ -1838,20 +2075,129 @@
                 <a:ea typeface="Calibri" pitchFamily="34" charset="-122"/>
                 <a:cs typeface="Calibri" pitchFamily="34" charset="-120"/>
               </a:rPr>
-              <a:t>Melting (solid→liquid), Boiling (liquid→gas), Condensation (gas→liquid), Freezing (liquid→solid)</a:t>
-            </a:r>
-            <a:endParaRPr lang="en-US" sz="1500" dirty="0"/>
-          </a:p>
-          <a:p>
-            <a:pPr marL="342900" indent="-342900">
-              <a:spcAft>
-                <a:spcPts val="800"/>
-              </a:spcAft>
-              <a:buSzPct val="100000"/>
-              <a:buChar char="•"/>
+              <a:t>Not chemically bonded. Solutions: solute + solvent. Saturated = no more dissolves. Faster dissolving: heat, stir, crush.</a:t>
+            </a:r>
+            <a:endParaRPr lang="en-US" sz="1100" dirty="0"/>
+          </a:p>
+        </p:txBody>
+      </p:sp>
+      <p:sp>
+        <p:nvSpPr>
+          <p:cNvPr id="9" name="Shape 7"/>
+          <p:cNvSpPr/>
+          <p:nvPr/>
+        </p:nvSpPr>
+        <p:spPr>
+          <a:xfrm>
+            <a:off x="3291840" y="1188720"/>
+            <a:ext cx="2560320" cy="1828800"/>
+          </a:xfrm>
+          <a:prstGeom prst="rect">
+            <a:avLst/>
+          </a:prstGeom>
+          <a:solidFill>
+            <a:srgbClr val="FFFFFF"/>
+          </a:solidFill>
+          <a:ln w="12700">
+            <a:solidFill>
+              <a:srgbClr val="E5E2DC"/>
+            </a:solidFill>
+            <a:prstDash val="solid"/>
+          </a:ln>
+          <a:effectLst>
+            <a:outerShdw sx="100000" sy="100000" kx="0" ky="0" algn="bl" rotWithShape="0" blurRad="50800" dist="25400" dir="8100000">
+              <a:srgbClr val="000000">
+                <a:alpha val="10000"/>
+              </a:srgbClr>
+            </a:outerShdw>
+          </a:effectLst>
+        </p:spPr>
+      </p:sp>
+      <p:sp>
+        <p:nvSpPr>
+          <p:cNvPr id="10" name="Shape 8"/>
+          <p:cNvSpPr/>
+          <p:nvPr/>
+        </p:nvSpPr>
+        <p:spPr>
+          <a:xfrm>
+            <a:off x="3291840" y="1188720"/>
+            <a:ext cx="2560320" cy="54864"/>
+          </a:xfrm>
+          <a:prstGeom prst="rect">
+            <a:avLst/>
+          </a:prstGeom>
+          <a:solidFill>
+            <a:srgbClr val="2A9D8F"/>
+          </a:solidFill>
+          <a:ln/>
+        </p:spPr>
+      </p:sp>
+      <p:sp>
+        <p:nvSpPr>
+          <p:cNvPr id="11" name="Text 9"/>
+          <p:cNvSpPr/>
+          <p:nvPr/>
+        </p:nvSpPr>
+        <p:spPr>
+          <a:xfrm>
+            <a:off x="3429000" y="1325880"/>
+            <a:ext cx="2286000" cy="365760"/>
+          </a:xfrm>
+          <a:prstGeom prst="rect">
+            <a:avLst/>
+          </a:prstGeom>
+          <a:noFill/>
+          <a:ln/>
+        </p:spPr>
+        <p:txBody>
+          <a:bodyPr wrap="square" rtlCol="0" anchor="ctr"/>
+          <a:lstStyle/>
+          <a:p>
+            <a:pPr indent="0" marL="0">
+              <a:buNone/>
             </a:pPr>
             <a:r>
-              <a:rPr lang="en-US" sz="1500" dirty="0">
+              <a:rPr lang="en-US" sz="1400" b="1" dirty="0">
+                <a:solidFill>
+                  <a:srgbClr val="1B2A4A"/>
+                </a:solidFill>
+                <a:latin typeface="Calibri" pitchFamily="34" charset="0"/>
+                <a:ea typeface="Calibri" pitchFamily="34" charset="-122"/>
+                <a:cs typeface="Calibri" pitchFamily="34" charset="-120"/>
+              </a:rPr>
+              <a:t>Separation Methods</a:t>
+            </a:r>
+            <a:endParaRPr lang="en-US" sz="1400" dirty="0"/>
+          </a:p>
+        </p:txBody>
+      </p:sp>
+      <p:sp>
+        <p:nvSpPr>
+          <p:cNvPr id="12" name="Text 10"/>
+          <p:cNvSpPr/>
+          <p:nvPr/>
+        </p:nvSpPr>
+        <p:spPr>
+          <a:xfrm>
+            <a:off x="3429000" y="1737360"/>
+            <a:ext cx="2286000" cy="1097280"/>
+          </a:xfrm>
+          <a:prstGeom prst="rect">
+            <a:avLst/>
+          </a:prstGeom>
+          <a:noFill/>
+          <a:ln/>
+        </p:spPr>
+        <p:txBody>
+          <a:bodyPr wrap="square" rtlCol="0" anchor="t"/>
+          <a:lstStyle/>
+          <a:p>
+            <a:pPr indent="0" marL="0">
+              <a:buNone/>
+            </a:pPr>
+            <a:r>
+              <a:rPr lang="en-US" sz="1100" dirty="0">
                 <a:solidFill>
                   <a:srgbClr val="3D3A36"/>
                 </a:solidFill>
@@ -1859,20 +2205,129 @@
                 <a:ea typeface="Calibri" pitchFamily="34" charset="-122"/>
                 <a:cs typeface="Calibri" pitchFamily="34" charset="-120"/>
               </a:rPr>
-              <a:t>Adding heat = particles gain energy and move faster</a:t>
-            </a:r>
-            <a:endParaRPr lang="en-US" sz="1500" dirty="0"/>
-          </a:p>
-          <a:p>
-            <a:pPr marL="342900" indent="-342900">
-              <a:spcAft>
-                <a:spcPts val="800"/>
-              </a:spcAft>
-              <a:buSzPct val="100000"/>
-              <a:buChar char="•"/>
+              <a:t>Filtration (insoluble solid). Evaporation (dissolved solid). Distillation (pure liquid). Chromatography (colours). Magnet (magnetic).</a:t>
+            </a:r>
+            <a:endParaRPr lang="en-US" sz="1100" dirty="0"/>
+          </a:p>
+        </p:txBody>
+      </p:sp>
+      <p:sp>
+        <p:nvSpPr>
+          <p:cNvPr id="13" name="Shape 11"/>
+          <p:cNvSpPr/>
+          <p:nvPr/>
+        </p:nvSpPr>
+        <p:spPr>
+          <a:xfrm>
+            <a:off x="6126480" y="1188720"/>
+            <a:ext cx="2560320" cy="1828800"/>
+          </a:xfrm>
+          <a:prstGeom prst="rect">
+            <a:avLst/>
+          </a:prstGeom>
+          <a:solidFill>
+            <a:srgbClr val="FFFFFF"/>
+          </a:solidFill>
+          <a:ln w="12700">
+            <a:solidFill>
+              <a:srgbClr val="E5E2DC"/>
+            </a:solidFill>
+            <a:prstDash val="solid"/>
+          </a:ln>
+          <a:effectLst>
+            <a:outerShdw sx="100000" sy="100000" kx="0" ky="0" algn="bl" rotWithShape="0" blurRad="50800" dist="25400" dir="8100000">
+              <a:srgbClr val="000000">
+                <a:alpha val="10000"/>
+              </a:srgbClr>
+            </a:outerShdw>
+          </a:effectLst>
+        </p:spPr>
+      </p:sp>
+      <p:sp>
+        <p:nvSpPr>
+          <p:cNvPr id="14" name="Shape 12"/>
+          <p:cNvSpPr/>
+          <p:nvPr/>
+        </p:nvSpPr>
+        <p:spPr>
+          <a:xfrm>
+            <a:off x="6126480" y="1188720"/>
+            <a:ext cx="2560320" cy="54864"/>
+          </a:xfrm>
+          <a:prstGeom prst="rect">
+            <a:avLst/>
+          </a:prstGeom>
+          <a:solidFill>
+            <a:srgbClr val="2A9D8F"/>
+          </a:solidFill>
+          <a:ln/>
+        </p:spPr>
+      </p:sp>
+      <p:sp>
+        <p:nvSpPr>
+          <p:cNvPr id="15" name="Text 13"/>
+          <p:cNvSpPr/>
+          <p:nvPr/>
+        </p:nvSpPr>
+        <p:spPr>
+          <a:xfrm>
+            <a:off x="6263640" y="1325880"/>
+            <a:ext cx="2286000" cy="365760"/>
+          </a:xfrm>
+          <a:prstGeom prst="rect">
+            <a:avLst/>
+          </a:prstGeom>
+          <a:noFill/>
+          <a:ln/>
+        </p:spPr>
+        <p:txBody>
+          <a:bodyPr wrap="square" rtlCol="0" anchor="ctr"/>
+          <a:lstStyle/>
+          <a:p>
+            <a:pPr indent="0" marL="0">
+              <a:buNone/>
             </a:pPr>
             <a:r>
-              <a:rPr lang="en-US" sz="1500" dirty="0">
+              <a:rPr lang="en-US" sz="1400" b="1" dirty="0">
+                <a:solidFill>
+                  <a:srgbClr val="1B2A4A"/>
+                </a:solidFill>
+                <a:latin typeface="Calibri" pitchFamily="34" charset="0"/>
+                <a:ea typeface="Calibri" pitchFamily="34" charset="-122"/>
+                <a:cs typeface="Calibri" pitchFamily="34" charset="-120"/>
+              </a:rPr>
+              <a:t>Key Terms</a:t>
+            </a:r>
+            <a:endParaRPr lang="en-US" sz="1400" dirty="0"/>
+          </a:p>
+        </p:txBody>
+      </p:sp>
+      <p:sp>
+        <p:nvSpPr>
+          <p:cNvPr id="16" name="Text 14"/>
+          <p:cNvSpPr/>
+          <p:nvPr/>
+        </p:nvSpPr>
+        <p:spPr>
+          <a:xfrm>
+            <a:off x="6263640" y="1737360"/>
+            <a:ext cx="2286000" cy="1097280"/>
+          </a:xfrm>
+          <a:prstGeom prst="rect">
+            <a:avLst/>
+          </a:prstGeom>
+          <a:noFill/>
+          <a:ln/>
+        </p:spPr>
+        <p:txBody>
+          <a:bodyPr wrap="square" rtlCol="0" anchor="t"/>
+          <a:lstStyle/>
+          <a:p>
+            <a:pPr indent="0" marL="0">
+              <a:buNone/>
+            </a:pPr>
+            <a:r>
+              <a:rPr lang="en-US" sz="1100" dirty="0">
                 <a:solidFill>
                   <a:srgbClr val="3D3A36"/>
                 </a:solidFill>
@@ -1880,86 +2335,9 @@
                 <a:ea typeface="Calibri" pitchFamily="34" charset="-122"/>
                 <a:cs typeface="Calibri" pitchFamily="34" charset="-120"/>
               </a:rPr>
-              <a:t>Temperature stays constant DURING a state change</a:t>
-            </a:r>
-            <a:endParaRPr lang="en-US" sz="1500" dirty="0"/>
-          </a:p>
-          <a:p>
-            <a:pPr marL="342900" indent="-342900">
-              <a:spcAft>
-                <a:spcPts val="800"/>
-              </a:spcAft>
-              <a:buSzPct val="100000"/>
-              <a:buChar char="•"/>
-            </a:pPr>
-            <a:r>
-              <a:rPr lang="en-US" sz="1500" dirty="0">
-                <a:solidFill>
-                  <a:srgbClr val="3D3A36"/>
-                </a:solidFill>
-                <a:latin typeface="Calibri" pitchFamily="34" charset="0"/>
-                <a:ea typeface="Calibri" pitchFamily="34" charset="-122"/>
-                <a:cs typeface="Calibri" pitchFamily="34" charset="-120"/>
-              </a:rPr>
-              <a:t>Sublimation: solid→gas directly (e.g., dry ice)</a:t>
-            </a:r>
-            <a:endParaRPr lang="en-US" sz="1500" dirty="0"/>
-          </a:p>
-        </p:txBody>
-      </p:sp>
-      <p:sp>
-        <p:nvSpPr>
-          <p:cNvPr id="5" name="Shape 3"/>
-          <p:cNvSpPr/>
-          <p:nvPr/>
-        </p:nvSpPr>
-        <p:spPr>
-          <a:xfrm>
-            <a:off x="548640" y="4754880"/>
-            <a:ext cx="8046720" cy="9144"/>
-          </a:xfrm>
-          <a:prstGeom prst="rect">
-            <a:avLst/>
-          </a:prstGeom>
-          <a:solidFill>
-            <a:srgbClr val="F3F1EE"/>
-          </a:solidFill>
-          <a:ln/>
-        </p:spPr>
-      </p:sp>
-      <p:sp>
-        <p:nvSpPr>
-          <p:cNvPr id="6" name="Text 4"/>
-          <p:cNvSpPr/>
-          <p:nvPr/>
-        </p:nvSpPr>
-        <p:spPr>
-          <a:xfrm>
-            <a:off x="548640" y="4800600"/>
-            <a:ext cx="3657600" cy="274320"/>
-          </a:xfrm>
-          <a:prstGeom prst="rect">
-            <a:avLst/>
-          </a:prstGeom>
-          <a:noFill/>
-          <a:ln/>
-        </p:spPr>
-        <p:txBody>
-          <a:bodyPr wrap="square" rtlCol="0" anchor="ctr"/>
-          <a:lstStyle/>
-          <a:p>
-            <a:pPr indent="0" marL="0">
-              <a:buNone/>
-            </a:pPr>
-            <a:r>
-              <a:rPr lang="en-US" sz="800" dirty="0">
-                <a:solidFill>
-                  <a:srgbClr val="9B9690"/>
-                </a:solidFill>
-              </a:rPr>
-              <a:t>mrzocchi.com</a:t>
-            </a:r>
-            <a:endParaRPr lang="en-US" sz="800" dirty="0"/>
+              <a:t>Solute: dissolves. Solvent: does dissolving. Soluble: can dissolve. Insoluble: can't dissolve. Residue: stays in filter. Filtrate: passes through.</a:t>
+            </a:r>
+            <a:endParaRPr lang="en-US" sz="1100" dirty="0"/>
           </a:p>
         </p:txBody>
       </p:sp>
@@ -1974,533 +2352,6 @@
 <file path=ppt/slides/slide4.xml><?xml version="1.0" encoding="utf-8"?>
 <p:sld xmlns:a="http://schemas.openxmlformats.org/drawingml/2006/main" xmlns:r="http://schemas.openxmlformats.org/officeDocument/2006/relationships" xmlns:p="http://schemas.openxmlformats.org/presentationml/2006/main">
   <p:cSld name="Slide 4">
-    <p:bg>
-      <p:bgPr>
-        <a:solidFill>
-          <a:srgbClr val="FFFFFF"/>
-        </a:solidFill>
-      </p:bgPr>
-    </p:bg>
-    <p:spTree>
-      <p:nvGrpSpPr>
-        <p:cNvPr id="1" name=""/>
-        <p:cNvGrpSpPr/>
-        <p:nvPr/>
-      </p:nvGrpSpPr>
-      <p:grpSpPr>
-        <a:xfrm>
-          <a:off x="0" y="0"/>
-          <a:ext cx="0" cy="0"/>
-          <a:chOff x="0" y="0"/>
-          <a:chExt cx="0" cy="0"/>
-        </a:xfrm>
-      </p:grpSpPr>
-      <p:sp>
-        <p:nvSpPr>
-          <p:cNvPr id="2" name="Shape 0"/>
-          <p:cNvSpPr/>
-          <p:nvPr/>
-        </p:nvSpPr>
-        <p:spPr>
-          <a:xfrm>
-            <a:off x="0" y="0"/>
-            <a:ext cx="9144000" cy="54864"/>
-          </a:xfrm>
-          <a:prstGeom prst="rect">
-            <a:avLst/>
-          </a:prstGeom>
-          <a:solidFill>
-            <a:srgbClr val="2A9D8F"/>
-          </a:solidFill>
-          <a:ln/>
-        </p:spPr>
-      </p:sp>
-      <p:sp>
-        <p:nvSpPr>
-          <p:cNvPr id="3" name="Text 1"/>
-          <p:cNvSpPr/>
-          <p:nvPr/>
-        </p:nvSpPr>
-        <p:spPr>
-          <a:xfrm>
-            <a:off x="548640" y="274320"/>
-            <a:ext cx="8046720" cy="640080"/>
-          </a:xfrm>
-          <a:prstGeom prst="rect">
-            <a:avLst/>
-          </a:prstGeom>
-          <a:noFill/>
-          <a:ln/>
-        </p:spPr>
-        <p:txBody>
-          <a:bodyPr wrap="square" lIns="0" tIns="0" rIns="0" bIns="0" rtlCol="0" anchor="ctr"/>
-          <a:lstStyle/>
-          <a:p>
-            <a:pPr indent="0" marL="0">
-              <a:buNone/>
-            </a:pPr>
-            <a:r>
-              <a:rPr lang="en-US" sz="2600" b="1" dirty="0">
-                <a:solidFill>
-                  <a:srgbClr val="1B2A4A"/>
-                </a:solidFill>
-                <a:latin typeface="Georgia" pitchFamily="34" charset="0"/>
-                <a:ea typeface="Georgia" pitchFamily="34" charset="-122"/>
-                <a:cs typeface="Georgia" pitchFamily="34" charset="-120"/>
-              </a:rPr>
-              <a:t>Mixtures &amp; Solutions</a:t>
-            </a:r>
-            <a:endParaRPr lang="en-US" sz="2600" dirty="0"/>
-          </a:p>
-        </p:txBody>
-      </p:sp>
-      <p:sp>
-        <p:nvSpPr>
-          <p:cNvPr id="4" name="Text 2"/>
-          <p:cNvSpPr/>
-          <p:nvPr/>
-        </p:nvSpPr>
-        <p:spPr>
-          <a:xfrm>
-            <a:off x="548640" y="1097280"/>
-            <a:ext cx="8046720" cy="3474720"/>
-          </a:xfrm>
-          <a:prstGeom prst="rect">
-            <a:avLst/>
-          </a:prstGeom>
-          <a:noFill/>
-          <a:ln/>
-        </p:spPr>
-        <p:txBody>
-          <a:bodyPr wrap="square" rtlCol="0" anchor="t"/>
-          <a:lstStyle/>
-          <a:p>
-            <a:pPr marL="342900" indent="-342900">
-              <a:spcAft>
-                <a:spcPts val="800"/>
-              </a:spcAft>
-              <a:buSzPct val="100000"/>
-              <a:buChar char="•"/>
-            </a:pPr>
-            <a:r>
-              <a:rPr lang="en-US" sz="1500" dirty="0">
-                <a:solidFill>
-                  <a:srgbClr val="3D3A36"/>
-                </a:solidFill>
-                <a:latin typeface="Calibri" pitchFamily="34" charset="0"/>
-                <a:ea typeface="Calibri" pitchFamily="34" charset="-122"/>
-                <a:cs typeface="Calibri" pitchFamily="34" charset="-120"/>
-              </a:rPr>
-              <a:t>Mixture: substances combined but not chemically bonded</a:t>
-            </a:r>
-            <a:endParaRPr lang="en-US" sz="1500" dirty="0"/>
-          </a:p>
-          <a:p>
-            <a:pPr marL="342900" indent="-342900">
-              <a:spcAft>
-                <a:spcPts val="800"/>
-              </a:spcAft>
-              <a:buSzPct val="100000"/>
-              <a:buChar char="•"/>
-            </a:pPr>
-            <a:r>
-              <a:rPr lang="en-US" sz="1500" dirty="0">
-                <a:solidFill>
-                  <a:srgbClr val="3D3A36"/>
-                </a:solidFill>
-                <a:latin typeface="Calibri" pitchFamily="34" charset="0"/>
-                <a:ea typeface="Calibri" pitchFamily="34" charset="-122"/>
-                <a:cs typeface="Calibri" pitchFamily="34" charset="-120"/>
-              </a:rPr>
-              <a:t>Solution = solute (dissolves) + solvent (the liquid)</a:t>
-            </a:r>
-            <a:endParaRPr lang="en-US" sz="1500" dirty="0"/>
-          </a:p>
-          <a:p>
-            <a:pPr marL="342900" indent="-342900">
-              <a:spcAft>
-                <a:spcPts val="800"/>
-              </a:spcAft>
-              <a:buSzPct val="100000"/>
-              <a:buChar char="•"/>
-            </a:pPr>
-            <a:r>
-              <a:rPr lang="en-US" sz="1500" dirty="0">
-                <a:solidFill>
-                  <a:srgbClr val="3D3A36"/>
-                </a:solidFill>
-                <a:latin typeface="Calibri" pitchFamily="34" charset="0"/>
-                <a:ea typeface="Calibri" pitchFamily="34" charset="-122"/>
-                <a:cs typeface="Calibri" pitchFamily="34" charset="-120"/>
-              </a:rPr>
-              <a:t>Soluble = dissolves, Insoluble = doesn't dissolve</a:t>
-            </a:r>
-            <a:endParaRPr lang="en-US" sz="1500" dirty="0"/>
-          </a:p>
-          <a:p>
-            <a:pPr marL="342900" indent="-342900">
-              <a:spcAft>
-                <a:spcPts val="800"/>
-              </a:spcAft>
-              <a:buSzPct val="100000"/>
-              <a:buChar char="•"/>
-            </a:pPr>
-            <a:r>
-              <a:rPr lang="en-US" sz="1500" dirty="0">
-                <a:solidFill>
-                  <a:srgbClr val="3D3A36"/>
-                </a:solidFill>
-                <a:latin typeface="Calibri" pitchFamily="34" charset="0"/>
-                <a:ea typeface="Calibri" pitchFamily="34" charset="-122"/>
-                <a:cs typeface="Calibri" pitchFamily="34" charset="-120"/>
-              </a:rPr>
-              <a:t>Saturated solution: no more solute can dissolve</a:t>
-            </a:r>
-            <a:endParaRPr lang="en-US" sz="1500" dirty="0"/>
-          </a:p>
-        </p:txBody>
-      </p:sp>
-      <p:sp>
-        <p:nvSpPr>
-          <p:cNvPr id="5" name="Shape 3"/>
-          <p:cNvSpPr/>
-          <p:nvPr/>
-        </p:nvSpPr>
-        <p:spPr>
-          <a:xfrm>
-            <a:off x="548640" y="4754880"/>
-            <a:ext cx="8046720" cy="9144"/>
-          </a:xfrm>
-          <a:prstGeom prst="rect">
-            <a:avLst/>
-          </a:prstGeom>
-          <a:solidFill>
-            <a:srgbClr val="F3F1EE"/>
-          </a:solidFill>
-          <a:ln/>
-        </p:spPr>
-      </p:sp>
-      <p:sp>
-        <p:nvSpPr>
-          <p:cNvPr id="6" name="Text 4"/>
-          <p:cNvSpPr/>
-          <p:nvPr/>
-        </p:nvSpPr>
-        <p:spPr>
-          <a:xfrm>
-            <a:off x="548640" y="4800600"/>
-            <a:ext cx="3657600" cy="274320"/>
-          </a:xfrm>
-          <a:prstGeom prst="rect">
-            <a:avLst/>
-          </a:prstGeom>
-          <a:noFill/>
-          <a:ln/>
-        </p:spPr>
-        <p:txBody>
-          <a:bodyPr wrap="square" rtlCol="0" anchor="ctr"/>
-          <a:lstStyle/>
-          <a:p>
-            <a:pPr indent="0" marL="0">
-              <a:buNone/>
-            </a:pPr>
-            <a:r>
-              <a:rPr lang="en-US" sz="800" dirty="0">
-                <a:solidFill>
-                  <a:srgbClr val="9B9690"/>
-                </a:solidFill>
-              </a:rPr>
-              <a:t>mrzocchi.com</a:t>
-            </a:r>
-            <a:endParaRPr lang="en-US" sz="800" dirty="0"/>
-          </a:p>
-        </p:txBody>
-      </p:sp>
-    </p:spTree>
-  </p:cSld>
-  <p:clrMapOvr>
-    <a:masterClrMapping/>
-  </p:clrMapOvr>
-</p:sld>
-</file>
-
-<file path=ppt/slides/slide5.xml><?xml version="1.0" encoding="utf-8"?>
-<p:sld xmlns:a="http://schemas.openxmlformats.org/drawingml/2006/main" xmlns:r="http://schemas.openxmlformats.org/officeDocument/2006/relationships" xmlns:p="http://schemas.openxmlformats.org/presentationml/2006/main">
-  <p:cSld name="Slide 5">
-    <p:bg>
-      <p:bgPr>
-        <a:solidFill>
-          <a:srgbClr val="FFFFFF"/>
-        </a:solidFill>
-      </p:bgPr>
-    </p:bg>
-    <p:spTree>
-      <p:nvGrpSpPr>
-        <p:cNvPr id="1" name=""/>
-        <p:cNvGrpSpPr/>
-        <p:nvPr/>
-      </p:nvGrpSpPr>
-      <p:grpSpPr>
-        <a:xfrm>
-          <a:off x="0" y="0"/>
-          <a:ext cx="0" cy="0"/>
-          <a:chOff x="0" y="0"/>
-          <a:chExt cx="0" cy="0"/>
-        </a:xfrm>
-      </p:grpSpPr>
-      <p:sp>
-        <p:nvSpPr>
-          <p:cNvPr id="2" name="Shape 0"/>
-          <p:cNvSpPr/>
-          <p:nvPr/>
-        </p:nvSpPr>
-        <p:spPr>
-          <a:xfrm>
-            <a:off x="0" y="0"/>
-            <a:ext cx="9144000" cy="54864"/>
-          </a:xfrm>
-          <a:prstGeom prst="rect">
-            <a:avLst/>
-          </a:prstGeom>
-          <a:solidFill>
-            <a:srgbClr val="2A9D8F"/>
-          </a:solidFill>
-          <a:ln/>
-        </p:spPr>
-      </p:sp>
-      <p:sp>
-        <p:nvSpPr>
-          <p:cNvPr id="3" name="Text 1"/>
-          <p:cNvSpPr/>
-          <p:nvPr/>
-        </p:nvSpPr>
-        <p:spPr>
-          <a:xfrm>
-            <a:off x="548640" y="274320"/>
-            <a:ext cx="8046720" cy="640080"/>
-          </a:xfrm>
-          <a:prstGeom prst="rect">
-            <a:avLst/>
-          </a:prstGeom>
-          <a:noFill/>
-          <a:ln/>
-        </p:spPr>
-        <p:txBody>
-          <a:bodyPr wrap="square" lIns="0" tIns="0" rIns="0" bIns="0" rtlCol="0" anchor="ctr"/>
-          <a:lstStyle/>
-          <a:p>
-            <a:pPr indent="0" marL="0">
-              <a:buNone/>
-            </a:pPr>
-            <a:r>
-              <a:rPr lang="en-US" sz="2600" b="1" dirty="0">
-                <a:solidFill>
-                  <a:srgbClr val="1B2A4A"/>
-                </a:solidFill>
-                <a:latin typeface="Georgia" pitchFamily="34" charset="0"/>
-                <a:ea typeface="Georgia" pitchFamily="34" charset="-122"/>
-                <a:cs typeface="Georgia" pitchFamily="34" charset="-120"/>
-              </a:rPr>
-              <a:t>Separating Mixtures</a:t>
-            </a:r>
-            <a:endParaRPr lang="en-US" sz="2600" dirty="0"/>
-          </a:p>
-        </p:txBody>
-      </p:sp>
-      <p:sp>
-        <p:nvSpPr>
-          <p:cNvPr id="4" name="Text 2"/>
-          <p:cNvSpPr/>
-          <p:nvPr/>
-        </p:nvSpPr>
-        <p:spPr>
-          <a:xfrm>
-            <a:off x="548640" y="1097280"/>
-            <a:ext cx="8046720" cy="3474720"/>
-          </a:xfrm>
-          <a:prstGeom prst="rect">
-            <a:avLst/>
-          </a:prstGeom>
-          <a:noFill/>
-          <a:ln/>
-        </p:spPr>
-        <p:txBody>
-          <a:bodyPr wrap="square" rtlCol="0" anchor="t"/>
-          <a:lstStyle/>
-          <a:p>
-            <a:pPr marL="342900" indent="-342900">
-              <a:spcAft>
-                <a:spcPts val="800"/>
-              </a:spcAft>
-              <a:buSzPct val="100000"/>
-              <a:buChar char="•"/>
-            </a:pPr>
-            <a:r>
-              <a:rPr lang="en-US" sz="1500" dirty="0">
-                <a:solidFill>
-                  <a:srgbClr val="3D3A36"/>
-                </a:solidFill>
-                <a:latin typeface="Calibri" pitchFamily="34" charset="0"/>
-                <a:ea typeface="Calibri" pitchFamily="34" charset="-122"/>
-                <a:cs typeface="Calibri" pitchFamily="34" charset="-120"/>
-              </a:rPr>
-              <a:t>Filtration: remove insoluble solids from liquid</a:t>
-            </a:r>
-            <a:endParaRPr lang="en-US" sz="1500" dirty="0"/>
-          </a:p>
-          <a:p>
-            <a:pPr marL="342900" indent="-342900">
-              <a:spcAft>
-                <a:spcPts val="800"/>
-              </a:spcAft>
-              <a:buSzPct val="100000"/>
-              <a:buChar char="•"/>
-            </a:pPr>
-            <a:r>
-              <a:rPr lang="en-US" sz="1500" dirty="0">
-                <a:solidFill>
-                  <a:srgbClr val="3D3A36"/>
-                </a:solidFill>
-                <a:latin typeface="Calibri" pitchFamily="34" charset="0"/>
-                <a:ea typeface="Calibri" pitchFamily="34" charset="-122"/>
-                <a:cs typeface="Calibri" pitchFamily="34" charset="-120"/>
-              </a:rPr>
-              <a:t>Evaporation: recover dissolved solid from solution</a:t>
-            </a:r>
-            <a:endParaRPr lang="en-US" sz="1500" dirty="0"/>
-          </a:p>
-          <a:p>
-            <a:pPr marL="342900" indent="-342900">
-              <a:spcAft>
-                <a:spcPts val="800"/>
-              </a:spcAft>
-              <a:buSzPct val="100000"/>
-              <a:buChar char="•"/>
-            </a:pPr>
-            <a:r>
-              <a:rPr lang="en-US" sz="1500" dirty="0">
-                <a:solidFill>
-                  <a:srgbClr val="3D3A36"/>
-                </a:solidFill>
-                <a:latin typeface="Calibri" pitchFamily="34" charset="0"/>
-                <a:ea typeface="Calibri" pitchFamily="34" charset="-122"/>
-                <a:cs typeface="Calibri" pitchFamily="34" charset="-120"/>
-              </a:rPr>
-              <a:t>Distillation: recover both solid AND liquid</a:t>
-            </a:r>
-            <a:endParaRPr lang="en-US" sz="1500" dirty="0"/>
-          </a:p>
-          <a:p>
-            <a:pPr marL="342900" indent="-342900">
-              <a:spcAft>
-                <a:spcPts val="800"/>
-              </a:spcAft>
-              <a:buSzPct val="100000"/>
-              <a:buChar char="•"/>
-            </a:pPr>
-            <a:r>
-              <a:rPr lang="en-US" sz="1500" dirty="0">
-                <a:solidFill>
-                  <a:srgbClr val="3D3A36"/>
-                </a:solidFill>
-                <a:latin typeface="Calibri" pitchFamily="34" charset="0"/>
-                <a:ea typeface="Calibri" pitchFamily="34" charset="-122"/>
-                <a:cs typeface="Calibri" pitchFamily="34" charset="-120"/>
-              </a:rPr>
-              <a:t>Chromatography: separate colours/dissolved substances</a:t>
-            </a:r>
-            <a:endParaRPr lang="en-US" sz="1500" dirty="0"/>
-          </a:p>
-          <a:p>
-            <a:pPr marL="342900" indent="-342900">
-              <a:spcAft>
-                <a:spcPts val="800"/>
-              </a:spcAft>
-              <a:buSzPct val="100000"/>
-              <a:buChar char="•"/>
-            </a:pPr>
-            <a:r>
-              <a:rPr lang="en-US" sz="1500" dirty="0">
-                <a:solidFill>
-                  <a:srgbClr val="3D3A36"/>
-                </a:solidFill>
-                <a:latin typeface="Calibri" pitchFamily="34" charset="0"/>
-                <a:ea typeface="Calibri" pitchFamily="34" charset="-122"/>
-                <a:cs typeface="Calibri" pitchFamily="34" charset="-120"/>
-              </a:rPr>
-              <a:t>Magnetism: separate magnetic materials</a:t>
-            </a:r>
-            <a:endParaRPr lang="en-US" sz="1500" dirty="0"/>
-          </a:p>
-        </p:txBody>
-      </p:sp>
-      <p:sp>
-        <p:nvSpPr>
-          <p:cNvPr id="5" name="Shape 3"/>
-          <p:cNvSpPr/>
-          <p:nvPr/>
-        </p:nvSpPr>
-        <p:spPr>
-          <a:xfrm>
-            <a:off x="548640" y="4754880"/>
-            <a:ext cx="8046720" cy="9144"/>
-          </a:xfrm>
-          <a:prstGeom prst="rect">
-            <a:avLst/>
-          </a:prstGeom>
-          <a:solidFill>
-            <a:srgbClr val="F3F1EE"/>
-          </a:solidFill>
-          <a:ln/>
-        </p:spPr>
-      </p:sp>
-      <p:sp>
-        <p:nvSpPr>
-          <p:cNvPr id="6" name="Text 4"/>
-          <p:cNvSpPr/>
-          <p:nvPr/>
-        </p:nvSpPr>
-        <p:spPr>
-          <a:xfrm>
-            <a:off x="548640" y="4800600"/>
-            <a:ext cx="3657600" cy="274320"/>
-          </a:xfrm>
-          <a:prstGeom prst="rect">
-            <a:avLst/>
-          </a:prstGeom>
-          <a:noFill/>
-          <a:ln/>
-        </p:spPr>
-        <p:txBody>
-          <a:bodyPr wrap="square" rtlCol="0" anchor="ctr"/>
-          <a:lstStyle/>
-          <a:p>
-            <a:pPr indent="0" marL="0">
-              <a:buNone/>
-            </a:pPr>
-            <a:r>
-              <a:rPr lang="en-US" sz="800" dirty="0">
-                <a:solidFill>
-                  <a:srgbClr val="9B9690"/>
-                </a:solidFill>
-              </a:rPr>
-              <a:t>mrzocchi.com</a:t>
-            </a:r>
-            <a:endParaRPr lang="en-US" sz="800" dirty="0"/>
-          </a:p>
-        </p:txBody>
-      </p:sp>
-    </p:spTree>
-  </p:cSld>
-  <p:clrMapOvr>
-    <a:masterClrMapping/>
-  </p:clrMapOvr>
-</p:sld>
-</file>
-
-<file path=ppt/slides/slide6.xml><?xml version="1.0" encoding="utf-8"?>
-<p:sld xmlns:a="http://schemas.openxmlformats.org/drawingml/2006/main" xmlns:r="http://schemas.openxmlformats.org/officeDocument/2006/relationships" xmlns:p="http://schemas.openxmlformats.org/presentationml/2006/main">
-  <p:cSld name="Slide 6">
     <p:bg>
       <p:bgPr>
         <a:solidFill>
@@ -2531,13 +2382,13 @@
         <p:spPr>
           <a:xfrm>
             <a:off x="0" y="0"/>
-            <a:ext cx="9144000" cy="54864"/>
-          </a:xfrm>
-          <a:prstGeom prst="rect">
-            <a:avLst/>
-          </a:prstGeom>
-          <a:solidFill>
-            <a:srgbClr val="2A9D8F"/>
+            <a:ext cx="109728" cy="5143500"/>
+          </a:xfrm>
+          <a:prstGeom prst="rect">
+            <a:avLst/>
+          </a:prstGeom>
+          <a:solidFill>
+            <a:srgbClr val="E9C46A"/>
           </a:solidFill>
           <a:ln/>
         </p:spPr>
@@ -2550,8 +2401,8 @@
         </p:nvSpPr>
         <p:spPr>
           <a:xfrm>
-            <a:off x="548640" y="457200"/>
-            <a:ext cx="8046720" cy="640080"/>
+            <a:off x="731520" y="457200"/>
+            <a:ext cx="7772400" cy="731520"/>
           </a:xfrm>
           <a:prstGeom prst="rect">
             <a:avLst/>
@@ -2567,7 +2418,7 @@
               <a:buNone/>
             </a:pPr>
             <a:r>
-              <a:rPr lang="en-US" sz="2800" b="1" dirty="0">
+              <a:rPr lang="en-US" sz="3200" b="1" dirty="0">
                 <a:solidFill>
                   <a:srgbClr val="FFFFFF"/>
                 </a:solidFill>
@@ -2577,7 +2428,7 @@
               </a:rPr>
               <a:t>Key Takeaways</a:t>
             </a:r>
-            <a:endParaRPr lang="en-US" sz="2800" dirty="0"/>
+            <a:endParaRPr lang="en-US" sz="3200" dirty="0"/>
           </a:p>
         </p:txBody>
       </p:sp>
@@ -2589,8 +2440,8 @@
         </p:nvSpPr>
         <p:spPr>
           <a:xfrm>
-            <a:off x="731520" y="1371600"/>
-            <a:ext cx="7680960" cy="3200400"/>
+            <a:off x="731520" y="1463040"/>
+            <a:ext cx="7772400" cy="3200400"/>
           </a:xfrm>
           <a:prstGeom prst="rect">
             <a:avLst/>
@@ -2610,7 +2461,7 @@
               <a:buChar char="•"/>
             </a:pPr>
             <a:r>
-              <a:rPr lang="en-US" sz="1600" dirty="0">
+              <a:rPr lang="en-US" sz="1500" dirty="0">
                 <a:solidFill>
                   <a:srgbClr val="CADCFC"/>
                 </a:solidFill>
@@ -2618,9 +2469,9 @@
                 <a:ea typeface="Calibri" pitchFamily="34" charset="-122"/>
                 <a:cs typeface="Calibri" pitchFamily="34" charset="-120"/>
               </a:rPr>
-              <a:t>Particles explain solid/liquid/gas behaviour</a:t>
-            </a:r>
-            <a:endParaRPr lang="en-US" sz="1600" dirty="0"/>
+              <a:t>Particles: solid (vibrate), liquid (slide), gas (fast, far apart)</a:t>
+            </a:r>
+            <a:endParaRPr lang="en-US" sz="1500" dirty="0"/>
           </a:p>
           <a:p>
             <a:pPr marL="342900" indent="-342900">
@@ -2631,7 +2482,7 @@
               <a:buChar char="•"/>
             </a:pPr>
             <a:r>
-              <a:rPr lang="en-US" sz="1600" dirty="0">
+              <a:rPr lang="en-US" sz="1500" dirty="0">
                 <a:solidFill>
                   <a:srgbClr val="CADCFC"/>
                 </a:solidFill>
@@ -2639,9 +2490,9 @@
                 <a:ea typeface="Calibri" pitchFamily="34" charset="-122"/>
                 <a:cs typeface="Calibri" pitchFamily="34" charset="-120"/>
               </a:rPr>
-              <a:t>State changes need energy added or removed</a:t>
-            </a:r>
-            <a:endParaRPr lang="en-US" sz="1600" dirty="0"/>
+              <a:t>Changes of state = physical, reversible; temperature flat during change</a:t>
+            </a:r>
+            <a:endParaRPr lang="en-US" sz="1500" dirty="0"/>
           </a:p>
           <a:p>
             <a:pPr marL="342900" indent="-342900">
@@ -2652,7 +2503,7 @@
               <a:buChar char="•"/>
             </a:pPr>
             <a:r>
-              <a:rPr lang="en-US" sz="1600" dirty="0">
+              <a:rPr lang="en-US" sz="1500" dirty="0">
                 <a:solidFill>
                   <a:srgbClr val="CADCFC"/>
                 </a:solidFill>
@@ -2660,9 +2511,9 @@
                 <a:ea typeface="Calibri" pitchFamily="34" charset="-122"/>
                 <a:cs typeface="Calibri" pitchFamily="34" charset="-120"/>
               </a:rPr>
-              <a:t>Mixtures can be separated by physical methods</a:t>
-            </a:r>
-            <a:endParaRPr lang="en-US" sz="1600" dirty="0"/>
+              <a:t>Mixtures separated by physical methods based on properties</a:t>
+            </a:r>
+            <a:endParaRPr lang="en-US" sz="1500" dirty="0"/>
           </a:p>
           <a:p>
             <a:pPr marL="342900" indent="-342900">
@@ -2673,7 +2524,7 @@
               <a:buChar char="•"/>
             </a:pPr>
             <a:r>
-              <a:rPr lang="en-US" sz="1600" dirty="0">
+              <a:rPr lang="en-US" sz="1500" dirty="0">
                 <a:solidFill>
                   <a:srgbClr val="CADCFC"/>
                 </a:solidFill>
@@ -2681,9 +2532,30 @@
                 <a:ea typeface="Calibri" pitchFamily="34" charset="-122"/>
                 <a:cs typeface="Calibri" pitchFamily="34" charset="-120"/>
               </a:rPr>
-              <a:t>Choose separation method based on substance properties</a:t>
-            </a:r>
-            <a:endParaRPr lang="en-US" sz="1600" dirty="0"/>
+              <a:t>Filtration, evaporation, distillation, chromatography, magnetic separation</a:t>
+            </a:r>
+            <a:endParaRPr lang="en-US" sz="1500" dirty="0"/>
+          </a:p>
+          <a:p>
+            <a:pPr marL="342900" indent="-342900">
+              <a:spcAft>
+                <a:spcPts val="1000"/>
+              </a:spcAft>
+              <a:buSzPct val="100000"/>
+              <a:buChar char="•"/>
+            </a:pPr>
+            <a:r>
+              <a:rPr lang="en-US" sz="1500" dirty="0">
+                <a:solidFill>
+                  <a:srgbClr val="CADCFC"/>
+                </a:solidFill>
+                <a:latin typeface="Calibri" pitchFamily="34" charset="0"/>
+                <a:ea typeface="Calibri" pitchFamily="34" charset="-122"/>
+                <a:cs typeface="Calibri" pitchFamily="34" charset="-120"/>
+              </a:rPr>
+              <a:t>Dissolving faster with: heat, stirring, smaller particle size</a:t>
+            </a:r>
+            <a:endParaRPr lang="en-US" sz="1500" dirty="0"/>
           </a:p>
         </p:txBody>
       </p:sp>
@@ -2695,8 +2567,8 @@
         </p:nvSpPr>
         <p:spPr>
           <a:xfrm>
-            <a:off x="548640" y="4572000"/>
-            <a:ext cx="3657600" cy="274320"/>
+            <a:off x="731520" y="4572000"/>
+            <a:ext cx="7772400" cy="365760"/>
           </a:xfrm>
           <a:prstGeom prst="rect">
             <a:avLst/>
@@ -2712,14 +2584,17 @@
               <a:buNone/>
             </a:pPr>
             <a:r>
-              <a:rPr lang="en-US" sz="1000" dirty="0">
+              <a:rPr lang="en-US" sz="1100" dirty="0">
                 <a:solidFill>
-                  <a:srgbClr val="6B6660"/>
+                  <a:srgbClr val="E9C46A"/>
                 </a:solidFill>
+                <a:latin typeface="Calibri" pitchFamily="34" charset="0"/>
+                <a:ea typeface="Calibri" pitchFamily="34" charset="-122"/>
+                <a:cs typeface="Calibri" pitchFamily="34" charset="-120"/>
               </a:rPr>
               <a:t>mrzocchi.com</a:t>
             </a:r>
-            <a:endParaRPr lang="en-US" sz="1000" dirty="0"/>
+            <a:endParaRPr lang="en-US" sz="1100" dirty="0"/>
           </a:p>
         </p:txBody>
       </p:sp>

--- a/static/ppts/G6_Sci_T2_Full_Revision.pptx
+++ b/static/ppts/G6_Sci_T2_Full_Revision.pptx
@@ -9,9 +9,14 @@
     <p:sldId id="257" r:id="rId3"/>
     <p:sldId id="258" r:id="rId4"/>
     <p:sldId id="259" r:id="rId5"/>
+    <p:sldId id="260" r:id="rId6"/>
+    <p:sldId id="261" r:id="rId7"/>
+    <p:sldId id="262" r:id="rId8"/>
+    <p:sldId id="263" r:id="rId9"/>
+    <p:sldId id="264" r:id="rId10"/>
   </p:sldIdLst>
   <p:notesMasterIdLst>
-    <p:notesMasterId r:id="rId6"/>
+    <p:notesMasterId r:id="rId11"/>
   </p:notesMasterIdLst>
   <p:sldSz cx="9144000" cy="5143500"/>
   <p:notesSz cx="5143500" cy="9144000"/>
@@ -811,6 +816,446 @@
 </p:notes>
 </file>
 
+<file path=ppt/notesSlides/notesSlide5.xml><?xml version="1.0" encoding="utf-8"?>
+<p:notes xmlns:a="http://schemas.openxmlformats.org/drawingml/2006/main" xmlns:r="http://schemas.openxmlformats.org/officeDocument/2006/relationships" xmlns:p="http://schemas.openxmlformats.org/presentationml/2006/main">
+  <p:cSld>
+    <p:spTree>
+      <p:nvGrpSpPr>
+        <p:cNvPr id="1" name=""/>
+        <p:cNvGrpSpPr/>
+        <p:nvPr/>
+      </p:nvGrpSpPr>
+      <p:grpSpPr>
+        <a:xfrm>
+          <a:off x="0" y="0"/>
+          <a:ext cx="0" cy="0"/>
+          <a:chOff x="0" y="0"/>
+          <a:chExt cx="0" cy="0"/>
+        </a:xfrm>
+      </p:grpSpPr>
+      <p:sp>
+        <p:nvSpPr>
+          <p:cNvPr id="2" name="Slide Image Placeholder 1"/>
+          <p:cNvSpPr>
+            <a:spLocks noGrp="1" noRot="1" noChangeAspect="1"/>
+          </p:cNvSpPr>
+          <p:nvPr>
+            <p:ph type="sldImg"/>
+          </p:nvPr>
+        </p:nvSpPr>
+        <p:spPr/>
+      </p:sp>
+      <p:sp>
+        <p:nvSpPr>
+          <p:cNvPr id="3" name="Notes Placeholder 2"/>
+          <p:cNvSpPr>
+            <a:spLocks noGrp="1"/>
+          </p:cNvSpPr>
+          <p:nvPr>
+            <p:ph type="body" idx="1"/>
+          </p:nvPr>
+        </p:nvSpPr>
+        <p:spPr/>
+        <p:txBody>
+          <a:bodyPr/>
+          <a:lstStyle/>
+          <a:p>
+            <a:r>
+              <a:rPr lang="en-US" dirty="0"/>
+              <a:t/>
+            </a:r>
+            <a:endParaRPr lang="en-US" dirty="0"/>
+          </a:p>
+        </p:txBody>
+      </p:sp>
+      <p:sp>
+        <p:nvSpPr>
+          <p:cNvPr id="4" name="Slide Number Placeholder 3"/>
+          <p:cNvSpPr>
+            <a:spLocks noGrp="1"/>
+          </p:cNvSpPr>
+          <p:nvPr>
+            <p:ph type="sldNum" sz="quarter" idx="10"/>
+          </p:nvPr>
+        </p:nvSpPr>
+        <p:spPr/>
+        <p:txBody>
+          <a:bodyPr/>
+          <a:lstStyle/>
+          <a:p>
+            <a:fld id="{F7021451-1387-4CA6-816F-3879F97B5CBC}" type="slidenum">
+              <a:rPr lang="en-US"/>
+              <a:t>5</a:t>
+            </a:fld>
+            <a:endParaRPr lang="en-US"/>
+          </a:p>
+        </p:txBody>
+      </p:sp>
+    </p:spTree>
+    <p:extLst>
+      <p:ext uri="{BB962C8B-B14F-4D97-AF65-F5344CB8AC3E}">
+        <p14:creationId xmlns:p14="http://schemas.microsoft.com/office/powerpoint/2010/main" val="1024086991"/>
+      </p:ext>
+    </p:extLst>
+  </p:cSld>
+  <p:clrMapOvr>
+    <a:masterClrMapping/>
+  </p:clrMapOvr>
+</p:notes>
+</file>
+
+<file path=ppt/notesSlides/notesSlide6.xml><?xml version="1.0" encoding="utf-8"?>
+<p:notes xmlns:a="http://schemas.openxmlformats.org/drawingml/2006/main" xmlns:r="http://schemas.openxmlformats.org/officeDocument/2006/relationships" xmlns:p="http://schemas.openxmlformats.org/presentationml/2006/main">
+  <p:cSld>
+    <p:spTree>
+      <p:nvGrpSpPr>
+        <p:cNvPr id="1" name=""/>
+        <p:cNvGrpSpPr/>
+        <p:nvPr/>
+      </p:nvGrpSpPr>
+      <p:grpSpPr>
+        <a:xfrm>
+          <a:off x="0" y="0"/>
+          <a:ext cx="0" cy="0"/>
+          <a:chOff x="0" y="0"/>
+          <a:chExt cx="0" cy="0"/>
+        </a:xfrm>
+      </p:grpSpPr>
+      <p:sp>
+        <p:nvSpPr>
+          <p:cNvPr id="2" name="Slide Image Placeholder 1"/>
+          <p:cNvSpPr>
+            <a:spLocks noGrp="1" noRot="1" noChangeAspect="1"/>
+          </p:cNvSpPr>
+          <p:nvPr>
+            <p:ph type="sldImg"/>
+          </p:nvPr>
+        </p:nvSpPr>
+        <p:spPr/>
+      </p:sp>
+      <p:sp>
+        <p:nvSpPr>
+          <p:cNvPr id="3" name="Notes Placeholder 2"/>
+          <p:cNvSpPr>
+            <a:spLocks noGrp="1"/>
+          </p:cNvSpPr>
+          <p:nvPr>
+            <p:ph type="body" idx="1"/>
+          </p:nvPr>
+        </p:nvSpPr>
+        <p:spPr/>
+        <p:txBody>
+          <a:bodyPr/>
+          <a:lstStyle/>
+          <a:p>
+            <a:r>
+              <a:rPr lang="en-US" dirty="0"/>
+              <a:t/>
+            </a:r>
+            <a:endParaRPr lang="en-US" dirty="0"/>
+          </a:p>
+        </p:txBody>
+      </p:sp>
+      <p:sp>
+        <p:nvSpPr>
+          <p:cNvPr id="4" name="Slide Number Placeholder 3"/>
+          <p:cNvSpPr>
+            <a:spLocks noGrp="1"/>
+          </p:cNvSpPr>
+          <p:nvPr>
+            <p:ph type="sldNum" sz="quarter" idx="10"/>
+          </p:nvPr>
+        </p:nvSpPr>
+        <p:spPr/>
+        <p:txBody>
+          <a:bodyPr/>
+          <a:lstStyle/>
+          <a:p>
+            <a:fld id="{F7021451-1387-4CA6-816F-3879F97B5CBC}" type="slidenum">
+              <a:rPr lang="en-US"/>
+              <a:t>6</a:t>
+            </a:fld>
+            <a:endParaRPr lang="en-US"/>
+          </a:p>
+        </p:txBody>
+      </p:sp>
+    </p:spTree>
+    <p:extLst>
+      <p:ext uri="{BB962C8B-B14F-4D97-AF65-F5344CB8AC3E}">
+        <p14:creationId xmlns:p14="http://schemas.microsoft.com/office/powerpoint/2010/main" val="1024086991"/>
+      </p:ext>
+    </p:extLst>
+  </p:cSld>
+  <p:clrMapOvr>
+    <a:masterClrMapping/>
+  </p:clrMapOvr>
+</p:notes>
+</file>
+
+<file path=ppt/notesSlides/notesSlide7.xml><?xml version="1.0" encoding="utf-8"?>
+<p:notes xmlns:a="http://schemas.openxmlformats.org/drawingml/2006/main" xmlns:r="http://schemas.openxmlformats.org/officeDocument/2006/relationships" xmlns:p="http://schemas.openxmlformats.org/presentationml/2006/main">
+  <p:cSld>
+    <p:spTree>
+      <p:nvGrpSpPr>
+        <p:cNvPr id="1" name=""/>
+        <p:cNvGrpSpPr/>
+        <p:nvPr/>
+      </p:nvGrpSpPr>
+      <p:grpSpPr>
+        <a:xfrm>
+          <a:off x="0" y="0"/>
+          <a:ext cx="0" cy="0"/>
+          <a:chOff x="0" y="0"/>
+          <a:chExt cx="0" cy="0"/>
+        </a:xfrm>
+      </p:grpSpPr>
+      <p:sp>
+        <p:nvSpPr>
+          <p:cNvPr id="2" name="Slide Image Placeholder 1"/>
+          <p:cNvSpPr>
+            <a:spLocks noGrp="1" noRot="1" noChangeAspect="1"/>
+          </p:cNvSpPr>
+          <p:nvPr>
+            <p:ph type="sldImg"/>
+          </p:nvPr>
+        </p:nvSpPr>
+        <p:spPr/>
+      </p:sp>
+      <p:sp>
+        <p:nvSpPr>
+          <p:cNvPr id="3" name="Notes Placeholder 2"/>
+          <p:cNvSpPr>
+            <a:spLocks noGrp="1"/>
+          </p:cNvSpPr>
+          <p:nvPr>
+            <p:ph type="body" idx="1"/>
+          </p:nvPr>
+        </p:nvSpPr>
+        <p:spPr/>
+        <p:txBody>
+          <a:bodyPr/>
+          <a:lstStyle/>
+          <a:p>
+            <a:r>
+              <a:rPr lang="en-US" dirty="0"/>
+              <a:t/>
+            </a:r>
+            <a:endParaRPr lang="en-US" dirty="0"/>
+          </a:p>
+        </p:txBody>
+      </p:sp>
+      <p:sp>
+        <p:nvSpPr>
+          <p:cNvPr id="4" name="Slide Number Placeholder 3"/>
+          <p:cNvSpPr>
+            <a:spLocks noGrp="1"/>
+          </p:cNvSpPr>
+          <p:nvPr>
+            <p:ph type="sldNum" sz="quarter" idx="10"/>
+          </p:nvPr>
+        </p:nvSpPr>
+        <p:spPr/>
+        <p:txBody>
+          <a:bodyPr/>
+          <a:lstStyle/>
+          <a:p>
+            <a:fld id="{F7021451-1387-4CA6-816F-3879F97B5CBC}" type="slidenum">
+              <a:rPr lang="en-US"/>
+              <a:t>7</a:t>
+            </a:fld>
+            <a:endParaRPr lang="en-US"/>
+          </a:p>
+        </p:txBody>
+      </p:sp>
+    </p:spTree>
+    <p:extLst>
+      <p:ext uri="{BB962C8B-B14F-4D97-AF65-F5344CB8AC3E}">
+        <p14:creationId xmlns:p14="http://schemas.microsoft.com/office/powerpoint/2010/main" val="1024086991"/>
+      </p:ext>
+    </p:extLst>
+  </p:cSld>
+  <p:clrMapOvr>
+    <a:masterClrMapping/>
+  </p:clrMapOvr>
+</p:notes>
+</file>
+
+<file path=ppt/notesSlides/notesSlide8.xml><?xml version="1.0" encoding="utf-8"?>
+<p:notes xmlns:a="http://schemas.openxmlformats.org/drawingml/2006/main" xmlns:r="http://schemas.openxmlformats.org/officeDocument/2006/relationships" xmlns:p="http://schemas.openxmlformats.org/presentationml/2006/main">
+  <p:cSld>
+    <p:spTree>
+      <p:nvGrpSpPr>
+        <p:cNvPr id="1" name=""/>
+        <p:cNvGrpSpPr/>
+        <p:nvPr/>
+      </p:nvGrpSpPr>
+      <p:grpSpPr>
+        <a:xfrm>
+          <a:off x="0" y="0"/>
+          <a:ext cx="0" cy="0"/>
+          <a:chOff x="0" y="0"/>
+          <a:chExt cx="0" cy="0"/>
+        </a:xfrm>
+      </p:grpSpPr>
+      <p:sp>
+        <p:nvSpPr>
+          <p:cNvPr id="2" name="Slide Image Placeholder 1"/>
+          <p:cNvSpPr>
+            <a:spLocks noGrp="1" noRot="1" noChangeAspect="1"/>
+          </p:cNvSpPr>
+          <p:nvPr>
+            <p:ph type="sldImg"/>
+          </p:nvPr>
+        </p:nvSpPr>
+        <p:spPr/>
+      </p:sp>
+      <p:sp>
+        <p:nvSpPr>
+          <p:cNvPr id="3" name="Notes Placeholder 2"/>
+          <p:cNvSpPr>
+            <a:spLocks noGrp="1"/>
+          </p:cNvSpPr>
+          <p:nvPr>
+            <p:ph type="body" idx="1"/>
+          </p:nvPr>
+        </p:nvSpPr>
+        <p:spPr/>
+        <p:txBody>
+          <a:bodyPr/>
+          <a:lstStyle/>
+          <a:p>
+            <a:r>
+              <a:rPr lang="en-US" dirty="0"/>
+              <a:t/>
+            </a:r>
+            <a:endParaRPr lang="en-US" dirty="0"/>
+          </a:p>
+        </p:txBody>
+      </p:sp>
+      <p:sp>
+        <p:nvSpPr>
+          <p:cNvPr id="4" name="Slide Number Placeholder 3"/>
+          <p:cNvSpPr>
+            <a:spLocks noGrp="1"/>
+          </p:cNvSpPr>
+          <p:nvPr>
+            <p:ph type="sldNum" sz="quarter" idx="10"/>
+          </p:nvPr>
+        </p:nvSpPr>
+        <p:spPr/>
+        <p:txBody>
+          <a:bodyPr/>
+          <a:lstStyle/>
+          <a:p>
+            <a:fld id="{F7021451-1387-4CA6-816F-3879F97B5CBC}" type="slidenum">
+              <a:rPr lang="en-US"/>
+              <a:t>8</a:t>
+            </a:fld>
+            <a:endParaRPr lang="en-US"/>
+          </a:p>
+        </p:txBody>
+      </p:sp>
+    </p:spTree>
+    <p:extLst>
+      <p:ext uri="{BB962C8B-B14F-4D97-AF65-F5344CB8AC3E}">
+        <p14:creationId xmlns:p14="http://schemas.microsoft.com/office/powerpoint/2010/main" val="1024086991"/>
+      </p:ext>
+    </p:extLst>
+  </p:cSld>
+  <p:clrMapOvr>
+    <a:masterClrMapping/>
+  </p:clrMapOvr>
+</p:notes>
+</file>
+
+<file path=ppt/notesSlides/notesSlide9.xml><?xml version="1.0" encoding="utf-8"?>
+<p:notes xmlns:a="http://schemas.openxmlformats.org/drawingml/2006/main" xmlns:r="http://schemas.openxmlformats.org/officeDocument/2006/relationships" xmlns:p="http://schemas.openxmlformats.org/presentationml/2006/main">
+  <p:cSld>
+    <p:spTree>
+      <p:nvGrpSpPr>
+        <p:cNvPr id="1" name=""/>
+        <p:cNvGrpSpPr/>
+        <p:nvPr/>
+      </p:nvGrpSpPr>
+      <p:grpSpPr>
+        <a:xfrm>
+          <a:off x="0" y="0"/>
+          <a:ext cx="0" cy="0"/>
+          <a:chOff x="0" y="0"/>
+          <a:chExt cx="0" cy="0"/>
+        </a:xfrm>
+      </p:grpSpPr>
+      <p:sp>
+        <p:nvSpPr>
+          <p:cNvPr id="2" name="Slide Image Placeholder 1"/>
+          <p:cNvSpPr>
+            <a:spLocks noGrp="1" noRot="1" noChangeAspect="1"/>
+          </p:cNvSpPr>
+          <p:nvPr>
+            <p:ph type="sldImg"/>
+          </p:nvPr>
+        </p:nvSpPr>
+        <p:spPr/>
+      </p:sp>
+      <p:sp>
+        <p:nvSpPr>
+          <p:cNvPr id="3" name="Notes Placeholder 2"/>
+          <p:cNvSpPr>
+            <a:spLocks noGrp="1"/>
+          </p:cNvSpPr>
+          <p:nvPr>
+            <p:ph type="body" idx="1"/>
+          </p:nvPr>
+        </p:nvSpPr>
+        <p:spPr/>
+        <p:txBody>
+          <a:bodyPr/>
+          <a:lstStyle/>
+          <a:p>
+            <a:r>
+              <a:rPr lang="en-US" dirty="0"/>
+              <a:t/>
+            </a:r>
+            <a:endParaRPr lang="en-US" dirty="0"/>
+          </a:p>
+        </p:txBody>
+      </p:sp>
+      <p:sp>
+        <p:nvSpPr>
+          <p:cNvPr id="4" name="Slide Number Placeholder 3"/>
+          <p:cNvSpPr>
+            <a:spLocks noGrp="1"/>
+          </p:cNvSpPr>
+          <p:nvPr>
+            <p:ph type="sldNum" sz="quarter" idx="10"/>
+          </p:nvPr>
+        </p:nvSpPr>
+        <p:spPr/>
+        <p:txBody>
+          <a:bodyPr/>
+          <a:lstStyle/>
+          <a:p>
+            <a:fld id="{F7021451-1387-4CA6-816F-3879F97B5CBC}" type="slidenum">
+              <a:rPr lang="en-US"/>
+              <a:t>9</a:t>
+            </a:fld>
+            <a:endParaRPr lang="en-US"/>
+          </a:p>
+        </p:txBody>
+      </p:sp>
+    </p:spTree>
+    <p:extLst>
+      <p:ext uri="{BB962C8B-B14F-4D97-AF65-F5344CB8AC3E}">
+        <p14:creationId xmlns:p14="http://schemas.microsoft.com/office/powerpoint/2010/main" val="1024086991"/>
+      </p:ext>
+    </p:extLst>
+  </p:cSld>
+  <p:clrMapOvr>
+    <a:masterClrMapping/>
+  </p:clrMapOvr>
+</p:notes>
+</file>
+
 <file path=ppt/slideLayouts/slideLayout1.xml><?xml version="1.0" encoding="utf-8"?>
 <p:sldLayout xmlns:a="http://schemas.openxmlformats.org/drawingml/2006/main" xmlns:r="http://schemas.openxmlformats.org/officeDocument/2006/relationships" xmlns:p="http://schemas.openxmlformats.org/presentationml/2006/main" preserve="1">
   <p:cSld name="DEFAULT">
@@ -1121,13 +1566,6 @@
 <file path=ppt/slides/slide1.xml><?xml version="1.0" encoding="utf-8"?>
 <p:sld xmlns:a="http://schemas.openxmlformats.org/drawingml/2006/main" xmlns:r="http://schemas.openxmlformats.org/officeDocument/2006/relationships" xmlns:p="http://schemas.openxmlformats.org/presentationml/2006/main">
   <p:cSld name="Slide 1">
-    <p:bg>
-      <p:bgPr>
-        <a:solidFill>
-          <a:srgbClr val="1B2A4A"/>
-        </a:solidFill>
-      </p:bgPr>
-    </p:bg>
     <p:spTree>
       <p:nvGrpSpPr>
         <p:cNvPr id="1" name=""/>
@@ -1151,7 +1589,27 @@
         <p:spPr>
           <a:xfrm>
             <a:off x="0" y="0"/>
-            <a:ext cx="109728" cy="5143500"/>
+            <a:ext cx="9144000" cy="5143500"/>
+          </a:xfrm>
+          <a:prstGeom prst="rect">
+            <a:avLst/>
+          </a:prstGeom>
+          <a:solidFill>
+            <a:srgbClr val="1B2A4A"/>
+          </a:solidFill>
+          <a:ln/>
+        </p:spPr>
+      </p:sp>
+      <p:sp>
+        <p:nvSpPr>
+          <p:cNvPr id="3" name="Shape 1"/>
+          <p:cNvSpPr/>
+          <p:nvPr/>
+        </p:nvSpPr>
+        <p:spPr>
+          <a:xfrm>
+            <a:off x="0" y="4777740"/>
+            <a:ext cx="9144000" cy="365760"/>
           </a:xfrm>
           <a:prstGeom prst="rect">
             <a:avLst/>
@@ -1164,14 +1622,36 @@
       </p:sp>
       <p:sp>
         <p:nvSpPr>
-          <p:cNvPr id="3" name="Text 1"/>
-          <p:cNvSpPr/>
-          <p:nvPr/>
-        </p:nvSpPr>
-        <p:spPr>
-          <a:xfrm>
-            <a:off x="731520" y="1097280"/>
-            <a:ext cx="7772400" cy="1371600"/>
+          <p:cNvPr id="4" name="Shape 2"/>
+          <p:cNvSpPr/>
+          <p:nvPr/>
+        </p:nvSpPr>
+        <p:spPr>
+          <a:xfrm>
+            <a:off x="6858000" y="-1371600"/>
+            <a:ext cx="4572000" cy="4572000"/>
+          </a:xfrm>
+          <a:prstGeom prst="ellipse">
+            <a:avLst/>
+          </a:prstGeom>
+          <a:solidFill>
+            <a:srgbClr val="2A9D8F">
+              <a:alpha val="12000"/>
+            </a:srgbClr>
+          </a:solidFill>
+          <a:ln/>
+        </p:spPr>
+      </p:sp>
+      <p:sp>
+        <p:nvSpPr>
+          <p:cNvPr id="5" name="Text 3"/>
+          <p:cNvSpPr/>
+          <p:nvPr/>
+        </p:nvSpPr>
+        <p:spPr>
+          <a:xfrm>
+            <a:off x="731520" y="914400"/>
+            <a:ext cx="7680960" cy="457200"/>
           </a:xfrm>
           <a:prstGeom prst="rect">
             <a:avLst/>
@@ -1187,7 +1667,46 @@
               <a:buNone/>
             </a:pPr>
             <a:r>
-              <a:rPr lang="en-US" sz="4000" b="1" dirty="0">
+              <a:rPr lang="en-US" sz="1300" b="1" spc="500" kern="0" dirty="0">
+                <a:solidFill>
+                  <a:srgbClr val="2A9D8F"/>
+                </a:solidFill>
+                <a:latin typeface="Calibri" pitchFamily="34" charset="0"/>
+                <a:ea typeface="Calibri" pitchFamily="34" charset="-122"/>
+                <a:cs typeface="Calibri" pitchFamily="34" charset="-120"/>
+              </a:rPr>
+              <a:t>GRADE 6 SCIENCE</a:t>
+            </a:r>
+            <a:endParaRPr lang="en-US" sz="1300" dirty="0"/>
+          </a:p>
+        </p:txBody>
+      </p:sp>
+      <p:sp>
+        <p:nvSpPr>
+          <p:cNvPr id="6" name="Text 4"/>
+          <p:cNvSpPr/>
+          <p:nvPr/>
+        </p:nvSpPr>
+        <p:spPr>
+          <a:xfrm>
+            <a:off x="731520" y="1463040"/>
+            <a:ext cx="6858000" cy="1645920"/>
+          </a:xfrm>
+          <a:prstGeom prst="rect">
+            <a:avLst/>
+          </a:prstGeom>
+          <a:noFill/>
+          <a:ln/>
+        </p:spPr>
+        <p:txBody>
+          <a:bodyPr wrap="square" rtlCol="0" anchor="t"/>
+          <a:lstStyle/>
+          <a:p>
+            <a:pPr indent="0" marL="0">
+              <a:buNone/>
+            </a:pPr>
+            <a:r>
+              <a:rPr lang="en-US" sz="3800" b="1" dirty="0">
                 <a:solidFill>
                   <a:srgbClr val="FFFFFF"/>
                 </a:solidFill>
@@ -1195,46 +1714,63 @@
                 <a:ea typeface="Georgia" pitchFamily="34" charset="-122"/>
                 <a:cs typeface="Georgia" pitchFamily="34" charset="-120"/>
               </a:rPr>
-              <a:t>Chemistry — Full Revision</a:t>
-            </a:r>
-            <a:endParaRPr lang="en-US" sz="4000" dirty="0"/>
-          </a:p>
-        </p:txBody>
-      </p:sp>
-      <p:sp>
-        <p:nvSpPr>
-          <p:cNvPr id="4" name="Text 2"/>
-          <p:cNvSpPr/>
-          <p:nvPr/>
-        </p:nvSpPr>
-        <p:spPr>
-          <a:xfrm>
-            <a:off x="731520" y="2560320"/>
-            <a:ext cx="7772400" cy="548640"/>
-          </a:xfrm>
-          <a:prstGeom prst="rect">
-            <a:avLst/>
-          </a:prstGeom>
-          <a:noFill/>
-          <a:ln/>
-        </p:spPr>
-        <p:txBody>
-          <a:bodyPr wrap="square" rtlCol="0" anchor="ctr"/>
-          <a:lstStyle/>
+              <a:t>Matter</a:t>
+            </a:r>
+            <a:endParaRPr lang="en-US" sz="3800" dirty="0"/>
+          </a:p>
           <a:p>
             <a:pPr indent="0" marL="0">
               <a:buNone/>
             </a:pPr>
             <a:r>
-              <a:rPr lang="en-US" sz="1600" dirty="0">
-                <a:solidFill>
-                  <a:srgbClr val="E9C46A"/>
+              <a:rPr lang="en-US" sz="3800" b="1" dirty="0">
+                <a:solidFill>
+                  <a:srgbClr val="FFFFFF"/>
+                </a:solidFill>
+                <a:latin typeface="Georgia" pitchFamily="34" charset="0"/>
+                <a:ea typeface="Georgia" pitchFamily="34" charset="-122"/>
+                <a:cs typeface="Georgia" pitchFamily="34" charset="-120"/>
+              </a:rPr>
+              <a:t>Full Revision</a:t>
+            </a:r>
+            <a:endParaRPr lang="en-US" sz="3800" dirty="0"/>
+          </a:p>
+        </p:txBody>
+      </p:sp>
+      <p:sp>
+        <p:nvSpPr>
+          <p:cNvPr id="7" name="Text 5"/>
+          <p:cNvSpPr/>
+          <p:nvPr/>
+        </p:nvSpPr>
+        <p:spPr>
+          <a:xfrm>
+            <a:off x="731520" y="3200400"/>
+            <a:ext cx="6400800" cy="548640"/>
+          </a:xfrm>
+          <a:prstGeom prst="rect">
+            <a:avLst/>
+          </a:prstGeom>
+          <a:noFill/>
+          <a:ln/>
+        </p:spPr>
+        <p:txBody>
+          <a:bodyPr wrap="square" rtlCol="0" anchor="ctr"/>
+          <a:lstStyle/>
+          <a:p>
+            <a:pPr indent="0" marL="0">
+              <a:buNone/>
+            </a:pPr>
+            <a:r>
+              <a:rPr lang="en-US" sz="1600" i="1" dirty="0">
+                <a:solidFill>
+                  <a:srgbClr val="9B9690"/>
                 </a:solidFill>
                 <a:latin typeface="Calibri" pitchFamily="34" charset="0"/>
                 <a:ea typeface="Calibri" pitchFamily="34" charset="-122"/>
                 <a:cs typeface="Calibri" pitchFamily="34" charset="-120"/>
               </a:rPr>
-              <a:t>Grade 6 Science · Mr Zocchi</a:t>
+              <a:t>Particles, states, changes, mixtures, and separation</a:t>
             </a:r>
             <a:endParaRPr lang="en-US" sz="1600" dirty="0"/>
           </a:p>
@@ -1242,36 +1778,14 @@
       </p:sp>
       <p:sp>
         <p:nvSpPr>
-          <p:cNvPr id="5" name="Shape 3"/>
-          <p:cNvSpPr/>
-          <p:nvPr/>
-        </p:nvSpPr>
-        <p:spPr>
-          <a:xfrm>
-            <a:off x="731520" y="3474720"/>
-            <a:ext cx="2011680" cy="411480"/>
-          </a:xfrm>
-          <a:prstGeom prst="roundRect">
-            <a:avLst>
-              <a:gd name="adj" fmla="val 17778"/>
-            </a:avLst>
-          </a:prstGeom>
-          <a:solidFill>
-            <a:srgbClr val="2A9D8F"/>
-          </a:solidFill>
-          <a:ln/>
-        </p:spPr>
-      </p:sp>
-      <p:sp>
-        <p:nvSpPr>
-          <p:cNvPr id="6" name="Text 4"/>
-          <p:cNvSpPr/>
-          <p:nvPr/>
-        </p:nvSpPr>
-        <p:spPr>
-          <a:xfrm>
-            <a:off x="731520" y="3474720"/>
-            <a:ext cx="2011680" cy="411480"/>
+          <p:cNvPr id="8" name="Text 6"/>
+          <p:cNvSpPr/>
+          <p:nvPr/>
+        </p:nvSpPr>
+        <p:spPr>
+          <a:xfrm>
+            <a:off x="731520" y="4297680"/>
+            <a:ext cx="2743200" cy="365760"/>
           </a:xfrm>
           <a:prstGeom prst="rect">
             <a:avLst/>
@@ -1283,21 +1797,21 @@
           <a:bodyPr wrap="square" rtlCol="0" anchor="ctr"/>
           <a:lstStyle/>
           <a:p>
-            <a:pPr algn="ctr" indent="0" marL="0">
+            <a:pPr indent="0" marL="0">
               <a:buNone/>
             </a:pPr>
             <a:r>
-              <a:rPr lang="en-US" sz="1200" b="1" dirty="0">
-                <a:solidFill>
-                  <a:srgbClr val="FFFFFF"/>
+              <a:rPr lang="en-US" sz="1100" dirty="0">
+                <a:solidFill>
+                  <a:srgbClr val="9B9690"/>
                 </a:solidFill>
                 <a:latin typeface="Calibri" pitchFamily="34" charset="0"/>
                 <a:ea typeface="Calibri" pitchFamily="34" charset="-122"/>
                 <a:cs typeface="Calibri" pitchFamily="34" charset="-120"/>
               </a:rPr>
-              <a:t>Term 2 · Chemistry</a:t>
-            </a:r>
-            <a:endParaRPr lang="en-US" sz="1200" dirty="0"/>
+              <a:t>mrzocchi.com</a:t>
+            </a:r>
+            <a:endParaRPr lang="en-US" sz="1100" dirty="0"/>
           </a:p>
         </p:txBody>
       </p:sp>
@@ -1312,13 +1826,6 @@
 <file path=ppt/slides/slide2.xml><?xml version="1.0" encoding="utf-8"?>
 <p:sld xmlns:a="http://schemas.openxmlformats.org/drawingml/2006/main" xmlns:r="http://schemas.openxmlformats.org/officeDocument/2006/relationships" xmlns:p="http://schemas.openxmlformats.org/presentationml/2006/main">
   <p:cSld name="Slide 2">
-    <p:bg>
-      <p:bgPr>
-        <a:solidFill>
-          <a:srgbClr val="FAF8F5"/>
-        </a:solidFill>
-      </p:bgPr>
-    </p:bg>
     <p:spTree>
       <p:nvGrpSpPr>
         <p:cNvPr id="1" name=""/>
@@ -1342,7 +1849,27 @@
         <p:spPr>
           <a:xfrm>
             <a:off x="0" y="0"/>
-            <a:ext cx="9144000" cy="54864"/>
+            <a:ext cx="9144000" cy="5143500"/>
+          </a:xfrm>
+          <a:prstGeom prst="rect">
+            <a:avLst/>
+          </a:prstGeom>
+          <a:solidFill>
+            <a:srgbClr val="1B2A4A"/>
+          </a:solidFill>
+          <a:ln/>
+        </p:spPr>
+      </p:sp>
+      <p:sp>
+        <p:nvSpPr>
+          <p:cNvPr id="3" name="Shape 1"/>
+          <p:cNvSpPr/>
+          <p:nvPr/>
+        </p:nvSpPr>
+        <p:spPr>
+          <a:xfrm>
+            <a:off x="731520" y="1828800"/>
+            <a:ext cx="73152" cy="1463040"/>
           </a:xfrm>
           <a:prstGeom prst="rect">
             <a:avLst/>
@@ -1355,14 +1882,14 @@
       </p:sp>
       <p:sp>
         <p:nvSpPr>
-          <p:cNvPr id="3" name="Text 1"/>
-          <p:cNvSpPr/>
-          <p:nvPr/>
-        </p:nvSpPr>
-        <p:spPr>
-          <a:xfrm>
-            <a:off x="7772400" y="4709160"/>
-            <a:ext cx="1097280" cy="320040"/>
+          <p:cNvPr id="4" name="Text 2"/>
+          <p:cNvSpPr/>
+          <p:nvPr/>
+        </p:nvSpPr>
+        <p:spPr>
+          <a:xfrm>
+            <a:off x="1097280" y="1463040"/>
+            <a:ext cx="1097280" cy="1097280"/>
           </a:xfrm>
           <a:prstGeom prst="rect">
             <a:avLst/>
@@ -1374,125 +1901,34 @@
           <a:bodyPr wrap="square" rtlCol="0" anchor="ctr"/>
           <a:lstStyle/>
           <a:p>
-            <a:pPr algn="r" indent="0" marL="0">
+            <a:pPr algn="l" indent="0" marL="0">
               <a:buNone/>
             </a:pPr>
             <a:r>
-              <a:rPr lang="en-US" sz="900" dirty="0">
-                <a:solidFill>
-                  <a:srgbClr val="6B6660"/>
-                </a:solidFill>
-                <a:latin typeface="Calibri" pitchFamily="34" charset="0"/>
-                <a:ea typeface="Calibri" pitchFamily="34" charset="-122"/>
-                <a:cs typeface="Calibri" pitchFamily="34" charset="-120"/>
-              </a:rPr>
-              <a:t>2 / 4</a:t>
-            </a:r>
-            <a:endParaRPr lang="en-US" sz="900" dirty="0"/>
-          </a:p>
-        </p:txBody>
-      </p:sp>
-      <p:sp>
-        <p:nvSpPr>
-          <p:cNvPr id="4" name="Text 2"/>
-          <p:cNvSpPr/>
-          <p:nvPr/>
-        </p:nvSpPr>
-        <p:spPr>
-          <a:xfrm>
-            <a:off x="457200" y="274320"/>
-            <a:ext cx="8229600" cy="640080"/>
-          </a:xfrm>
-          <a:prstGeom prst="rect">
-            <a:avLst/>
-          </a:prstGeom>
-          <a:noFill/>
-          <a:ln/>
-        </p:spPr>
-        <p:txBody>
-          <a:bodyPr wrap="square" rtlCol="0" anchor="ctr"/>
-          <a:lstStyle/>
-          <a:p>
-            <a:pPr indent="0" marL="0">
-              <a:buNone/>
-            </a:pPr>
-            <a:r>
-              <a:rPr lang="en-US" sz="2600" b="1" dirty="0">
-                <a:solidFill>
-                  <a:srgbClr val="1B2A4A"/>
+              <a:rPr lang="en-US" sz="4800" b="1" dirty="0">
+                <a:solidFill>
+                  <a:srgbClr val="2A9D8F"/>
                 </a:solidFill>
                 <a:latin typeface="Georgia" pitchFamily="34" charset="0"/>
                 <a:ea typeface="Georgia" pitchFamily="34" charset="-122"/>
                 <a:cs typeface="Georgia" pitchFamily="34" charset="-120"/>
               </a:rPr>
-              <a:t>Particles &amp; States</a:t>
-            </a:r>
-            <a:endParaRPr lang="en-US" sz="2600" dirty="0"/>
-          </a:p>
-        </p:txBody>
-      </p:sp>
-      <p:sp>
-        <p:nvSpPr>
-          <p:cNvPr id="5" name="Shape 3"/>
-          <p:cNvSpPr/>
-          <p:nvPr/>
-        </p:nvSpPr>
-        <p:spPr>
-          <a:xfrm>
-            <a:off x="457200" y="1188720"/>
-            <a:ext cx="2560320" cy="1828800"/>
-          </a:xfrm>
-          <a:prstGeom prst="rect">
-            <a:avLst/>
-          </a:prstGeom>
-          <a:solidFill>
-            <a:srgbClr val="FFFFFF"/>
-          </a:solidFill>
-          <a:ln w="12700">
-            <a:solidFill>
-              <a:srgbClr val="E5E2DC"/>
-            </a:solidFill>
-            <a:prstDash val="solid"/>
-          </a:ln>
-          <a:effectLst>
-            <a:outerShdw sx="100000" sy="100000" kx="0" ky="0" algn="bl" rotWithShape="0" blurRad="50800" dist="25400" dir="8100000">
-              <a:srgbClr val="000000">
-                <a:alpha val="10000"/>
-              </a:srgbClr>
-            </a:outerShdw>
-          </a:effectLst>
-        </p:spPr>
-      </p:sp>
-      <p:sp>
-        <p:nvSpPr>
-          <p:cNvPr id="6" name="Shape 4"/>
-          <p:cNvSpPr/>
-          <p:nvPr/>
-        </p:nvSpPr>
-        <p:spPr>
-          <a:xfrm>
-            <a:off x="457200" y="1188720"/>
-            <a:ext cx="2560320" cy="54864"/>
-          </a:xfrm>
-          <a:prstGeom prst="rect">
-            <a:avLst/>
-          </a:prstGeom>
-          <a:solidFill>
-            <a:srgbClr val="2A9D8F"/>
-          </a:solidFill>
-          <a:ln/>
-        </p:spPr>
-      </p:sp>
-      <p:sp>
-        <p:nvSpPr>
-          <p:cNvPr id="7" name="Text 5"/>
-          <p:cNvSpPr/>
-          <p:nvPr/>
-        </p:nvSpPr>
-        <p:spPr>
-          <a:xfrm>
-            <a:off x="594360" y="1325880"/>
-            <a:ext cx="2286000" cy="365760"/>
+              <a:t>1</a:t>
+            </a:r>
+            <a:endParaRPr lang="en-US" sz="4800" dirty="0"/>
+          </a:p>
+        </p:txBody>
+      </p:sp>
+      <p:sp>
+        <p:nvSpPr>
+          <p:cNvPr id="5" name="Text 3"/>
+          <p:cNvSpPr/>
+          <p:nvPr/>
+        </p:nvSpPr>
+        <p:spPr>
+          <a:xfrm>
+            <a:off x="2194560" y="1920240"/>
+            <a:ext cx="5943600" cy="1097280"/>
           </a:xfrm>
           <a:prstGeom prst="rect">
             <a:avLst/>
@@ -1508,316 +1944,17 @@
               <a:buNone/>
             </a:pPr>
             <a:r>
-              <a:rPr lang="en-US" sz="1400" b="1" dirty="0">
-                <a:solidFill>
-                  <a:srgbClr val="1B2A4A"/>
-                </a:solidFill>
-                <a:latin typeface="Calibri" pitchFamily="34" charset="0"/>
-                <a:ea typeface="Calibri" pitchFamily="34" charset="-122"/>
-                <a:cs typeface="Calibri" pitchFamily="34" charset="-120"/>
-              </a:rPr>
-              <a:t>Particle Model</a:t>
-            </a:r>
-            <a:endParaRPr lang="en-US" sz="1400" dirty="0"/>
-          </a:p>
-        </p:txBody>
-      </p:sp>
-      <p:sp>
-        <p:nvSpPr>
-          <p:cNvPr id="8" name="Text 6"/>
-          <p:cNvSpPr/>
-          <p:nvPr/>
-        </p:nvSpPr>
-        <p:spPr>
-          <a:xfrm>
-            <a:off x="594360" y="1737360"/>
-            <a:ext cx="2286000" cy="1097280"/>
-          </a:xfrm>
-          <a:prstGeom prst="rect">
-            <a:avLst/>
-          </a:prstGeom>
-          <a:noFill/>
-          <a:ln/>
-        </p:spPr>
-        <p:txBody>
-          <a:bodyPr wrap="square" rtlCol="0" anchor="t"/>
-          <a:lstStyle/>
-          <a:p>
-            <a:pPr indent="0" marL="0">
-              <a:buNone/>
-            </a:pPr>
-            <a:r>
-              <a:rPr lang="en-US" sz="1100" dirty="0">
-                <a:solidFill>
-                  <a:srgbClr val="3D3A36"/>
-                </a:solidFill>
-                <a:latin typeface="Calibri" pitchFamily="34" charset="0"/>
-                <a:ea typeface="Calibri" pitchFamily="34" charset="-122"/>
-                <a:cs typeface="Calibri" pitchFamily="34" charset="-120"/>
-              </a:rPr>
-              <a:t>All matter = particles. Solids: regular, vibrate. Liquids: close, slide. Gases: far, fast. Heating = more energy = faster movement.</a:t>
-            </a:r>
-            <a:endParaRPr lang="en-US" sz="1100" dirty="0"/>
-          </a:p>
-        </p:txBody>
-      </p:sp>
-      <p:sp>
-        <p:nvSpPr>
-          <p:cNvPr id="9" name="Shape 7"/>
-          <p:cNvSpPr/>
-          <p:nvPr/>
-        </p:nvSpPr>
-        <p:spPr>
-          <a:xfrm>
-            <a:off x="3291840" y="1188720"/>
-            <a:ext cx="2560320" cy="1828800"/>
-          </a:xfrm>
-          <a:prstGeom prst="rect">
-            <a:avLst/>
-          </a:prstGeom>
-          <a:solidFill>
-            <a:srgbClr val="FFFFFF"/>
-          </a:solidFill>
-          <a:ln w="12700">
-            <a:solidFill>
-              <a:srgbClr val="E5E2DC"/>
-            </a:solidFill>
-            <a:prstDash val="solid"/>
-          </a:ln>
-          <a:effectLst>
-            <a:outerShdw sx="100000" sy="100000" kx="0" ky="0" algn="bl" rotWithShape="0" blurRad="50800" dist="25400" dir="8100000">
-              <a:srgbClr val="000000">
-                <a:alpha val="10000"/>
-              </a:srgbClr>
-            </a:outerShdw>
-          </a:effectLst>
-        </p:spPr>
-      </p:sp>
-      <p:sp>
-        <p:nvSpPr>
-          <p:cNvPr id="10" name="Shape 8"/>
-          <p:cNvSpPr/>
-          <p:nvPr/>
-        </p:nvSpPr>
-        <p:spPr>
-          <a:xfrm>
-            <a:off x="3291840" y="1188720"/>
-            <a:ext cx="2560320" cy="54864"/>
-          </a:xfrm>
-          <a:prstGeom prst="rect">
-            <a:avLst/>
-          </a:prstGeom>
-          <a:solidFill>
-            <a:srgbClr val="2A9D8F"/>
-          </a:solidFill>
-          <a:ln/>
-        </p:spPr>
-      </p:sp>
-      <p:sp>
-        <p:nvSpPr>
-          <p:cNvPr id="11" name="Text 9"/>
-          <p:cNvSpPr/>
-          <p:nvPr/>
-        </p:nvSpPr>
-        <p:spPr>
-          <a:xfrm>
-            <a:off x="3429000" y="1325880"/>
-            <a:ext cx="2286000" cy="365760"/>
-          </a:xfrm>
-          <a:prstGeom prst="rect">
-            <a:avLst/>
-          </a:prstGeom>
-          <a:noFill/>
-          <a:ln/>
-        </p:spPr>
-        <p:txBody>
-          <a:bodyPr wrap="square" rtlCol="0" anchor="ctr"/>
-          <a:lstStyle/>
-          <a:p>
-            <a:pPr indent="0" marL="0">
-              <a:buNone/>
-            </a:pPr>
-            <a:r>
-              <a:rPr lang="en-US" sz="1400" b="1" dirty="0">
-                <a:solidFill>
-                  <a:srgbClr val="1B2A4A"/>
-                </a:solidFill>
-                <a:latin typeface="Calibri" pitchFamily="34" charset="0"/>
-                <a:ea typeface="Calibri" pitchFamily="34" charset="-122"/>
-                <a:cs typeface="Calibri" pitchFamily="34" charset="-120"/>
-              </a:rPr>
-              <a:t>Changes of State</a:t>
-            </a:r>
-            <a:endParaRPr lang="en-US" sz="1400" dirty="0"/>
-          </a:p>
-        </p:txBody>
-      </p:sp>
-      <p:sp>
-        <p:nvSpPr>
-          <p:cNvPr id="12" name="Text 10"/>
-          <p:cNvSpPr/>
-          <p:nvPr/>
-        </p:nvSpPr>
-        <p:spPr>
-          <a:xfrm>
-            <a:off x="3429000" y="1737360"/>
-            <a:ext cx="2286000" cy="1097280"/>
-          </a:xfrm>
-          <a:prstGeom prst="rect">
-            <a:avLst/>
-          </a:prstGeom>
-          <a:noFill/>
-          <a:ln/>
-        </p:spPr>
-        <p:txBody>
-          <a:bodyPr wrap="square" rtlCol="0" anchor="t"/>
-          <a:lstStyle/>
-          <a:p>
-            <a:pPr indent="0" marL="0">
-              <a:buNone/>
-            </a:pPr>
-            <a:r>
-              <a:rPr lang="en-US" sz="1100" dirty="0">
-                <a:solidFill>
-                  <a:srgbClr val="3D3A36"/>
-                </a:solidFill>
-                <a:latin typeface="Calibri" pitchFamily="34" charset="0"/>
-                <a:ea typeface="Calibri" pitchFamily="34" charset="-122"/>
-                <a:cs typeface="Calibri" pitchFamily="34" charset="-120"/>
-              </a:rPr>
-              <a:t>Melting, freezing, evaporation, condensation, sublimation, deposition. Physical changes — reversible. Temperature flat during change.</a:t>
-            </a:r>
-            <a:endParaRPr lang="en-US" sz="1100" dirty="0"/>
-          </a:p>
-        </p:txBody>
-      </p:sp>
-      <p:sp>
-        <p:nvSpPr>
-          <p:cNvPr id="13" name="Shape 11"/>
-          <p:cNvSpPr/>
-          <p:nvPr/>
-        </p:nvSpPr>
-        <p:spPr>
-          <a:xfrm>
-            <a:off x="6126480" y="1188720"/>
-            <a:ext cx="2560320" cy="1828800"/>
-          </a:xfrm>
-          <a:prstGeom prst="rect">
-            <a:avLst/>
-          </a:prstGeom>
-          <a:solidFill>
-            <a:srgbClr val="FFFFFF"/>
-          </a:solidFill>
-          <a:ln w="12700">
-            <a:solidFill>
-              <a:srgbClr val="E5E2DC"/>
-            </a:solidFill>
-            <a:prstDash val="solid"/>
-          </a:ln>
-          <a:effectLst>
-            <a:outerShdw sx="100000" sy="100000" kx="0" ky="0" algn="bl" rotWithShape="0" blurRad="50800" dist="25400" dir="8100000">
-              <a:srgbClr val="000000">
-                <a:alpha val="10000"/>
-              </a:srgbClr>
-            </a:outerShdw>
-          </a:effectLst>
-        </p:spPr>
-      </p:sp>
-      <p:sp>
-        <p:nvSpPr>
-          <p:cNvPr id="14" name="Shape 12"/>
-          <p:cNvSpPr/>
-          <p:nvPr/>
-        </p:nvSpPr>
-        <p:spPr>
-          <a:xfrm>
-            <a:off x="6126480" y="1188720"/>
-            <a:ext cx="2560320" cy="54864"/>
-          </a:xfrm>
-          <a:prstGeom prst="rect">
-            <a:avLst/>
-          </a:prstGeom>
-          <a:solidFill>
-            <a:srgbClr val="2A9D8F"/>
-          </a:solidFill>
-          <a:ln/>
-        </p:spPr>
-      </p:sp>
-      <p:sp>
-        <p:nvSpPr>
-          <p:cNvPr id="15" name="Text 13"/>
-          <p:cNvSpPr/>
-          <p:nvPr/>
-        </p:nvSpPr>
-        <p:spPr>
-          <a:xfrm>
-            <a:off x="6263640" y="1325880"/>
-            <a:ext cx="2286000" cy="365760"/>
-          </a:xfrm>
-          <a:prstGeom prst="rect">
-            <a:avLst/>
-          </a:prstGeom>
-          <a:noFill/>
-          <a:ln/>
-        </p:spPr>
-        <p:txBody>
-          <a:bodyPr wrap="square" rtlCol="0" anchor="ctr"/>
-          <a:lstStyle/>
-          <a:p>
-            <a:pPr indent="0" marL="0">
-              <a:buNone/>
-            </a:pPr>
-            <a:r>
-              <a:rPr lang="en-US" sz="1400" b="1" dirty="0">
-                <a:solidFill>
-                  <a:srgbClr val="1B2A4A"/>
-                </a:solidFill>
-                <a:latin typeface="Calibri" pitchFamily="34" charset="0"/>
-                <a:ea typeface="Calibri" pitchFamily="34" charset="-122"/>
-                <a:cs typeface="Calibri" pitchFamily="34" charset="-120"/>
-              </a:rPr>
-              <a:t>Density</a:t>
-            </a:r>
-            <a:endParaRPr lang="en-US" sz="1400" dirty="0"/>
-          </a:p>
-        </p:txBody>
-      </p:sp>
-      <p:sp>
-        <p:nvSpPr>
-          <p:cNvPr id="16" name="Text 14"/>
-          <p:cNvSpPr/>
-          <p:nvPr/>
-        </p:nvSpPr>
-        <p:spPr>
-          <a:xfrm>
-            <a:off x="6263640" y="1737360"/>
-            <a:ext cx="2286000" cy="1097280"/>
-          </a:xfrm>
-          <a:prstGeom prst="rect">
-            <a:avLst/>
-          </a:prstGeom>
-          <a:noFill/>
-          <a:ln/>
-        </p:spPr>
-        <p:txBody>
-          <a:bodyPr wrap="square" rtlCol="0" anchor="t"/>
-          <a:lstStyle/>
-          <a:p>
-            <a:pPr indent="0" marL="0">
-              <a:buNone/>
-            </a:pPr>
-            <a:r>
-              <a:rPr lang="en-US" sz="1100" dirty="0">
-                <a:solidFill>
-                  <a:srgbClr val="3D3A36"/>
-                </a:solidFill>
-                <a:latin typeface="Calibri" pitchFamily="34" charset="0"/>
-                <a:ea typeface="Calibri" pitchFamily="34" charset="-122"/>
-                <a:cs typeface="Calibri" pitchFamily="34" charset="-120"/>
-              </a:rPr>
-              <a:t>Density = mass ÷ volume. Solid &gt; liquid &gt; gas (usually). Exception: ice floats because it's less dense than water.</a:t>
-            </a:r>
-            <a:endParaRPr lang="en-US" sz="1100" dirty="0"/>
+              <a:rPr lang="en-US" sz="3200" b="1" dirty="0">
+                <a:solidFill>
+                  <a:srgbClr val="FFFFFF"/>
+                </a:solidFill>
+                <a:latin typeface="Georgia" pitchFamily="34" charset="0"/>
+                <a:ea typeface="Georgia" pitchFamily="34" charset="-122"/>
+                <a:cs typeface="Georgia" pitchFamily="34" charset="-120"/>
+              </a:rPr>
+              <a:t>Particle Model &amp; States</a:t>
+            </a:r>
+            <a:endParaRPr lang="en-US" sz="3200" dirty="0"/>
           </a:p>
         </p:txBody>
       </p:sp>
@@ -1862,7 +1999,47 @@
         <p:spPr>
           <a:xfrm>
             <a:off x="0" y="0"/>
-            <a:ext cx="9144000" cy="54864"/>
+            <a:ext cx="9144000" cy="822960"/>
+          </a:xfrm>
+          <a:prstGeom prst="rect">
+            <a:avLst/>
+          </a:prstGeom>
+          <a:solidFill>
+            <a:srgbClr val="FFFFFF"/>
+          </a:solidFill>
+          <a:ln/>
+        </p:spPr>
+      </p:sp>
+      <p:sp>
+        <p:nvSpPr>
+          <p:cNvPr id="3" name="Shape 1"/>
+          <p:cNvSpPr/>
+          <p:nvPr/>
+        </p:nvSpPr>
+        <p:spPr>
+          <a:xfrm>
+            <a:off x="0" y="804672"/>
+            <a:ext cx="9144000" cy="27432"/>
+          </a:xfrm>
+          <a:prstGeom prst="rect">
+            <a:avLst/>
+          </a:prstGeom>
+          <a:solidFill>
+            <a:srgbClr val="E5E2DC"/>
+          </a:solidFill>
+          <a:ln/>
+        </p:spPr>
+      </p:sp>
+      <p:sp>
+        <p:nvSpPr>
+          <p:cNvPr id="4" name="Shape 2"/>
+          <p:cNvSpPr/>
+          <p:nvPr/>
+        </p:nvSpPr>
+        <p:spPr>
+          <a:xfrm>
+            <a:off x="548640" y="201168"/>
+            <a:ext cx="54864" cy="420624"/>
           </a:xfrm>
           <a:prstGeom prst="rect">
             <a:avLst/>
@@ -1875,14 +2052,14 @@
       </p:sp>
       <p:sp>
         <p:nvSpPr>
-          <p:cNvPr id="3" name="Text 1"/>
-          <p:cNvSpPr/>
-          <p:nvPr/>
-        </p:nvSpPr>
-        <p:spPr>
-          <a:xfrm>
-            <a:off x="7772400" y="4709160"/>
-            <a:ext cx="1097280" cy="320040"/>
+          <p:cNvPr id="5" name="Text 3"/>
+          <p:cNvSpPr/>
+          <p:nvPr/>
+        </p:nvSpPr>
+        <p:spPr>
+          <a:xfrm>
+            <a:off x="777240" y="137160"/>
+            <a:ext cx="7772400" cy="548640"/>
           </a:xfrm>
           <a:prstGeom prst="rect">
             <a:avLst/>
@@ -1891,183 +2068,99 @@
           <a:ln/>
         </p:spPr>
         <p:txBody>
-          <a:bodyPr wrap="square" rtlCol="0" anchor="ctr"/>
-          <a:lstStyle/>
-          <a:p>
-            <a:pPr algn="r" indent="0" marL="0">
+          <a:bodyPr wrap="square" lIns="0" tIns="0" rIns="0" bIns="0" rtlCol="0" anchor="ctr"/>
+          <a:lstStyle/>
+          <a:p>
+            <a:pPr indent="0" marL="0">
               <a:buNone/>
             </a:pPr>
             <a:r>
-              <a:rPr lang="en-US" sz="900" dirty="0">
-                <a:solidFill>
-                  <a:srgbClr val="6B6660"/>
+              <a:rPr lang="en-US" sz="2000" b="1" dirty="0">
+                <a:solidFill>
+                  <a:srgbClr val="1B2A4A"/>
+                </a:solidFill>
+                <a:latin typeface="Georgia" pitchFamily="34" charset="0"/>
+                <a:ea typeface="Georgia" pitchFamily="34" charset="-122"/>
+                <a:cs typeface="Georgia" pitchFamily="34" charset="-120"/>
+              </a:rPr>
+              <a:t>Particles &amp; States Review</a:t>
+            </a:r>
+            <a:endParaRPr lang="en-US" sz="2000" dirty="0"/>
+          </a:p>
+        </p:txBody>
+      </p:sp>
+      <p:sp>
+        <p:nvSpPr>
+          <p:cNvPr id="6" name="Text 4"/>
+          <p:cNvSpPr/>
+          <p:nvPr/>
+        </p:nvSpPr>
+        <p:spPr>
+          <a:xfrm>
+            <a:off x="731520" y="1051560"/>
+            <a:ext cx="7680960" cy="3108960"/>
+          </a:xfrm>
+          <a:prstGeom prst="rect">
+            <a:avLst/>
+          </a:prstGeom>
+          <a:noFill/>
+          <a:ln/>
+        </p:spPr>
+        <p:txBody>
+          <a:bodyPr wrap="square" rtlCol="0" anchor="t"/>
+          <a:lstStyle/>
+          <a:p>
+            <a:pPr marL="342900" indent="-342900">
+              <a:spcAft>
+                <a:spcPts val="800"/>
+              </a:spcAft>
+              <a:buSzPct val="100000"/>
+              <a:buChar char="•"/>
+            </a:pPr>
+            <a:r>
+              <a:rPr lang="en-US" sz="1500" dirty="0">
+                <a:solidFill>
+                  <a:srgbClr val="3D3A36"/>
                 </a:solidFill>
                 <a:latin typeface="Calibri" pitchFamily="34" charset="0"/>
                 <a:ea typeface="Calibri" pitchFamily="34" charset="-122"/>
                 <a:cs typeface="Calibri" pitchFamily="34" charset="-120"/>
               </a:rPr>
-              <a:t>3 / 4</a:t>
-            </a:r>
-            <a:endParaRPr lang="en-US" sz="900" dirty="0"/>
-          </a:p>
-        </p:txBody>
-      </p:sp>
-      <p:sp>
-        <p:nvSpPr>
-          <p:cNvPr id="4" name="Text 2"/>
-          <p:cNvSpPr/>
-          <p:nvPr/>
-        </p:nvSpPr>
-        <p:spPr>
-          <a:xfrm>
-            <a:off x="457200" y="274320"/>
-            <a:ext cx="8229600" cy="640080"/>
-          </a:xfrm>
-          <a:prstGeom prst="rect">
-            <a:avLst/>
-          </a:prstGeom>
-          <a:noFill/>
-          <a:ln/>
-        </p:spPr>
-        <p:txBody>
-          <a:bodyPr wrap="square" rtlCol="0" anchor="ctr"/>
-          <a:lstStyle/>
-          <a:p>
-            <a:pPr indent="0" marL="0">
-              <a:buNone/>
-            </a:pPr>
-            <a:r>
-              <a:rPr lang="en-US" sz="2600" b="1" dirty="0">
-                <a:solidFill>
-                  <a:srgbClr val="1B2A4A"/>
-                </a:solidFill>
-                <a:latin typeface="Georgia" pitchFamily="34" charset="0"/>
-                <a:ea typeface="Georgia" pitchFamily="34" charset="-122"/>
-                <a:cs typeface="Georgia" pitchFamily="34" charset="-120"/>
-              </a:rPr>
-              <a:t>Mixtures &amp; Separating</a:t>
-            </a:r>
-            <a:endParaRPr lang="en-US" sz="2600" dirty="0"/>
-          </a:p>
-        </p:txBody>
-      </p:sp>
-      <p:sp>
-        <p:nvSpPr>
-          <p:cNvPr id="5" name="Shape 3"/>
-          <p:cNvSpPr/>
-          <p:nvPr/>
-        </p:nvSpPr>
-        <p:spPr>
-          <a:xfrm>
-            <a:off x="457200" y="1188720"/>
-            <a:ext cx="2560320" cy="1828800"/>
-          </a:xfrm>
-          <a:prstGeom prst="rect">
-            <a:avLst/>
-          </a:prstGeom>
-          <a:solidFill>
-            <a:srgbClr val="FFFFFF"/>
-          </a:solidFill>
-          <a:ln w="12700">
-            <a:solidFill>
-              <a:srgbClr val="E5E2DC"/>
-            </a:solidFill>
-            <a:prstDash val="solid"/>
-          </a:ln>
-          <a:effectLst>
-            <a:outerShdw sx="100000" sy="100000" kx="0" ky="0" algn="bl" rotWithShape="0" blurRad="50800" dist="25400" dir="8100000">
-              <a:srgbClr val="000000">
-                <a:alpha val="10000"/>
-              </a:srgbClr>
-            </a:outerShdw>
-          </a:effectLst>
-        </p:spPr>
-      </p:sp>
-      <p:sp>
-        <p:nvSpPr>
-          <p:cNvPr id="6" name="Shape 4"/>
-          <p:cNvSpPr/>
-          <p:nvPr/>
-        </p:nvSpPr>
-        <p:spPr>
-          <a:xfrm>
-            <a:off x="457200" y="1188720"/>
-            <a:ext cx="2560320" cy="54864"/>
-          </a:xfrm>
-          <a:prstGeom prst="rect">
-            <a:avLst/>
-          </a:prstGeom>
-          <a:solidFill>
-            <a:srgbClr val="2A9D8F"/>
-          </a:solidFill>
-          <a:ln/>
-        </p:spPr>
-      </p:sp>
-      <p:sp>
-        <p:nvSpPr>
-          <p:cNvPr id="7" name="Text 5"/>
-          <p:cNvSpPr/>
-          <p:nvPr/>
-        </p:nvSpPr>
-        <p:spPr>
-          <a:xfrm>
-            <a:off x="594360" y="1325880"/>
-            <a:ext cx="2286000" cy="365760"/>
-          </a:xfrm>
-          <a:prstGeom prst="rect">
-            <a:avLst/>
-          </a:prstGeom>
-          <a:noFill/>
-          <a:ln/>
-        </p:spPr>
-        <p:txBody>
-          <a:bodyPr wrap="square" rtlCol="0" anchor="ctr"/>
-          <a:lstStyle/>
-          <a:p>
-            <a:pPr indent="0" marL="0">
-              <a:buNone/>
-            </a:pPr>
-            <a:r>
-              <a:rPr lang="en-US" sz="1400" b="1" dirty="0">
-                <a:solidFill>
-                  <a:srgbClr val="1B2A4A"/>
+              <a:t>All matter is made of tiny particles that are ALWAYS moving.</a:t>
+            </a:r>
+            <a:endParaRPr lang="en-US" sz="1500" dirty="0"/>
+          </a:p>
+          <a:p>
+            <a:pPr marL="342900" indent="-342900">
+              <a:spcAft>
+                <a:spcPts val="800"/>
+              </a:spcAft>
+              <a:buSzPct val="100000"/>
+              <a:buChar char="•"/>
+            </a:pPr>
+            <a:r>
+              <a:rPr lang="en-US" sz="1500" dirty="0">
+                <a:solidFill>
+                  <a:srgbClr val="3D3A36"/>
                 </a:solidFill>
                 <a:latin typeface="Calibri" pitchFamily="34" charset="0"/>
                 <a:ea typeface="Calibri" pitchFamily="34" charset="-122"/>
                 <a:cs typeface="Calibri" pitchFamily="34" charset="-120"/>
               </a:rPr>
-              <a:t>Mixtures</a:t>
-            </a:r>
-            <a:endParaRPr lang="en-US" sz="1400" dirty="0"/>
-          </a:p>
-        </p:txBody>
-      </p:sp>
-      <p:sp>
-        <p:nvSpPr>
-          <p:cNvPr id="8" name="Text 6"/>
-          <p:cNvSpPr/>
-          <p:nvPr/>
-        </p:nvSpPr>
-        <p:spPr>
-          <a:xfrm>
-            <a:off x="594360" y="1737360"/>
-            <a:ext cx="2286000" cy="1097280"/>
-          </a:xfrm>
-          <a:prstGeom prst="rect">
-            <a:avLst/>
-          </a:prstGeom>
-          <a:noFill/>
-          <a:ln/>
-        </p:spPr>
-        <p:txBody>
-          <a:bodyPr wrap="square" rtlCol="0" anchor="t"/>
-          <a:lstStyle/>
-          <a:p>
-            <a:pPr indent="0" marL="0">
-              <a:buNone/>
-            </a:pPr>
-            <a:r>
-              <a:rPr lang="en-US" sz="1100" dirty="0">
+              <a:t>Solid: particles vibrate in fixed positions (fixed shape, fixed volume).</a:t>
+            </a:r>
+            <a:endParaRPr lang="en-US" sz="1500" dirty="0"/>
+          </a:p>
+          <a:p>
+            <a:pPr marL="342900" indent="-342900">
+              <a:spcAft>
+                <a:spcPts val="800"/>
+              </a:spcAft>
+              <a:buSzPct val="100000"/>
+              <a:buChar char="•"/>
+            </a:pPr>
+            <a:r>
+              <a:rPr lang="en-US" sz="1500" dirty="0">
                 <a:solidFill>
                   <a:srgbClr val="3D3A36"/>
                 </a:solidFill>
@@ -2075,129 +2168,41 @@
                 <a:ea typeface="Calibri" pitchFamily="34" charset="-122"/>
                 <a:cs typeface="Calibri" pitchFamily="34" charset="-120"/>
               </a:rPr>
-              <a:t>Not chemically bonded. Solutions: solute + solvent. Saturated = no more dissolves. Faster dissolving: heat, stir, crush.</a:t>
-            </a:r>
-            <a:endParaRPr lang="en-US" sz="1100" dirty="0"/>
-          </a:p>
-        </p:txBody>
-      </p:sp>
-      <p:sp>
-        <p:nvSpPr>
-          <p:cNvPr id="9" name="Shape 7"/>
-          <p:cNvSpPr/>
-          <p:nvPr/>
-        </p:nvSpPr>
-        <p:spPr>
-          <a:xfrm>
-            <a:off x="3291840" y="1188720"/>
-            <a:ext cx="2560320" cy="1828800"/>
-          </a:xfrm>
-          <a:prstGeom prst="rect">
-            <a:avLst/>
-          </a:prstGeom>
-          <a:solidFill>
-            <a:srgbClr val="FFFFFF"/>
-          </a:solidFill>
-          <a:ln w="12700">
-            <a:solidFill>
-              <a:srgbClr val="E5E2DC"/>
-            </a:solidFill>
-            <a:prstDash val="solid"/>
-          </a:ln>
-          <a:effectLst>
-            <a:outerShdw sx="100000" sy="100000" kx="0" ky="0" algn="bl" rotWithShape="0" blurRad="50800" dist="25400" dir="8100000">
-              <a:srgbClr val="000000">
-                <a:alpha val="10000"/>
-              </a:srgbClr>
-            </a:outerShdw>
-          </a:effectLst>
-        </p:spPr>
-      </p:sp>
-      <p:sp>
-        <p:nvSpPr>
-          <p:cNvPr id="10" name="Shape 8"/>
-          <p:cNvSpPr/>
-          <p:nvPr/>
-        </p:nvSpPr>
-        <p:spPr>
-          <a:xfrm>
-            <a:off x="3291840" y="1188720"/>
-            <a:ext cx="2560320" cy="54864"/>
-          </a:xfrm>
-          <a:prstGeom prst="rect">
-            <a:avLst/>
-          </a:prstGeom>
-          <a:solidFill>
-            <a:srgbClr val="2A9D8F"/>
-          </a:solidFill>
-          <a:ln/>
-        </p:spPr>
-      </p:sp>
-      <p:sp>
-        <p:nvSpPr>
-          <p:cNvPr id="11" name="Text 9"/>
-          <p:cNvSpPr/>
-          <p:nvPr/>
-        </p:nvSpPr>
-        <p:spPr>
-          <a:xfrm>
-            <a:off x="3429000" y="1325880"/>
-            <a:ext cx="2286000" cy="365760"/>
-          </a:xfrm>
-          <a:prstGeom prst="rect">
-            <a:avLst/>
-          </a:prstGeom>
-          <a:noFill/>
-          <a:ln/>
-        </p:spPr>
-        <p:txBody>
-          <a:bodyPr wrap="square" rtlCol="0" anchor="ctr"/>
-          <a:lstStyle/>
-          <a:p>
-            <a:pPr indent="0" marL="0">
-              <a:buNone/>
-            </a:pPr>
-            <a:r>
-              <a:rPr lang="en-US" sz="1400" b="1" dirty="0">
-                <a:solidFill>
-                  <a:srgbClr val="1B2A4A"/>
+              <a:t>Liquid: particles slide past each other (fixed volume, takes container shape).</a:t>
+            </a:r>
+            <a:endParaRPr lang="en-US" sz="1500" dirty="0"/>
+          </a:p>
+          <a:p>
+            <a:pPr marL="342900" indent="-342900">
+              <a:spcAft>
+                <a:spcPts val="800"/>
+              </a:spcAft>
+              <a:buSzPct val="100000"/>
+              <a:buChar char="•"/>
+            </a:pPr>
+            <a:r>
+              <a:rPr lang="en-US" sz="1500" dirty="0">
+                <a:solidFill>
+                  <a:srgbClr val="3D3A36"/>
                 </a:solidFill>
                 <a:latin typeface="Calibri" pitchFamily="34" charset="0"/>
                 <a:ea typeface="Calibri" pitchFamily="34" charset="-122"/>
                 <a:cs typeface="Calibri" pitchFamily="34" charset="-120"/>
               </a:rPr>
-              <a:t>Separation Methods</a:t>
-            </a:r>
-            <a:endParaRPr lang="en-US" sz="1400" dirty="0"/>
-          </a:p>
-        </p:txBody>
-      </p:sp>
-      <p:sp>
-        <p:nvSpPr>
-          <p:cNvPr id="12" name="Text 10"/>
-          <p:cNvSpPr/>
-          <p:nvPr/>
-        </p:nvSpPr>
-        <p:spPr>
-          <a:xfrm>
-            <a:off x="3429000" y="1737360"/>
-            <a:ext cx="2286000" cy="1097280"/>
-          </a:xfrm>
-          <a:prstGeom prst="rect">
-            <a:avLst/>
-          </a:prstGeom>
-          <a:noFill/>
-          <a:ln/>
-        </p:spPr>
-        <p:txBody>
-          <a:bodyPr wrap="square" rtlCol="0" anchor="t"/>
-          <a:lstStyle/>
-          <a:p>
-            <a:pPr indent="0" marL="0">
-              <a:buNone/>
-            </a:pPr>
-            <a:r>
-              <a:rPr lang="en-US" sz="1100" dirty="0">
+              <a:t>Gas: particles move fast, spread far apart (no fixed shape or volume).</a:t>
+            </a:r>
+            <a:endParaRPr lang="en-US" sz="1500" dirty="0"/>
+          </a:p>
+          <a:p>
+            <a:pPr marL="342900" indent="-342900">
+              <a:spcAft>
+                <a:spcPts val="800"/>
+              </a:spcAft>
+              <a:buSzPct val="100000"/>
+              <a:buChar char="•"/>
+            </a:pPr>
+            <a:r>
+              <a:rPr lang="en-US" sz="1500" dirty="0">
                 <a:solidFill>
                   <a:srgbClr val="3D3A36"/>
                 </a:solidFill>
@@ -2205,139 +2210,9 @@
                 <a:ea typeface="Calibri" pitchFamily="34" charset="-122"/>
                 <a:cs typeface="Calibri" pitchFamily="34" charset="-120"/>
               </a:rPr>
-              <a:t>Filtration (insoluble solid). Evaporation (dissolved solid). Distillation (pure liquid). Chromatography (colours). Magnet (magnetic).</a:t>
-            </a:r>
-            <a:endParaRPr lang="en-US" sz="1100" dirty="0"/>
-          </a:p>
-        </p:txBody>
-      </p:sp>
-      <p:sp>
-        <p:nvSpPr>
-          <p:cNvPr id="13" name="Shape 11"/>
-          <p:cNvSpPr/>
-          <p:nvPr/>
-        </p:nvSpPr>
-        <p:spPr>
-          <a:xfrm>
-            <a:off x="6126480" y="1188720"/>
-            <a:ext cx="2560320" cy="1828800"/>
-          </a:xfrm>
-          <a:prstGeom prst="rect">
-            <a:avLst/>
-          </a:prstGeom>
-          <a:solidFill>
-            <a:srgbClr val="FFFFFF"/>
-          </a:solidFill>
-          <a:ln w="12700">
-            <a:solidFill>
-              <a:srgbClr val="E5E2DC"/>
-            </a:solidFill>
-            <a:prstDash val="solid"/>
-          </a:ln>
-          <a:effectLst>
-            <a:outerShdw sx="100000" sy="100000" kx="0" ky="0" algn="bl" rotWithShape="0" blurRad="50800" dist="25400" dir="8100000">
-              <a:srgbClr val="000000">
-                <a:alpha val="10000"/>
-              </a:srgbClr>
-            </a:outerShdw>
-          </a:effectLst>
-        </p:spPr>
-      </p:sp>
-      <p:sp>
-        <p:nvSpPr>
-          <p:cNvPr id="14" name="Shape 12"/>
-          <p:cNvSpPr/>
-          <p:nvPr/>
-        </p:nvSpPr>
-        <p:spPr>
-          <a:xfrm>
-            <a:off x="6126480" y="1188720"/>
-            <a:ext cx="2560320" cy="54864"/>
-          </a:xfrm>
-          <a:prstGeom prst="rect">
-            <a:avLst/>
-          </a:prstGeom>
-          <a:solidFill>
-            <a:srgbClr val="2A9D8F"/>
-          </a:solidFill>
-          <a:ln/>
-        </p:spPr>
-      </p:sp>
-      <p:sp>
-        <p:nvSpPr>
-          <p:cNvPr id="15" name="Text 13"/>
-          <p:cNvSpPr/>
-          <p:nvPr/>
-        </p:nvSpPr>
-        <p:spPr>
-          <a:xfrm>
-            <a:off x="6263640" y="1325880"/>
-            <a:ext cx="2286000" cy="365760"/>
-          </a:xfrm>
-          <a:prstGeom prst="rect">
-            <a:avLst/>
-          </a:prstGeom>
-          <a:noFill/>
-          <a:ln/>
-        </p:spPr>
-        <p:txBody>
-          <a:bodyPr wrap="square" rtlCol="0" anchor="ctr"/>
-          <a:lstStyle/>
-          <a:p>
-            <a:pPr indent="0" marL="0">
-              <a:buNone/>
-            </a:pPr>
-            <a:r>
-              <a:rPr lang="en-US" sz="1400" b="1" dirty="0">
-                <a:solidFill>
-                  <a:srgbClr val="1B2A4A"/>
-                </a:solidFill>
-                <a:latin typeface="Calibri" pitchFamily="34" charset="0"/>
-                <a:ea typeface="Calibri" pitchFamily="34" charset="-122"/>
-                <a:cs typeface="Calibri" pitchFamily="34" charset="-120"/>
-              </a:rPr>
-              <a:t>Key Terms</a:t>
-            </a:r>
-            <a:endParaRPr lang="en-US" sz="1400" dirty="0"/>
-          </a:p>
-        </p:txBody>
-      </p:sp>
-      <p:sp>
-        <p:nvSpPr>
-          <p:cNvPr id="16" name="Text 14"/>
-          <p:cNvSpPr/>
-          <p:nvPr/>
-        </p:nvSpPr>
-        <p:spPr>
-          <a:xfrm>
-            <a:off x="6263640" y="1737360"/>
-            <a:ext cx="2286000" cy="1097280"/>
-          </a:xfrm>
-          <a:prstGeom prst="rect">
-            <a:avLst/>
-          </a:prstGeom>
-          <a:noFill/>
-          <a:ln/>
-        </p:spPr>
-        <p:txBody>
-          <a:bodyPr wrap="square" rtlCol="0" anchor="t"/>
-          <a:lstStyle/>
-          <a:p>
-            <a:pPr indent="0" marL="0">
-              <a:buNone/>
-            </a:pPr>
-            <a:r>
-              <a:rPr lang="en-US" sz="1100" dirty="0">
-                <a:solidFill>
-                  <a:srgbClr val="3D3A36"/>
-                </a:solidFill>
-                <a:latin typeface="Calibri" pitchFamily="34" charset="0"/>
-                <a:ea typeface="Calibri" pitchFamily="34" charset="-122"/>
-                <a:cs typeface="Calibri" pitchFamily="34" charset="-120"/>
-              </a:rPr>
-              <a:t>Solute: dissolves. Solvent: does dissolving. Soluble: can dissolve. Insoluble: can't dissolve. Residue: stays in filter. Filtrate: passes through.</a:t>
-            </a:r>
-            <a:endParaRPr lang="en-US" sz="1100" dirty="0"/>
+              <a:t>Higher temperature = particles move faster = more energy.</a:t>
+            </a:r>
+            <a:endParaRPr lang="en-US" sz="1500" dirty="0"/>
           </a:p>
         </p:txBody>
       </p:sp>
@@ -2352,10 +2227,153 @@
 <file path=ppt/slides/slide4.xml><?xml version="1.0" encoding="utf-8"?>
 <p:sld xmlns:a="http://schemas.openxmlformats.org/drawingml/2006/main" xmlns:r="http://schemas.openxmlformats.org/officeDocument/2006/relationships" xmlns:p="http://schemas.openxmlformats.org/presentationml/2006/main">
   <p:cSld name="Slide 4">
+    <p:spTree>
+      <p:nvGrpSpPr>
+        <p:cNvPr id="1" name=""/>
+        <p:cNvGrpSpPr/>
+        <p:nvPr/>
+      </p:nvGrpSpPr>
+      <p:grpSpPr>
+        <a:xfrm>
+          <a:off x="0" y="0"/>
+          <a:ext cx="0" cy="0"/>
+          <a:chOff x="0" y="0"/>
+          <a:chExt cx="0" cy="0"/>
+        </a:xfrm>
+      </p:grpSpPr>
+      <p:sp>
+        <p:nvSpPr>
+          <p:cNvPr id="2" name="Shape 0"/>
+          <p:cNvSpPr/>
+          <p:nvPr/>
+        </p:nvSpPr>
+        <p:spPr>
+          <a:xfrm>
+            <a:off x="0" y="0"/>
+            <a:ext cx="9144000" cy="5143500"/>
+          </a:xfrm>
+          <a:prstGeom prst="rect">
+            <a:avLst/>
+          </a:prstGeom>
+          <a:solidFill>
+            <a:srgbClr val="1B2A4A"/>
+          </a:solidFill>
+          <a:ln/>
+        </p:spPr>
+      </p:sp>
+      <p:sp>
+        <p:nvSpPr>
+          <p:cNvPr id="3" name="Shape 1"/>
+          <p:cNvSpPr/>
+          <p:nvPr/>
+        </p:nvSpPr>
+        <p:spPr>
+          <a:xfrm>
+            <a:off x="731520" y="1828800"/>
+            <a:ext cx="73152" cy="1463040"/>
+          </a:xfrm>
+          <a:prstGeom prst="rect">
+            <a:avLst/>
+          </a:prstGeom>
+          <a:solidFill>
+            <a:srgbClr val="2A9D8F"/>
+          </a:solidFill>
+          <a:ln/>
+        </p:spPr>
+      </p:sp>
+      <p:sp>
+        <p:nvSpPr>
+          <p:cNvPr id="4" name="Text 2"/>
+          <p:cNvSpPr/>
+          <p:nvPr/>
+        </p:nvSpPr>
+        <p:spPr>
+          <a:xfrm>
+            <a:off x="1097280" y="1463040"/>
+            <a:ext cx="1097280" cy="1097280"/>
+          </a:xfrm>
+          <a:prstGeom prst="rect">
+            <a:avLst/>
+          </a:prstGeom>
+          <a:noFill/>
+          <a:ln/>
+        </p:spPr>
+        <p:txBody>
+          <a:bodyPr wrap="square" rtlCol="0" anchor="ctr"/>
+          <a:lstStyle/>
+          <a:p>
+            <a:pPr algn="l" indent="0" marL="0">
+              <a:buNone/>
+            </a:pPr>
+            <a:r>
+              <a:rPr lang="en-US" sz="4800" b="1" dirty="0">
+                <a:solidFill>
+                  <a:srgbClr val="2A9D8F"/>
+                </a:solidFill>
+                <a:latin typeface="Georgia" pitchFamily="34" charset="0"/>
+                <a:ea typeface="Georgia" pitchFamily="34" charset="-122"/>
+                <a:cs typeface="Georgia" pitchFamily="34" charset="-120"/>
+              </a:rPr>
+              <a:t>2</a:t>
+            </a:r>
+            <a:endParaRPr lang="en-US" sz="4800" dirty="0"/>
+          </a:p>
+        </p:txBody>
+      </p:sp>
+      <p:sp>
+        <p:nvSpPr>
+          <p:cNvPr id="5" name="Text 3"/>
+          <p:cNvSpPr/>
+          <p:nvPr/>
+        </p:nvSpPr>
+        <p:spPr>
+          <a:xfrm>
+            <a:off x="2194560" y="1920240"/>
+            <a:ext cx="5943600" cy="1097280"/>
+          </a:xfrm>
+          <a:prstGeom prst="rect">
+            <a:avLst/>
+          </a:prstGeom>
+          <a:noFill/>
+          <a:ln/>
+        </p:spPr>
+        <p:txBody>
+          <a:bodyPr wrap="square" rtlCol="0" anchor="ctr"/>
+          <a:lstStyle/>
+          <a:p>
+            <a:pPr indent="0" marL="0">
+              <a:buNone/>
+            </a:pPr>
+            <a:r>
+              <a:rPr lang="en-US" sz="3200" b="1" dirty="0">
+                <a:solidFill>
+                  <a:srgbClr val="FFFFFF"/>
+                </a:solidFill>
+                <a:latin typeface="Georgia" pitchFamily="34" charset="0"/>
+                <a:ea typeface="Georgia" pitchFamily="34" charset="-122"/>
+                <a:cs typeface="Georgia" pitchFamily="34" charset="-120"/>
+              </a:rPr>
+              <a:t>Changes of State</a:t>
+            </a:r>
+            <a:endParaRPr lang="en-US" sz="3200" dirty="0"/>
+          </a:p>
+        </p:txBody>
+      </p:sp>
+    </p:spTree>
+  </p:cSld>
+  <p:clrMapOvr>
+    <a:masterClrMapping/>
+  </p:clrMapOvr>
+</p:sld>
+</file>
+
+<file path=ppt/slides/slide5.xml><?xml version="1.0" encoding="utf-8"?>
+<p:sld xmlns:a="http://schemas.openxmlformats.org/drawingml/2006/main" xmlns:r="http://schemas.openxmlformats.org/officeDocument/2006/relationships" xmlns:p="http://schemas.openxmlformats.org/presentationml/2006/main">
+  <p:cSld name="Slide 5">
     <p:bg>
       <p:bgPr>
         <a:solidFill>
-          <a:srgbClr val="1B2A4A"/>
+          <a:srgbClr val="FAF8F5"/>
         </a:solidFill>
       </p:bgPr>
     </p:bg>
@@ -2382,27 +2400,67 @@
         <p:spPr>
           <a:xfrm>
             <a:off x="0" y="0"/>
-            <a:ext cx="109728" cy="5143500"/>
-          </a:xfrm>
-          <a:prstGeom prst="rect">
-            <a:avLst/>
-          </a:prstGeom>
-          <a:solidFill>
-            <a:srgbClr val="E9C46A"/>
-          </a:solidFill>
-          <a:ln/>
-        </p:spPr>
-      </p:sp>
-      <p:sp>
-        <p:nvSpPr>
-          <p:cNvPr id="3" name="Text 1"/>
-          <p:cNvSpPr/>
-          <p:nvPr/>
-        </p:nvSpPr>
-        <p:spPr>
-          <a:xfrm>
-            <a:off x="731520" y="457200"/>
-            <a:ext cx="7772400" cy="731520"/>
+            <a:ext cx="9144000" cy="822960"/>
+          </a:xfrm>
+          <a:prstGeom prst="rect">
+            <a:avLst/>
+          </a:prstGeom>
+          <a:solidFill>
+            <a:srgbClr val="FFFFFF"/>
+          </a:solidFill>
+          <a:ln/>
+        </p:spPr>
+      </p:sp>
+      <p:sp>
+        <p:nvSpPr>
+          <p:cNvPr id="3" name="Shape 1"/>
+          <p:cNvSpPr/>
+          <p:nvPr/>
+        </p:nvSpPr>
+        <p:spPr>
+          <a:xfrm>
+            <a:off x="0" y="804672"/>
+            <a:ext cx="9144000" cy="27432"/>
+          </a:xfrm>
+          <a:prstGeom prst="rect">
+            <a:avLst/>
+          </a:prstGeom>
+          <a:solidFill>
+            <a:srgbClr val="E5E2DC"/>
+          </a:solidFill>
+          <a:ln/>
+        </p:spPr>
+      </p:sp>
+      <p:sp>
+        <p:nvSpPr>
+          <p:cNvPr id="4" name="Shape 2"/>
+          <p:cNvSpPr/>
+          <p:nvPr/>
+        </p:nvSpPr>
+        <p:spPr>
+          <a:xfrm>
+            <a:off x="548640" y="201168"/>
+            <a:ext cx="54864" cy="420624"/>
+          </a:xfrm>
+          <a:prstGeom prst="rect">
+            <a:avLst/>
+          </a:prstGeom>
+          <a:solidFill>
+            <a:srgbClr val="2A9D8F"/>
+          </a:solidFill>
+          <a:ln/>
+        </p:spPr>
+      </p:sp>
+      <p:sp>
+        <p:nvSpPr>
+          <p:cNvPr id="5" name="Text 3"/>
+          <p:cNvSpPr/>
+          <p:nvPr/>
+        </p:nvSpPr>
+        <p:spPr>
+          <a:xfrm>
+            <a:off x="777240" y="137160"/>
+            <a:ext cx="7772400" cy="548640"/>
           </a:xfrm>
           <a:prstGeom prst="rect">
             <a:avLst/>
@@ -2411,37 +2469,37 @@
           <a:ln/>
         </p:spPr>
         <p:txBody>
-          <a:bodyPr wrap="square" rtlCol="0" anchor="ctr"/>
+          <a:bodyPr wrap="square" lIns="0" tIns="0" rIns="0" bIns="0" rtlCol="0" anchor="ctr"/>
           <a:lstStyle/>
           <a:p>
             <a:pPr indent="0" marL="0">
               <a:buNone/>
             </a:pPr>
             <a:r>
-              <a:rPr lang="en-US" sz="3200" b="1" dirty="0">
-                <a:solidFill>
-                  <a:srgbClr val="FFFFFF"/>
+              <a:rPr lang="en-US" sz="2000" b="1" dirty="0">
+                <a:solidFill>
+                  <a:srgbClr val="1B2A4A"/>
                 </a:solidFill>
                 <a:latin typeface="Georgia" pitchFamily="34" charset="0"/>
                 <a:ea typeface="Georgia" pitchFamily="34" charset="-122"/>
                 <a:cs typeface="Georgia" pitchFamily="34" charset="-120"/>
               </a:rPr>
-              <a:t>Key Takeaways</a:t>
-            </a:r>
-            <a:endParaRPr lang="en-US" sz="3200" dirty="0"/>
-          </a:p>
-        </p:txBody>
-      </p:sp>
-      <p:sp>
-        <p:nvSpPr>
-          <p:cNvPr id="4" name="Text 2"/>
-          <p:cNvSpPr/>
-          <p:nvPr/>
-        </p:nvSpPr>
-        <p:spPr>
-          <a:xfrm>
-            <a:off x="731520" y="1463040"/>
-            <a:ext cx="7772400" cy="3200400"/>
+              <a:t>State Changes Review</a:t>
+            </a:r>
+            <a:endParaRPr lang="en-US" sz="2000" dirty="0"/>
+          </a:p>
+        </p:txBody>
+      </p:sp>
+      <p:sp>
+        <p:nvSpPr>
+          <p:cNvPr id="6" name="Text 4"/>
+          <p:cNvSpPr/>
+          <p:nvPr/>
+        </p:nvSpPr>
+        <p:spPr>
+          <a:xfrm>
+            <a:off x="731520" y="1051560"/>
+            <a:ext cx="7680960" cy="3108960"/>
           </a:xfrm>
           <a:prstGeom prst="rect">
             <a:avLst/>
@@ -2455,7 +2513,7 @@
           <a:p>
             <a:pPr marL="342900" indent="-342900">
               <a:spcAft>
-                <a:spcPts val="1000"/>
+                <a:spcPts val="800"/>
               </a:spcAft>
               <a:buSzPct val="100000"/>
               <a:buChar char="•"/>
@@ -2463,20 +2521,20 @@
             <a:r>
               <a:rPr lang="en-US" sz="1500" dirty="0">
                 <a:solidFill>
-                  <a:srgbClr val="CADCFC"/>
+                  <a:srgbClr val="3D3A36"/>
                 </a:solidFill>
                 <a:latin typeface="Calibri" pitchFamily="34" charset="0"/>
                 <a:ea typeface="Calibri" pitchFamily="34" charset="-122"/>
                 <a:cs typeface="Calibri" pitchFamily="34" charset="-120"/>
               </a:rPr>
-              <a:t>Particles: solid (vibrate), liquid (slide), gas (fast, far apart)</a:t>
+              <a:t>Melting (solid→liquid), Freezing (liquid→solid), Boiling (liquid→gas).</a:t>
             </a:r>
             <a:endParaRPr lang="en-US" sz="1500" dirty="0"/>
           </a:p>
           <a:p>
             <a:pPr marL="342900" indent="-342900">
               <a:spcAft>
-                <a:spcPts val="1000"/>
+                <a:spcPts val="800"/>
               </a:spcAft>
               <a:buSzPct val="100000"/>
               <a:buChar char="•"/>
@@ -2484,20 +2542,20 @@
             <a:r>
               <a:rPr lang="en-US" sz="1500" dirty="0">
                 <a:solidFill>
-                  <a:srgbClr val="CADCFC"/>
+                  <a:srgbClr val="3D3A36"/>
                 </a:solidFill>
                 <a:latin typeface="Calibri" pitchFamily="34" charset="0"/>
                 <a:ea typeface="Calibri" pitchFamily="34" charset="-122"/>
                 <a:cs typeface="Calibri" pitchFamily="34" charset="-120"/>
               </a:rPr>
-              <a:t>Changes of state = physical, reversible; temperature flat during change</a:t>
+              <a:t>Evaporation (surface only, any temp) vs Boiling (throughout, at boiling point).</a:t>
             </a:r>
             <a:endParaRPr lang="en-US" sz="1500" dirty="0"/>
           </a:p>
           <a:p>
             <a:pPr marL="342900" indent="-342900">
               <a:spcAft>
-                <a:spcPts val="1000"/>
+                <a:spcPts val="800"/>
               </a:spcAft>
               <a:buSzPct val="100000"/>
               <a:buChar char="•"/>
@@ -2505,20 +2563,20 @@
             <a:r>
               <a:rPr lang="en-US" sz="1500" dirty="0">
                 <a:solidFill>
-                  <a:srgbClr val="CADCFC"/>
+                  <a:srgbClr val="3D3A36"/>
                 </a:solidFill>
                 <a:latin typeface="Calibri" pitchFamily="34" charset="0"/>
                 <a:ea typeface="Calibri" pitchFamily="34" charset="-122"/>
                 <a:cs typeface="Calibri" pitchFamily="34" charset="-120"/>
               </a:rPr>
-              <a:t>Mixtures separated by physical methods based on properties</a:t>
+              <a:t>Condensation (gas→liquid), Sublimation (solid→gas, skipping liquid).</a:t>
             </a:r>
             <a:endParaRPr lang="en-US" sz="1500" dirty="0"/>
           </a:p>
           <a:p>
             <a:pPr marL="342900" indent="-342900">
               <a:spcAft>
-                <a:spcPts val="1000"/>
+                <a:spcPts val="800"/>
               </a:spcAft>
               <a:buSzPct val="100000"/>
               <a:buChar char="•"/>
@@ -2526,20 +2584,20 @@
             <a:r>
               <a:rPr lang="en-US" sz="1500" dirty="0">
                 <a:solidFill>
-                  <a:srgbClr val="CADCFC"/>
+                  <a:srgbClr val="3D3A36"/>
                 </a:solidFill>
                 <a:latin typeface="Calibri" pitchFamily="34" charset="0"/>
                 <a:ea typeface="Calibri" pitchFamily="34" charset="-122"/>
                 <a:cs typeface="Calibri" pitchFamily="34" charset="-120"/>
               </a:rPr>
-              <a:t>Filtration, evaporation, distillation, chromatography, magnetic separation</a:t>
+              <a:t>Temperature STAYS CONSTANT during a state change.</a:t>
             </a:r>
             <a:endParaRPr lang="en-US" sz="1500" dirty="0"/>
           </a:p>
           <a:p>
             <a:pPr marL="342900" indent="-342900">
               <a:spcAft>
-                <a:spcPts val="1000"/>
+                <a:spcPts val="800"/>
               </a:spcAft>
               <a:buSzPct val="100000"/>
               <a:buChar char="•"/>
@@ -2547,18 +2605,122 @@
             <a:r>
               <a:rPr lang="en-US" sz="1500" dirty="0">
                 <a:solidFill>
-                  <a:srgbClr val="CADCFC"/>
+                  <a:srgbClr val="3D3A36"/>
                 </a:solidFill>
                 <a:latin typeface="Calibri" pitchFamily="34" charset="0"/>
                 <a:ea typeface="Calibri" pitchFamily="34" charset="-122"/>
                 <a:cs typeface="Calibri" pitchFamily="34" charset="-120"/>
               </a:rPr>
-              <a:t>Dissolving faster with: heat, stirring, smaller particle size</a:t>
+              <a:t>Water: melts at 0°C, boils at 100°C.</a:t>
             </a:r>
             <a:endParaRPr lang="en-US" sz="1500" dirty="0"/>
           </a:p>
         </p:txBody>
       </p:sp>
+    </p:spTree>
+  </p:cSld>
+  <p:clrMapOvr>
+    <a:masterClrMapping/>
+  </p:clrMapOvr>
+</p:sld>
+</file>
+
+<file path=ppt/slides/slide6.xml><?xml version="1.0" encoding="utf-8"?>
+<p:sld xmlns:a="http://schemas.openxmlformats.org/drawingml/2006/main" xmlns:r="http://schemas.openxmlformats.org/officeDocument/2006/relationships" xmlns:p="http://schemas.openxmlformats.org/presentationml/2006/main">
+  <p:cSld name="Slide 6">
+    <p:spTree>
+      <p:nvGrpSpPr>
+        <p:cNvPr id="1" name=""/>
+        <p:cNvGrpSpPr/>
+        <p:nvPr/>
+      </p:nvGrpSpPr>
+      <p:grpSpPr>
+        <a:xfrm>
+          <a:off x="0" y="0"/>
+          <a:ext cx="0" cy="0"/>
+          <a:chOff x="0" y="0"/>
+          <a:chExt cx="0" cy="0"/>
+        </a:xfrm>
+      </p:grpSpPr>
+      <p:sp>
+        <p:nvSpPr>
+          <p:cNvPr id="2" name="Shape 0"/>
+          <p:cNvSpPr/>
+          <p:nvPr/>
+        </p:nvSpPr>
+        <p:spPr>
+          <a:xfrm>
+            <a:off x="0" y="0"/>
+            <a:ext cx="9144000" cy="5143500"/>
+          </a:xfrm>
+          <a:prstGeom prst="rect">
+            <a:avLst/>
+          </a:prstGeom>
+          <a:solidFill>
+            <a:srgbClr val="1B2A4A"/>
+          </a:solidFill>
+          <a:ln/>
+        </p:spPr>
+      </p:sp>
+      <p:sp>
+        <p:nvSpPr>
+          <p:cNvPr id="3" name="Shape 1"/>
+          <p:cNvSpPr/>
+          <p:nvPr/>
+        </p:nvSpPr>
+        <p:spPr>
+          <a:xfrm>
+            <a:off x="731520" y="1828800"/>
+            <a:ext cx="73152" cy="1463040"/>
+          </a:xfrm>
+          <a:prstGeom prst="rect">
+            <a:avLst/>
+          </a:prstGeom>
+          <a:solidFill>
+            <a:srgbClr val="2A9D8F"/>
+          </a:solidFill>
+          <a:ln/>
+        </p:spPr>
+      </p:sp>
+      <p:sp>
+        <p:nvSpPr>
+          <p:cNvPr id="4" name="Text 2"/>
+          <p:cNvSpPr/>
+          <p:nvPr/>
+        </p:nvSpPr>
+        <p:spPr>
+          <a:xfrm>
+            <a:off x="1097280" y="1463040"/>
+            <a:ext cx="1097280" cy="1097280"/>
+          </a:xfrm>
+          <a:prstGeom prst="rect">
+            <a:avLst/>
+          </a:prstGeom>
+          <a:noFill/>
+          <a:ln/>
+        </p:spPr>
+        <p:txBody>
+          <a:bodyPr wrap="square" rtlCol="0" anchor="ctr"/>
+          <a:lstStyle/>
+          <a:p>
+            <a:pPr algn="l" indent="0" marL="0">
+              <a:buNone/>
+            </a:pPr>
+            <a:r>
+              <a:rPr lang="en-US" sz="4800" b="1" dirty="0">
+                <a:solidFill>
+                  <a:srgbClr val="2A9D8F"/>
+                </a:solidFill>
+                <a:latin typeface="Georgia" pitchFamily="34" charset="0"/>
+                <a:ea typeface="Georgia" pitchFamily="34" charset="-122"/>
+                <a:cs typeface="Georgia" pitchFamily="34" charset="-120"/>
+              </a:rPr>
+              <a:t>3</a:t>
+            </a:r>
+            <a:endParaRPr lang="en-US" sz="4800" dirty="0"/>
+          </a:p>
+        </p:txBody>
+      </p:sp>
       <p:sp>
         <p:nvSpPr>
           <p:cNvPr id="5" name="Text 3"/>
@@ -2567,8 +2729,8 @@
         </p:nvSpPr>
         <p:spPr>
           <a:xfrm>
-            <a:off x="731520" y="4572000"/>
-            <a:ext cx="7772400" cy="365760"/>
+            <a:off x="2194560" y="1920240"/>
+            <a:ext cx="5943600" cy="1097280"/>
           </a:xfrm>
           <a:prstGeom prst="rect">
             <a:avLst/>
@@ -2584,17 +2746,1165 @@
               <a:buNone/>
             </a:pPr>
             <a:r>
-              <a:rPr lang="en-US" sz="1100" dirty="0">
-                <a:solidFill>
-                  <a:srgbClr val="E9C46A"/>
+              <a:rPr lang="en-US" sz="3200" b="1" dirty="0">
+                <a:solidFill>
+                  <a:srgbClr val="FFFFFF"/>
+                </a:solidFill>
+                <a:latin typeface="Georgia" pitchFamily="34" charset="0"/>
+                <a:ea typeface="Georgia" pitchFamily="34" charset="-122"/>
+                <a:cs typeface="Georgia" pitchFamily="34" charset="-120"/>
+              </a:rPr>
+              <a:t>Mixtures &amp; Separation</a:t>
+            </a:r>
+            <a:endParaRPr lang="en-US" sz="3200" dirty="0"/>
+          </a:p>
+        </p:txBody>
+      </p:sp>
+    </p:spTree>
+  </p:cSld>
+  <p:clrMapOvr>
+    <a:masterClrMapping/>
+  </p:clrMapOvr>
+</p:sld>
+</file>
+
+<file path=ppt/slides/slide7.xml><?xml version="1.0" encoding="utf-8"?>
+<p:sld xmlns:a="http://schemas.openxmlformats.org/drawingml/2006/main" xmlns:r="http://schemas.openxmlformats.org/officeDocument/2006/relationships" xmlns:p="http://schemas.openxmlformats.org/presentationml/2006/main">
+  <p:cSld name="Slide 7">
+    <p:bg>
+      <p:bgPr>
+        <a:solidFill>
+          <a:srgbClr val="FAF8F5"/>
+        </a:solidFill>
+      </p:bgPr>
+    </p:bg>
+    <p:spTree>
+      <p:nvGrpSpPr>
+        <p:cNvPr id="1" name=""/>
+        <p:cNvGrpSpPr/>
+        <p:nvPr/>
+      </p:nvGrpSpPr>
+      <p:grpSpPr>
+        <a:xfrm>
+          <a:off x="0" y="0"/>
+          <a:ext cx="0" cy="0"/>
+          <a:chOff x="0" y="0"/>
+          <a:chExt cx="0" cy="0"/>
+        </a:xfrm>
+      </p:grpSpPr>
+      <p:sp>
+        <p:nvSpPr>
+          <p:cNvPr id="2" name="Shape 0"/>
+          <p:cNvSpPr/>
+          <p:nvPr/>
+        </p:nvSpPr>
+        <p:spPr>
+          <a:xfrm>
+            <a:off x="0" y="0"/>
+            <a:ext cx="9144000" cy="822960"/>
+          </a:xfrm>
+          <a:prstGeom prst="rect">
+            <a:avLst/>
+          </a:prstGeom>
+          <a:solidFill>
+            <a:srgbClr val="FFFFFF"/>
+          </a:solidFill>
+          <a:ln/>
+        </p:spPr>
+      </p:sp>
+      <p:sp>
+        <p:nvSpPr>
+          <p:cNvPr id="3" name="Shape 1"/>
+          <p:cNvSpPr/>
+          <p:nvPr/>
+        </p:nvSpPr>
+        <p:spPr>
+          <a:xfrm>
+            <a:off x="0" y="804672"/>
+            <a:ext cx="9144000" cy="27432"/>
+          </a:xfrm>
+          <a:prstGeom prst="rect">
+            <a:avLst/>
+          </a:prstGeom>
+          <a:solidFill>
+            <a:srgbClr val="E5E2DC"/>
+          </a:solidFill>
+          <a:ln/>
+        </p:spPr>
+      </p:sp>
+      <p:sp>
+        <p:nvSpPr>
+          <p:cNvPr id="4" name="Shape 2"/>
+          <p:cNvSpPr/>
+          <p:nvPr/>
+        </p:nvSpPr>
+        <p:spPr>
+          <a:xfrm>
+            <a:off x="548640" y="201168"/>
+            <a:ext cx="54864" cy="420624"/>
+          </a:xfrm>
+          <a:prstGeom prst="rect">
+            <a:avLst/>
+          </a:prstGeom>
+          <a:solidFill>
+            <a:srgbClr val="2A9D8F"/>
+          </a:solidFill>
+          <a:ln/>
+        </p:spPr>
+      </p:sp>
+      <p:sp>
+        <p:nvSpPr>
+          <p:cNvPr id="5" name="Text 3"/>
+          <p:cNvSpPr/>
+          <p:nvPr/>
+        </p:nvSpPr>
+        <p:spPr>
+          <a:xfrm>
+            <a:off x="777240" y="137160"/>
+            <a:ext cx="7772400" cy="548640"/>
+          </a:xfrm>
+          <a:prstGeom prst="rect">
+            <a:avLst/>
+          </a:prstGeom>
+          <a:noFill/>
+          <a:ln/>
+        </p:spPr>
+        <p:txBody>
+          <a:bodyPr wrap="square" lIns="0" tIns="0" rIns="0" bIns="0" rtlCol="0" anchor="ctr"/>
+          <a:lstStyle/>
+          <a:p>
+            <a:pPr indent="0" marL="0">
+              <a:buNone/>
+            </a:pPr>
+            <a:r>
+              <a:rPr lang="en-US" sz="2000" b="1" dirty="0">
+                <a:solidFill>
+                  <a:srgbClr val="1B2A4A"/>
+                </a:solidFill>
+                <a:latin typeface="Georgia" pitchFamily="34" charset="0"/>
+                <a:ea typeface="Georgia" pitchFamily="34" charset="-122"/>
+                <a:cs typeface="Georgia" pitchFamily="34" charset="-120"/>
+              </a:rPr>
+              <a:t>Mixtures &amp; Separation Review</a:t>
+            </a:r>
+            <a:endParaRPr lang="en-US" sz="2000" dirty="0"/>
+          </a:p>
+        </p:txBody>
+      </p:sp>
+      <p:sp>
+        <p:nvSpPr>
+          <p:cNvPr id="6" name="Text 4"/>
+          <p:cNvSpPr/>
+          <p:nvPr/>
+        </p:nvSpPr>
+        <p:spPr>
+          <a:xfrm>
+            <a:off x="731520" y="1051560"/>
+            <a:ext cx="7680960" cy="3108960"/>
+          </a:xfrm>
+          <a:prstGeom prst="rect">
+            <a:avLst/>
+          </a:prstGeom>
+          <a:noFill/>
+          <a:ln/>
+        </p:spPr>
+        <p:txBody>
+          <a:bodyPr wrap="square" rtlCol="0" anchor="t"/>
+          <a:lstStyle/>
+          <a:p>
+            <a:pPr marL="342900" indent="-342900">
+              <a:spcAft>
+                <a:spcPts val="800"/>
+              </a:spcAft>
+              <a:buSzPct val="100000"/>
+              <a:buChar char="•"/>
+            </a:pPr>
+            <a:r>
+              <a:rPr lang="en-US" sz="1500" dirty="0">
+                <a:solidFill>
+                  <a:srgbClr val="3D3A36"/>
                 </a:solidFill>
                 <a:latin typeface="Calibri" pitchFamily="34" charset="0"/>
                 <a:ea typeface="Calibri" pitchFamily="34" charset="-122"/>
                 <a:cs typeface="Calibri" pitchFamily="34" charset="-120"/>
               </a:rPr>
+              <a:t>Pure substance = one type of particle. Mixture = two or more types, not chemically joined.</a:t>
+            </a:r>
+            <a:endParaRPr lang="en-US" sz="1500" dirty="0"/>
+          </a:p>
+          <a:p>
+            <a:pPr marL="342900" indent="-342900">
+              <a:spcAft>
+                <a:spcPts val="800"/>
+              </a:spcAft>
+              <a:buSzPct val="100000"/>
+              <a:buChar char="•"/>
+            </a:pPr>
+            <a:r>
+              <a:rPr lang="en-US" sz="1500" dirty="0">
+                <a:solidFill>
+                  <a:srgbClr val="3D3A36"/>
+                </a:solidFill>
+                <a:latin typeface="Calibri" pitchFamily="34" charset="0"/>
+                <a:ea typeface="Calibri" pitchFamily="34" charset="-122"/>
+                <a:cs typeface="Calibri" pitchFamily="34" charset="-120"/>
+              </a:rPr>
+              <a:t>Solution = solute + solvent. Saturated = no more will dissolve.</a:t>
+            </a:r>
+            <a:endParaRPr lang="en-US" sz="1500" dirty="0"/>
+          </a:p>
+          <a:p>
+            <a:pPr marL="342900" indent="-342900">
+              <a:spcAft>
+                <a:spcPts val="800"/>
+              </a:spcAft>
+              <a:buSzPct val="100000"/>
+              <a:buChar char="•"/>
+            </a:pPr>
+            <a:r>
+              <a:rPr lang="en-US" sz="1500" dirty="0">
+                <a:solidFill>
+                  <a:srgbClr val="3D3A36"/>
+                </a:solidFill>
+                <a:latin typeface="Calibri" pitchFamily="34" charset="0"/>
+                <a:ea typeface="Calibri" pitchFamily="34" charset="-122"/>
+                <a:cs typeface="Calibri" pitchFamily="34" charset="-120"/>
+              </a:rPr>
+              <a:t>Filtration = insoluble solid from liquid. Evaporation = dissolved solid from liquid.</a:t>
+            </a:r>
+            <a:endParaRPr lang="en-US" sz="1500" dirty="0"/>
+          </a:p>
+          <a:p>
+            <a:pPr marL="342900" indent="-342900">
+              <a:spcAft>
+                <a:spcPts val="800"/>
+              </a:spcAft>
+              <a:buSzPct val="100000"/>
+              <a:buChar char="•"/>
+            </a:pPr>
+            <a:r>
+              <a:rPr lang="en-US" sz="1500" dirty="0">
+                <a:solidFill>
+                  <a:srgbClr val="3D3A36"/>
+                </a:solidFill>
+                <a:latin typeface="Calibri" pitchFamily="34" charset="0"/>
+                <a:ea typeface="Calibri" pitchFamily="34" charset="-122"/>
+                <a:cs typeface="Calibri" pitchFamily="34" charset="-120"/>
+              </a:rPr>
+              <a:t>Distillation = separating by boiling point (keeps the liquid).</a:t>
+            </a:r>
+            <a:endParaRPr lang="en-US" sz="1500" dirty="0"/>
+          </a:p>
+          <a:p>
+            <a:pPr marL="342900" indent="-342900">
+              <a:spcAft>
+                <a:spcPts val="800"/>
+              </a:spcAft>
+              <a:buSzPct val="100000"/>
+              <a:buChar char="•"/>
+            </a:pPr>
+            <a:r>
+              <a:rPr lang="en-US" sz="1500" dirty="0">
+                <a:solidFill>
+                  <a:srgbClr val="3D3A36"/>
+                </a:solidFill>
+                <a:latin typeface="Calibri" pitchFamily="34" charset="0"/>
+                <a:ea typeface="Calibri" pitchFamily="34" charset="-122"/>
+                <a:cs typeface="Calibri" pitchFamily="34" charset="-120"/>
+              </a:rPr>
+              <a:t>Chromatography = separating dissolved coloured substances.</a:t>
+            </a:r>
+            <a:endParaRPr lang="en-US" sz="1500" dirty="0"/>
+          </a:p>
+        </p:txBody>
+      </p:sp>
+    </p:spTree>
+  </p:cSld>
+  <p:clrMapOvr>
+    <a:masterClrMapping/>
+  </p:clrMapOvr>
+</p:sld>
+</file>
+
+<file path=ppt/slides/slide8.xml><?xml version="1.0" encoding="utf-8"?>
+<p:sld xmlns:a="http://schemas.openxmlformats.org/drawingml/2006/main" xmlns:r="http://schemas.openxmlformats.org/officeDocument/2006/relationships" xmlns:p="http://schemas.openxmlformats.org/presentationml/2006/main">
+  <p:cSld name="Slide 8">
+    <p:bg>
+      <p:bgPr>
+        <a:solidFill>
+          <a:srgbClr val="FAF8F5"/>
+        </a:solidFill>
+      </p:bgPr>
+    </p:bg>
+    <p:spTree>
+      <p:nvGrpSpPr>
+        <p:cNvPr id="1" name=""/>
+        <p:cNvGrpSpPr/>
+        <p:nvPr/>
+      </p:nvGrpSpPr>
+      <p:grpSpPr>
+        <a:xfrm>
+          <a:off x="0" y="0"/>
+          <a:ext cx="0" cy="0"/>
+          <a:chOff x="0" y="0"/>
+          <a:chExt cx="0" cy="0"/>
+        </a:xfrm>
+      </p:grpSpPr>
+      <p:sp>
+        <p:nvSpPr>
+          <p:cNvPr id="2" name="Shape 0"/>
+          <p:cNvSpPr/>
+          <p:nvPr/>
+        </p:nvSpPr>
+        <p:spPr>
+          <a:xfrm>
+            <a:off x="0" y="0"/>
+            <a:ext cx="9144000" cy="822960"/>
+          </a:xfrm>
+          <a:prstGeom prst="rect">
+            <a:avLst/>
+          </a:prstGeom>
+          <a:solidFill>
+            <a:srgbClr val="FFFFFF"/>
+          </a:solidFill>
+          <a:ln/>
+        </p:spPr>
+      </p:sp>
+      <p:sp>
+        <p:nvSpPr>
+          <p:cNvPr id="3" name="Shape 1"/>
+          <p:cNvSpPr/>
+          <p:nvPr/>
+        </p:nvSpPr>
+        <p:spPr>
+          <a:xfrm>
+            <a:off x="0" y="804672"/>
+            <a:ext cx="9144000" cy="27432"/>
+          </a:xfrm>
+          <a:prstGeom prst="rect">
+            <a:avLst/>
+          </a:prstGeom>
+          <a:solidFill>
+            <a:srgbClr val="E5E2DC"/>
+          </a:solidFill>
+          <a:ln/>
+        </p:spPr>
+      </p:sp>
+      <p:sp>
+        <p:nvSpPr>
+          <p:cNvPr id="4" name="Shape 2"/>
+          <p:cNvSpPr/>
+          <p:nvPr/>
+        </p:nvSpPr>
+        <p:spPr>
+          <a:xfrm>
+            <a:off x="548640" y="201168"/>
+            <a:ext cx="54864" cy="420624"/>
+          </a:xfrm>
+          <a:prstGeom prst="rect">
+            <a:avLst/>
+          </a:prstGeom>
+          <a:solidFill>
+            <a:srgbClr val="2A9D8F"/>
+          </a:solidFill>
+          <a:ln/>
+        </p:spPr>
+      </p:sp>
+      <p:sp>
+        <p:nvSpPr>
+          <p:cNvPr id="5" name="Text 3"/>
+          <p:cNvSpPr/>
+          <p:nvPr/>
+        </p:nvSpPr>
+        <p:spPr>
+          <a:xfrm>
+            <a:off x="777240" y="137160"/>
+            <a:ext cx="7772400" cy="548640"/>
+          </a:xfrm>
+          <a:prstGeom prst="rect">
+            <a:avLst/>
+          </a:prstGeom>
+          <a:noFill/>
+          <a:ln/>
+        </p:spPr>
+        <p:txBody>
+          <a:bodyPr wrap="square" lIns="0" tIns="0" rIns="0" bIns="0" rtlCol="0" anchor="ctr"/>
+          <a:lstStyle/>
+          <a:p>
+            <a:pPr indent="0" marL="0">
+              <a:buNone/>
+            </a:pPr>
+            <a:r>
+              <a:rPr lang="en-US" sz="2000" b="1" dirty="0">
+                <a:solidFill>
+                  <a:srgbClr val="1B2A4A"/>
+                </a:solidFill>
+                <a:latin typeface="Georgia" pitchFamily="34" charset="0"/>
+                <a:ea typeface="Georgia" pitchFamily="34" charset="-122"/>
+                <a:cs typeface="Georgia" pitchFamily="34" charset="-120"/>
+              </a:rPr>
+              <a:t>Final Revision Checklist</a:t>
+            </a:r>
+            <a:endParaRPr lang="en-US" sz="2000" dirty="0"/>
+          </a:p>
+        </p:txBody>
+      </p:sp>
+      <p:sp>
+        <p:nvSpPr>
+          <p:cNvPr id="6" name="Shape 4"/>
+          <p:cNvSpPr/>
+          <p:nvPr/>
+        </p:nvSpPr>
+        <p:spPr>
+          <a:xfrm>
+            <a:off x="731520" y="1051560"/>
+            <a:ext cx="7680960" cy="438912"/>
+          </a:xfrm>
+          <a:prstGeom prst="rect">
+            <a:avLst/>
+          </a:prstGeom>
+          <a:solidFill>
+            <a:srgbClr val="FFFFFF"/>
+          </a:solidFill>
+          <a:ln/>
+        </p:spPr>
+      </p:sp>
+      <p:sp>
+        <p:nvSpPr>
+          <p:cNvPr id="7" name="Text 5"/>
+          <p:cNvSpPr/>
+          <p:nvPr/>
+        </p:nvSpPr>
+        <p:spPr>
+          <a:xfrm>
+            <a:off x="868680" y="1051560"/>
+            <a:ext cx="320040" cy="438912"/>
+          </a:xfrm>
+          <a:prstGeom prst="rect">
+            <a:avLst/>
+          </a:prstGeom>
+          <a:noFill/>
+          <a:ln/>
+        </p:spPr>
+        <p:txBody>
+          <a:bodyPr wrap="square" rtlCol="0" anchor="ctr"/>
+          <a:lstStyle/>
+          <a:p>
+            <a:pPr indent="0" marL="0">
+              <a:buNone/>
+            </a:pPr>
+            <a:r>
+              <a:rPr lang="en-US" sz="1400" dirty="0">
+                <a:solidFill>
+                  <a:srgbClr val="2A9D8F"/>
+                </a:solidFill>
+              </a:rPr>
+              <a:t>☐</a:t>
+            </a:r>
+            <a:endParaRPr lang="en-US" sz="1400" dirty="0"/>
+          </a:p>
+        </p:txBody>
+      </p:sp>
+      <p:sp>
+        <p:nvSpPr>
+          <p:cNvPr id="8" name="Text 6"/>
+          <p:cNvSpPr/>
+          <p:nvPr/>
+        </p:nvSpPr>
+        <p:spPr>
+          <a:xfrm>
+            <a:off x="1234440" y="1051560"/>
+            <a:ext cx="6949440" cy="438912"/>
+          </a:xfrm>
+          <a:prstGeom prst="rect">
+            <a:avLst/>
+          </a:prstGeom>
+          <a:noFill/>
+          <a:ln/>
+        </p:spPr>
+        <p:txBody>
+          <a:bodyPr wrap="square" rtlCol="0" anchor="ctr"/>
+          <a:lstStyle/>
+          <a:p>
+            <a:pPr indent="0" marL="0">
+              <a:buNone/>
+            </a:pPr>
+            <a:r>
+              <a:rPr lang="en-US" sz="1300" dirty="0">
+                <a:solidFill>
+                  <a:srgbClr val="3D3A36"/>
+                </a:solidFill>
+                <a:latin typeface="Calibri" pitchFamily="34" charset="0"/>
+                <a:ea typeface="Calibri" pitchFamily="34" charset="-122"/>
+                <a:cs typeface="Calibri" pitchFamily="34" charset="-120"/>
+              </a:rPr>
+              <a:t>Particle model — arrangement and movement in each state</a:t>
+            </a:r>
+            <a:endParaRPr lang="en-US" sz="1300" dirty="0"/>
+          </a:p>
+        </p:txBody>
+      </p:sp>
+      <p:sp>
+        <p:nvSpPr>
+          <p:cNvPr id="9" name="Shape 7"/>
+          <p:cNvSpPr/>
+          <p:nvPr/>
+        </p:nvSpPr>
+        <p:spPr>
+          <a:xfrm>
+            <a:off x="731520" y="1554480"/>
+            <a:ext cx="7680960" cy="438912"/>
+          </a:xfrm>
+          <a:prstGeom prst="rect">
+            <a:avLst/>
+          </a:prstGeom>
+          <a:solidFill>
+            <a:srgbClr val="F8F6F3"/>
+          </a:solidFill>
+          <a:ln/>
+        </p:spPr>
+      </p:sp>
+      <p:sp>
+        <p:nvSpPr>
+          <p:cNvPr id="10" name="Text 8"/>
+          <p:cNvSpPr/>
+          <p:nvPr/>
+        </p:nvSpPr>
+        <p:spPr>
+          <a:xfrm>
+            <a:off x="868680" y="1554480"/>
+            <a:ext cx="320040" cy="438912"/>
+          </a:xfrm>
+          <a:prstGeom prst="rect">
+            <a:avLst/>
+          </a:prstGeom>
+          <a:noFill/>
+          <a:ln/>
+        </p:spPr>
+        <p:txBody>
+          <a:bodyPr wrap="square" rtlCol="0" anchor="ctr"/>
+          <a:lstStyle/>
+          <a:p>
+            <a:pPr indent="0" marL="0">
+              <a:buNone/>
+            </a:pPr>
+            <a:r>
+              <a:rPr lang="en-US" sz="1400" dirty="0">
+                <a:solidFill>
+                  <a:srgbClr val="2A9D8F"/>
+                </a:solidFill>
+              </a:rPr>
+              <a:t>☐</a:t>
+            </a:r>
+            <a:endParaRPr lang="en-US" sz="1400" dirty="0"/>
+          </a:p>
+        </p:txBody>
+      </p:sp>
+      <p:sp>
+        <p:nvSpPr>
+          <p:cNvPr id="11" name="Text 9"/>
+          <p:cNvSpPr/>
+          <p:nvPr/>
+        </p:nvSpPr>
+        <p:spPr>
+          <a:xfrm>
+            <a:off x="1234440" y="1554480"/>
+            <a:ext cx="6949440" cy="438912"/>
+          </a:xfrm>
+          <a:prstGeom prst="rect">
+            <a:avLst/>
+          </a:prstGeom>
+          <a:noFill/>
+          <a:ln/>
+        </p:spPr>
+        <p:txBody>
+          <a:bodyPr wrap="square" rtlCol="0" anchor="ctr"/>
+          <a:lstStyle/>
+          <a:p>
+            <a:pPr indent="0" marL="0">
+              <a:buNone/>
+            </a:pPr>
+            <a:r>
+              <a:rPr lang="en-US" sz="1300" dirty="0">
+                <a:solidFill>
+                  <a:srgbClr val="3D3A36"/>
+                </a:solidFill>
+                <a:latin typeface="Calibri" pitchFamily="34" charset="0"/>
+                <a:ea typeface="Calibri" pitchFamily="34" charset="-122"/>
+                <a:cs typeface="Calibri" pitchFamily="34" charset="-120"/>
+              </a:rPr>
+              <a:t>All 6 changes of state and particle explanations</a:t>
+            </a:r>
+            <a:endParaRPr lang="en-US" sz="1300" dirty="0"/>
+          </a:p>
+        </p:txBody>
+      </p:sp>
+      <p:sp>
+        <p:nvSpPr>
+          <p:cNvPr id="12" name="Shape 10"/>
+          <p:cNvSpPr/>
+          <p:nvPr/>
+        </p:nvSpPr>
+        <p:spPr>
+          <a:xfrm>
+            <a:off x="731520" y="2057400"/>
+            <a:ext cx="7680960" cy="438912"/>
+          </a:xfrm>
+          <a:prstGeom prst="rect">
+            <a:avLst/>
+          </a:prstGeom>
+          <a:solidFill>
+            <a:srgbClr val="FFFFFF"/>
+          </a:solidFill>
+          <a:ln/>
+        </p:spPr>
+      </p:sp>
+      <p:sp>
+        <p:nvSpPr>
+          <p:cNvPr id="13" name="Text 11"/>
+          <p:cNvSpPr/>
+          <p:nvPr/>
+        </p:nvSpPr>
+        <p:spPr>
+          <a:xfrm>
+            <a:off x="868680" y="2057400"/>
+            <a:ext cx="320040" cy="438912"/>
+          </a:xfrm>
+          <a:prstGeom prst="rect">
+            <a:avLst/>
+          </a:prstGeom>
+          <a:noFill/>
+          <a:ln/>
+        </p:spPr>
+        <p:txBody>
+          <a:bodyPr wrap="square" rtlCol="0" anchor="ctr"/>
+          <a:lstStyle/>
+          <a:p>
+            <a:pPr indent="0" marL="0">
+              <a:buNone/>
+            </a:pPr>
+            <a:r>
+              <a:rPr lang="en-US" sz="1400" dirty="0">
+                <a:solidFill>
+                  <a:srgbClr val="2A9D8F"/>
+                </a:solidFill>
+              </a:rPr>
+              <a:t>☐</a:t>
+            </a:r>
+            <a:endParaRPr lang="en-US" sz="1400" dirty="0"/>
+          </a:p>
+        </p:txBody>
+      </p:sp>
+      <p:sp>
+        <p:nvSpPr>
+          <p:cNvPr id="14" name="Text 12"/>
+          <p:cNvSpPr/>
+          <p:nvPr/>
+        </p:nvSpPr>
+        <p:spPr>
+          <a:xfrm>
+            <a:off x="1234440" y="2057400"/>
+            <a:ext cx="6949440" cy="438912"/>
+          </a:xfrm>
+          <a:prstGeom prst="rect">
+            <a:avLst/>
+          </a:prstGeom>
+          <a:noFill/>
+          <a:ln/>
+        </p:spPr>
+        <p:txBody>
+          <a:bodyPr wrap="square" rtlCol="0" anchor="ctr"/>
+          <a:lstStyle/>
+          <a:p>
+            <a:pPr indent="0" marL="0">
+              <a:buNone/>
+            </a:pPr>
+            <a:r>
+              <a:rPr lang="en-US" sz="1300" dirty="0">
+                <a:solidFill>
+                  <a:srgbClr val="3D3A36"/>
+                </a:solidFill>
+                <a:latin typeface="Calibri" pitchFamily="34" charset="0"/>
+                <a:ea typeface="Calibri" pitchFamily="34" charset="-122"/>
+                <a:cs typeface="Calibri" pitchFamily="34" charset="-120"/>
+              </a:rPr>
+              <a:t>Heating/cooling curves — flat sections = state change</a:t>
+            </a:r>
+            <a:endParaRPr lang="en-US" sz="1300" dirty="0"/>
+          </a:p>
+        </p:txBody>
+      </p:sp>
+      <p:sp>
+        <p:nvSpPr>
+          <p:cNvPr id="15" name="Shape 13"/>
+          <p:cNvSpPr/>
+          <p:nvPr/>
+        </p:nvSpPr>
+        <p:spPr>
+          <a:xfrm>
+            <a:off x="731520" y="2560320"/>
+            <a:ext cx="7680960" cy="438912"/>
+          </a:xfrm>
+          <a:prstGeom prst="rect">
+            <a:avLst/>
+          </a:prstGeom>
+          <a:solidFill>
+            <a:srgbClr val="F8F6F3"/>
+          </a:solidFill>
+          <a:ln/>
+        </p:spPr>
+      </p:sp>
+      <p:sp>
+        <p:nvSpPr>
+          <p:cNvPr id="16" name="Text 14"/>
+          <p:cNvSpPr/>
+          <p:nvPr/>
+        </p:nvSpPr>
+        <p:spPr>
+          <a:xfrm>
+            <a:off x="868680" y="2560320"/>
+            <a:ext cx="320040" cy="438912"/>
+          </a:xfrm>
+          <a:prstGeom prst="rect">
+            <a:avLst/>
+          </a:prstGeom>
+          <a:noFill/>
+          <a:ln/>
+        </p:spPr>
+        <p:txBody>
+          <a:bodyPr wrap="square" rtlCol="0" anchor="ctr"/>
+          <a:lstStyle/>
+          <a:p>
+            <a:pPr indent="0" marL="0">
+              <a:buNone/>
+            </a:pPr>
+            <a:r>
+              <a:rPr lang="en-US" sz="1400" dirty="0">
+                <a:solidFill>
+                  <a:srgbClr val="2A9D8F"/>
+                </a:solidFill>
+              </a:rPr>
+              <a:t>☐</a:t>
+            </a:r>
+            <a:endParaRPr lang="en-US" sz="1400" dirty="0"/>
+          </a:p>
+        </p:txBody>
+      </p:sp>
+      <p:sp>
+        <p:nvSpPr>
+          <p:cNvPr id="17" name="Text 15"/>
+          <p:cNvSpPr/>
+          <p:nvPr/>
+        </p:nvSpPr>
+        <p:spPr>
+          <a:xfrm>
+            <a:off x="1234440" y="2560320"/>
+            <a:ext cx="6949440" cy="438912"/>
+          </a:xfrm>
+          <a:prstGeom prst="rect">
+            <a:avLst/>
+          </a:prstGeom>
+          <a:noFill/>
+          <a:ln/>
+        </p:spPr>
+        <p:txBody>
+          <a:bodyPr wrap="square" rtlCol="0" anchor="ctr"/>
+          <a:lstStyle/>
+          <a:p>
+            <a:pPr indent="0" marL="0">
+              <a:buNone/>
+            </a:pPr>
+            <a:r>
+              <a:rPr lang="en-US" sz="1300" dirty="0">
+                <a:solidFill>
+                  <a:srgbClr val="3D3A36"/>
+                </a:solidFill>
+                <a:latin typeface="Calibri" pitchFamily="34" charset="0"/>
+                <a:ea typeface="Calibri" pitchFamily="34" charset="-122"/>
+                <a:cs typeface="Calibri" pitchFamily="34" charset="-120"/>
+              </a:rPr>
+              <a:t>Pure vs mixture, solute vs solvent, soluble vs insoluble</a:t>
+            </a:r>
+            <a:endParaRPr lang="en-US" sz="1300" dirty="0"/>
+          </a:p>
+        </p:txBody>
+      </p:sp>
+      <p:sp>
+        <p:nvSpPr>
+          <p:cNvPr id="18" name="Shape 16"/>
+          <p:cNvSpPr/>
+          <p:nvPr/>
+        </p:nvSpPr>
+        <p:spPr>
+          <a:xfrm>
+            <a:off x="731520" y="3063240"/>
+            <a:ext cx="7680960" cy="438912"/>
+          </a:xfrm>
+          <a:prstGeom prst="rect">
+            <a:avLst/>
+          </a:prstGeom>
+          <a:solidFill>
+            <a:srgbClr val="FFFFFF"/>
+          </a:solidFill>
+          <a:ln/>
+        </p:spPr>
+      </p:sp>
+      <p:sp>
+        <p:nvSpPr>
+          <p:cNvPr id="19" name="Text 17"/>
+          <p:cNvSpPr/>
+          <p:nvPr/>
+        </p:nvSpPr>
+        <p:spPr>
+          <a:xfrm>
+            <a:off x="868680" y="3063240"/>
+            <a:ext cx="320040" cy="438912"/>
+          </a:xfrm>
+          <a:prstGeom prst="rect">
+            <a:avLst/>
+          </a:prstGeom>
+          <a:noFill/>
+          <a:ln/>
+        </p:spPr>
+        <p:txBody>
+          <a:bodyPr wrap="square" rtlCol="0" anchor="ctr"/>
+          <a:lstStyle/>
+          <a:p>
+            <a:pPr indent="0" marL="0">
+              <a:buNone/>
+            </a:pPr>
+            <a:r>
+              <a:rPr lang="en-US" sz="1400" dirty="0">
+                <a:solidFill>
+                  <a:srgbClr val="2A9D8F"/>
+                </a:solidFill>
+              </a:rPr>
+              <a:t>☐</a:t>
+            </a:r>
+            <a:endParaRPr lang="en-US" sz="1400" dirty="0"/>
+          </a:p>
+        </p:txBody>
+      </p:sp>
+      <p:sp>
+        <p:nvSpPr>
+          <p:cNvPr id="20" name="Text 18"/>
+          <p:cNvSpPr/>
+          <p:nvPr/>
+        </p:nvSpPr>
+        <p:spPr>
+          <a:xfrm>
+            <a:off x="1234440" y="3063240"/>
+            <a:ext cx="6949440" cy="438912"/>
+          </a:xfrm>
+          <a:prstGeom prst="rect">
+            <a:avLst/>
+          </a:prstGeom>
+          <a:noFill/>
+          <a:ln/>
+        </p:spPr>
+        <p:txBody>
+          <a:bodyPr wrap="square" rtlCol="0" anchor="ctr"/>
+          <a:lstStyle/>
+          <a:p>
+            <a:pPr indent="0" marL="0">
+              <a:buNone/>
+            </a:pPr>
+            <a:r>
+              <a:rPr lang="en-US" sz="1300" dirty="0">
+                <a:solidFill>
+                  <a:srgbClr val="3D3A36"/>
+                </a:solidFill>
+                <a:latin typeface="Calibri" pitchFamily="34" charset="0"/>
+                <a:ea typeface="Calibri" pitchFamily="34" charset="-122"/>
+                <a:cs typeface="Calibri" pitchFamily="34" charset="-120"/>
+              </a:rPr>
+              <a:t>All separation techniques and when to use each</a:t>
+            </a:r>
+            <a:endParaRPr lang="en-US" sz="1300" dirty="0"/>
+          </a:p>
+        </p:txBody>
+      </p:sp>
+      <p:sp>
+        <p:nvSpPr>
+          <p:cNvPr id="21" name="Shape 19"/>
+          <p:cNvSpPr/>
+          <p:nvPr/>
+        </p:nvSpPr>
+        <p:spPr>
+          <a:xfrm>
+            <a:off x="731520" y="3749040"/>
+            <a:ext cx="7680960" cy="594360"/>
+          </a:xfrm>
+          <a:prstGeom prst="rect">
+            <a:avLst/>
+          </a:prstGeom>
+          <a:solidFill>
+            <a:srgbClr val="E8F5F3"/>
+          </a:solidFill>
+          <a:ln/>
+          <a:effectLst>
+            <a:outerShdw sx="100000" sy="100000" kx="0" ky="0" algn="bl" rotWithShape="0" blurRad="50800" dist="25400" dir="8100000">
+              <a:srgbClr val="000000">
+                <a:alpha val="10000"/>
+              </a:srgbClr>
+            </a:outerShdw>
+          </a:effectLst>
+        </p:spPr>
+      </p:sp>
+      <p:sp>
+        <p:nvSpPr>
+          <p:cNvPr id="22" name="Text 20"/>
+          <p:cNvSpPr/>
+          <p:nvPr/>
+        </p:nvSpPr>
+        <p:spPr>
+          <a:xfrm>
+            <a:off x="914400" y="3749040"/>
+            <a:ext cx="7315200" cy="594360"/>
+          </a:xfrm>
+          <a:prstGeom prst="rect">
+            <a:avLst/>
+          </a:prstGeom>
+          <a:noFill/>
+          <a:ln/>
+        </p:spPr>
+        <p:txBody>
+          <a:bodyPr wrap="square" rtlCol="0" anchor="ctr"/>
+          <a:lstStyle/>
+          <a:p>
+            <a:pPr indent="0" marL="0">
+              <a:buNone/>
+            </a:pPr>
+            <a:r>
+              <a:rPr lang="en-US" sz="1200" b="1" dirty="0">
+                <a:solidFill>
+                  <a:srgbClr val="2A9D8F"/>
+                </a:solidFill>
+                <a:latin typeface="Calibri" pitchFamily="34" charset="0"/>
+                <a:ea typeface="Calibri" pitchFamily="34" charset="-122"/>
+                <a:cs typeface="Calibri" pitchFamily="34" charset="-120"/>
+              </a:rPr>
+              <a:t>Key Idea: </a:t>
+            </a:r>
+            <a:pPr indent="0" marL="0">
+              <a:buNone/>
+            </a:pPr>
+            <a:r>
+              <a:rPr lang="en-US" sz="1200" i="1" dirty="0">
+                <a:solidFill>
+                  <a:srgbClr val="3D3A36"/>
+                </a:solidFill>
+                <a:latin typeface="Calibri" pitchFamily="34" charset="0"/>
+                <a:ea typeface="Calibri" pitchFamily="34" charset="-122"/>
+                <a:cs typeface="Calibri" pitchFamily="34" charset="-120"/>
+              </a:rPr>
+              <a:t>Test yourself with the Self-Quiz and Review Games on mrzocchi.com.</a:t>
+            </a:r>
+            <a:endParaRPr lang="en-US" sz="1200" dirty="0"/>
+          </a:p>
+        </p:txBody>
+      </p:sp>
+    </p:spTree>
+  </p:cSld>
+  <p:clrMapOvr>
+    <a:masterClrMapping/>
+  </p:clrMapOvr>
+</p:sld>
+</file>
+
+<file path=ppt/slides/slide9.xml><?xml version="1.0" encoding="utf-8"?>
+<p:sld xmlns:a="http://schemas.openxmlformats.org/drawingml/2006/main" xmlns:r="http://schemas.openxmlformats.org/officeDocument/2006/relationships" xmlns:p="http://schemas.openxmlformats.org/presentationml/2006/main">
+  <p:cSld name="Slide 9">
+    <p:spTree>
+      <p:nvGrpSpPr>
+        <p:cNvPr id="1" name=""/>
+        <p:cNvGrpSpPr/>
+        <p:nvPr/>
+      </p:nvGrpSpPr>
+      <p:grpSpPr>
+        <a:xfrm>
+          <a:off x="0" y="0"/>
+          <a:ext cx="0" cy="0"/>
+          <a:chOff x="0" y="0"/>
+          <a:chExt cx="0" cy="0"/>
+        </a:xfrm>
+      </p:grpSpPr>
+      <p:sp>
+        <p:nvSpPr>
+          <p:cNvPr id="2" name="Shape 0"/>
+          <p:cNvSpPr/>
+          <p:nvPr/>
+        </p:nvSpPr>
+        <p:spPr>
+          <a:xfrm>
+            <a:off x="0" y="0"/>
+            <a:ext cx="9144000" cy="5143500"/>
+          </a:xfrm>
+          <a:prstGeom prst="rect">
+            <a:avLst/>
+          </a:prstGeom>
+          <a:solidFill>
+            <a:srgbClr val="1B2A4A"/>
+          </a:solidFill>
+          <a:ln/>
+        </p:spPr>
+      </p:sp>
+      <p:sp>
+        <p:nvSpPr>
+          <p:cNvPr id="3" name="Shape 1"/>
+          <p:cNvSpPr/>
+          <p:nvPr/>
+        </p:nvSpPr>
+        <p:spPr>
+          <a:xfrm>
+            <a:off x="0" y="4777740"/>
+            <a:ext cx="9144000" cy="365760"/>
+          </a:xfrm>
+          <a:prstGeom prst="rect">
+            <a:avLst/>
+          </a:prstGeom>
+          <a:solidFill>
+            <a:srgbClr val="2A9D8F"/>
+          </a:solidFill>
+          <a:ln/>
+        </p:spPr>
+      </p:sp>
+      <p:sp>
+        <p:nvSpPr>
+          <p:cNvPr id="4" name="Shape 2"/>
+          <p:cNvSpPr/>
+          <p:nvPr/>
+        </p:nvSpPr>
+        <p:spPr>
+          <a:xfrm>
+            <a:off x="-914400" y="-914400"/>
+            <a:ext cx="3657600" cy="3657600"/>
+          </a:xfrm>
+          <a:prstGeom prst="ellipse">
+            <a:avLst/>
+          </a:prstGeom>
+          <a:solidFill>
+            <a:srgbClr val="2A9D8F">
+              <a:alpha val="10000"/>
+            </a:srgbClr>
+          </a:solidFill>
+          <a:ln/>
+        </p:spPr>
+      </p:sp>
+      <p:sp>
+        <p:nvSpPr>
+          <p:cNvPr id="5" name="Text 3"/>
+          <p:cNvSpPr/>
+          <p:nvPr/>
+        </p:nvSpPr>
+        <p:spPr>
+          <a:xfrm>
+            <a:off x="731520" y="1463040"/>
+            <a:ext cx="7680960" cy="822960"/>
+          </a:xfrm>
+          <a:prstGeom prst="rect">
+            <a:avLst/>
+          </a:prstGeom>
+          <a:noFill/>
+          <a:ln/>
+        </p:spPr>
+        <p:txBody>
+          <a:bodyPr wrap="square" rtlCol="0" anchor="ctr"/>
+          <a:lstStyle/>
+          <a:p>
+            <a:pPr algn="ctr" indent="0" marL="0">
+              <a:buNone/>
+            </a:pPr>
+            <a:r>
+              <a:rPr lang="en-US" sz="3400" b="1" dirty="0">
+                <a:solidFill>
+                  <a:srgbClr val="FFFFFF"/>
+                </a:solidFill>
+                <a:latin typeface="Georgia" pitchFamily="34" charset="0"/>
+                <a:ea typeface="Georgia" pitchFamily="34" charset="-122"/>
+                <a:cs typeface="Georgia" pitchFamily="34" charset="-120"/>
+              </a:rPr>
+              <a:t>Review &amp; Practise</a:t>
+            </a:r>
+            <a:endParaRPr lang="en-US" sz="3400" dirty="0"/>
+          </a:p>
+        </p:txBody>
+      </p:sp>
+      <p:sp>
+        <p:nvSpPr>
+          <p:cNvPr id="6" name="Text 4"/>
+          <p:cNvSpPr/>
+          <p:nvPr/>
+        </p:nvSpPr>
+        <p:spPr>
+          <a:xfrm>
+            <a:off x="731520" y="2468880"/>
+            <a:ext cx="7680960" cy="457200"/>
+          </a:xfrm>
+          <a:prstGeom prst="rect">
+            <a:avLst/>
+          </a:prstGeom>
+          <a:noFill/>
+          <a:ln/>
+        </p:spPr>
+        <p:txBody>
+          <a:bodyPr wrap="square" rtlCol="0" anchor="ctr"/>
+          <a:lstStyle/>
+          <a:p>
+            <a:pPr algn="ctr" indent="0" marL="0">
+              <a:buNone/>
+            </a:pPr>
+            <a:r>
+              <a:rPr lang="en-US" sz="1800" dirty="0">
+                <a:solidFill>
+                  <a:srgbClr val="2A9D8F"/>
+                </a:solidFill>
+                <a:latin typeface="Calibri" pitchFamily="34" charset="0"/>
+                <a:ea typeface="Calibri" pitchFamily="34" charset="-122"/>
+                <a:cs typeface="Calibri" pitchFamily="34" charset="-120"/>
+              </a:rPr>
               <a:t>mrzocchi.com</a:t>
             </a:r>
-            <a:endParaRPr lang="en-US" sz="1100" dirty="0"/>
+            <a:endParaRPr lang="en-US" sz="1800" dirty="0"/>
+          </a:p>
+        </p:txBody>
+      </p:sp>
+      <p:sp>
+        <p:nvSpPr>
+          <p:cNvPr id="7" name="Text 5"/>
+          <p:cNvSpPr/>
+          <p:nvPr/>
+        </p:nvSpPr>
+        <p:spPr>
+          <a:xfrm>
+            <a:off x="731520" y="3108960"/>
+            <a:ext cx="7680960" cy="457200"/>
+          </a:xfrm>
+          <a:prstGeom prst="rect">
+            <a:avLst/>
+          </a:prstGeom>
+          <a:noFill/>
+          <a:ln/>
+        </p:spPr>
+        <p:txBody>
+          <a:bodyPr wrap="square" rtlCol="0" anchor="ctr"/>
+          <a:lstStyle/>
+          <a:p>
+            <a:pPr algn="ctr" indent="0" marL="0">
+              <a:buNone/>
+            </a:pPr>
+            <a:r>
+              <a:rPr lang="en-US" sz="1300" dirty="0">
+                <a:solidFill>
+                  <a:srgbClr val="9B9690"/>
+                </a:solidFill>
+                <a:latin typeface="Calibri" pitchFamily="34" charset="0"/>
+                <a:ea typeface="Calibri" pitchFamily="34" charset="-122"/>
+                <a:cs typeface="Calibri" pitchFamily="34" charset="-120"/>
+              </a:rPr>
+              <a:t>Use the Self-Quiz, Review Games, and Practice Builder to test yourself.</a:t>
+            </a:r>
+            <a:endParaRPr lang="en-US" sz="1300" dirty="0"/>
           </a:p>
         </p:txBody>
       </p:sp>

--- a/static/ppts/G6_Sci_T2_Full_Revision.pptx
+++ b/static/ppts/G6_Sci_T2_Full_Revision.pptx
@@ -13,13 +13,12 @@
     <p:sldId id="261" r:id="rId7"/>
     <p:sldId id="262" r:id="rId8"/>
     <p:sldId id="263" r:id="rId9"/>
-    <p:sldId id="264" r:id="rId10"/>
   </p:sldIdLst>
   <p:notesMasterIdLst>
-    <p:notesMasterId r:id="rId11"/>
+    <p:notesMasterId r:id="rId10"/>
   </p:notesMasterIdLst>
-  <p:sldSz cx="9144000" cy="5143500"/>
-  <p:notesSz cx="5143500" cy="9144000"/>
+  <p:sldSz cx="12192000" cy="6858000"/>
+  <p:notesSz cx="6858000" cy="12192000"/>
   <p:defaultTextStyle>
     <a:lvl1pPr marL="0" algn="l" defTabSz="914400" rtl="0" eaLnBrk="1" latinLnBrk="0" hangingPunct="1">
       <a:defRPr sz="1800" kern="1200">
@@ -1150,94 +1149,6 @@
             <a:fld id="{F7021451-1387-4CA6-816F-3879F97B5CBC}" type="slidenum">
               <a:rPr lang="en-US"/>
               <a:t>8</a:t>
-            </a:fld>
-            <a:endParaRPr lang="en-US"/>
-          </a:p>
-        </p:txBody>
-      </p:sp>
-    </p:spTree>
-    <p:extLst>
-      <p:ext uri="{BB962C8B-B14F-4D97-AF65-F5344CB8AC3E}">
-        <p14:creationId xmlns:p14="http://schemas.microsoft.com/office/powerpoint/2010/main" val="1024086991"/>
-      </p:ext>
-    </p:extLst>
-  </p:cSld>
-  <p:clrMapOvr>
-    <a:masterClrMapping/>
-  </p:clrMapOvr>
-</p:notes>
-</file>
-
-<file path=ppt/notesSlides/notesSlide9.xml><?xml version="1.0" encoding="utf-8"?>
-<p:notes xmlns:a="http://schemas.openxmlformats.org/drawingml/2006/main" xmlns:r="http://schemas.openxmlformats.org/officeDocument/2006/relationships" xmlns:p="http://schemas.openxmlformats.org/presentationml/2006/main">
-  <p:cSld>
-    <p:spTree>
-      <p:nvGrpSpPr>
-        <p:cNvPr id="1" name=""/>
-        <p:cNvGrpSpPr/>
-        <p:nvPr/>
-      </p:nvGrpSpPr>
-      <p:grpSpPr>
-        <a:xfrm>
-          <a:off x="0" y="0"/>
-          <a:ext cx="0" cy="0"/>
-          <a:chOff x="0" y="0"/>
-          <a:chExt cx="0" cy="0"/>
-        </a:xfrm>
-      </p:grpSpPr>
-      <p:sp>
-        <p:nvSpPr>
-          <p:cNvPr id="2" name="Slide Image Placeholder 1"/>
-          <p:cNvSpPr>
-            <a:spLocks noGrp="1" noRot="1" noChangeAspect="1"/>
-          </p:cNvSpPr>
-          <p:nvPr>
-            <p:ph type="sldImg"/>
-          </p:nvPr>
-        </p:nvSpPr>
-        <p:spPr/>
-      </p:sp>
-      <p:sp>
-        <p:nvSpPr>
-          <p:cNvPr id="3" name="Notes Placeholder 2"/>
-          <p:cNvSpPr>
-            <a:spLocks noGrp="1"/>
-          </p:cNvSpPr>
-          <p:nvPr>
-            <p:ph type="body" idx="1"/>
-          </p:nvPr>
-        </p:nvSpPr>
-        <p:spPr/>
-        <p:txBody>
-          <a:bodyPr/>
-          <a:lstStyle/>
-          <a:p>
-            <a:r>
-              <a:rPr lang="en-US" dirty="0"/>
-              <a:t/>
-            </a:r>
-            <a:endParaRPr lang="en-US" dirty="0"/>
-          </a:p>
-        </p:txBody>
-      </p:sp>
-      <p:sp>
-        <p:nvSpPr>
-          <p:cNvPr id="4" name="Slide Number Placeholder 3"/>
-          <p:cNvSpPr>
-            <a:spLocks noGrp="1"/>
-          </p:cNvSpPr>
-          <p:nvPr>
-            <p:ph type="sldNum" sz="quarter" idx="10"/>
-          </p:nvPr>
-        </p:nvSpPr>
-        <p:spPr/>
-        <p:txBody>
-          <a:bodyPr/>
-          <a:lstStyle/>
-          <a:p>
-            <a:fld id="{F7021451-1387-4CA6-816F-3879F97B5CBC}" type="slidenum">
-              <a:rPr lang="en-US"/>
-              <a:t>9</a:t>
             </a:fld>
             <a:endParaRPr lang="en-US"/>
           </a:p>
@@ -1566,6 +1477,13 @@
 <file path=ppt/slides/slide1.xml><?xml version="1.0" encoding="utf-8"?>
 <p:sld xmlns:a="http://schemas.openxmlformats.org/drawingml/2006/main" xmlns:r="http://schemas.openxmlformats.org/officeDocument/2006/relationships" xmlns:p="http://schemas.openxmlformats.org/presentationml/2006/main">
   <p:cSld name="Slide 1">
+    <p:bg>
+      <p:bgPr>
+        <a:solidFill>
+          <a:srgbClr val="2A9D8F"/>
+        </a:solidFill>
+      </p:bgPr>
+    </p:bg>
     <p:spTree>
       <p:nvGrpSpPr>
         <p:cNvPr id="1" name=""/>
@@ -1588,55 +1506,15 @@
         </p:nvSpPr>
         <p:spPr>
           <a:xfrm>
-            <a:off x="0" y="0"/>
-            <a:ext cx="9144000" cy="5143500"/>
-          </a:xfrm>
-          <a:prstGeom prst="rect">
+            <a:off x="7772400" y="-914400"/>
+            <a:ext cx="3657600" cy="3657600"/>
+          </a:xfrm>
+          <a:prstGeom prst="ellipse">
             <a:avLst/>
           </a:prstGeom>
           <a:solidFill>
-            <a:srgbClr val="1B2A4A"/>
-          </a:solidFill>
-          <a:ln/>
-        </p:spPr>
-      </p:sp>
-      <p:sp>
-        <p:nvSpPr>
-          <p:cNvPr id="3" name="Shape 1"/>
-          <p:cNvSpPr/>
-          <p:nvPr/>
-        </p:nvSpPr>
-        <p:spPr>
-          <a:xfrm>
-            <a:off x="0" y="4777740"/>
-            <a:ext cx="9144000" cy="365760"/>
-          </a:xfrm>
-          <a:prstGeom prst="rect">
-            <a:avLst/>
-          </a:prstGeom>
-          <a:solidFill>
-            <a:srgbClr val="2A9D8F"/>
-          </a:solidFill>
-          <a:ln/>
-        </p:spPr>
-      </p:sp>
-      <p:sp>
-        <p:nvSpPr>
-          <p:cNvPr id="4" name="Shape 2"/>
-          <p:cNvSpPr/>
-          <p:nvPr/>
-        </p:nvSpPr>
-        <p:spPr>
-          <a:xfrm>
-            <a:off x="6858000" y="-1371600"/>
-            <a:ext cx="4572000" cy="4572000"/>
-          </a:xfrm>
-          <a:prstGeom prst="ellipse">
-            <a:avLst/>
-          </a:prstGeom>
-          <a:solidFill>
-            <a:srgbClr val="2A9D8F">
-              <a:alpha val="12000"/>
+            <a:srgbClr val="FFFFFF">
+              <a:alpha val="8000"/>
             </a:srgbClr>
           </a:solidFill>
           <a:ln/>
@@ -1644,14 +1522,14 @@
       </p:sp>
       <p:sp>
         <p:nvSpPr>
-          <p:cNvPr id="5" name="Text 3"/>
+          <p:cNvPr id="3" name="Text 1"/>
           <p:cNvSpPr/>
           <p:nvPr/>
         </p:nvSpPr>
         <p:spPr>
           <a:xfrm>
-            <a:off x="731520" y="914400"/>
-            <a:ext cx="7680960" cy="457200"/>
+            <a:off x="731520" y="548640"/>
+            <a:ext cx="7315200" cy="365760"/>
           </a:xfrm>
           <a:prstGeom prst="rect">
             <a:avLst/>
@@ -1667,30 +1545,30 @@
               <a:buNone/>
             </a:pPr>
             <a:r>
-              <a:rPr lang="en-US" sz="1300" b="1" spc="500" kern="0" dirty="0">
+              <a:rPr lang="en-US" sz="1100" b="1" dirty="0">
                 <a:solidFill>
-                  <a:srgbClr val="2A9D8F"/>
+                  <a:srgbClr val="F2D68A"/>
                 </a:solidFill>
-                <a:latin typeface="Calibri" pitchFamily="34" charset="0"/>
-                <a:ea typeface="Calibri" pitchFamily="34" charset="-122"/>
-                <a:cs typeface="Calibri" pitchFamily="34" charset="-120"/>
+                <a:latin typeface="Arial" pitchFamily="34" charset="0"/>
+                <a:ea typeface="Arial" pitchFamily="34" charset="-122"/>
+                <a:cs typeface="Arial" pitchFamily="34" charset="-120"/>
               </a:rPr>
               <a:t>GRADE 6 SCIENCE</a:t>
             </a:r>
-            <a:endParaRPr lang="en-US" sz="1300" dirty="0"/>
-          </a:p>
-        </p:txBody>
-      </p:sp>
-      <p:sp>
-        <p:nvSpPr>
-          <p:cNvPr id="6" name="Text 4"/>
+            <a:endParaRPr lang="en-US" sz="1100" dirty="0"/>
+          </a:p>
+        </p:txBody>
+      </p:sp>
+      <p:sp>
+        <p:nvSpPr>
+          <p:cNvPr id="4" name="Text 2"/>
           <p:cNvSpPr/>
           <p:nvPr/>
         </p:nvSpPr>
         <p:spPr>
           <a:xfrm>
-            <a:off x="731520" y="1463040"/>
-            <a:ext cx="6858000" cy="1645920"/>
+            <a:off x="731520" y="1371600"/>
+            <a:ext cx="9144000" cy="1645920"/>
           </a:xfrm>
           <a:prstGeom prst="rect">
             <a:avLst/>
@@ -1699,14 +1577,17 @@
           <a:ln/>
         </p:spPr>
         <p:txBody>
-          <a:bodyPr wrap="square" rtlCol="0" anchor="t"/>
+          <a:bodyPr wrap="square" rtlCol="0" anchor="ctr"/>
           <a:lstStyle/>
           <a:p>
             <a:pPr indent="0" marL="0">
+              <a:lnSpc>
+                <a:spcPct val="110000"/>
+              </a:lnSpc>
               <a:buNone/>
             </a:pPr>
             <a:r>
-              <a:rPr lang="en-US" sz="3800" b="1" dirty="0">
+              <a:rPr lang="en-US" sz="3600" b="1" dirty="0">
                 <a:solidFill>
                   <a:srgbClr val="FFFFFF"/>
                 </a:solidFill>
@@ -1714,39 +1595,63 @@
                 <a:ea typeface="Georgia" pitchFamily="34" charset="-122"/>
                 <a:cs typeface="Georgia" pitchFamily="34" charset="-120"/>
               </a:rPr>
-              <a:t>Matter</a:t>
-            </a:r>
-            <a:endParaRPr lang="en-US" sz="3800" dirty="0"/>
-          </a:p>
+              <a:t>Full Revision — Chemistry</a:t>
+            </a:r>
+            <a:endParaRPr lang="en-US" sz="3600" dirty="0"/>
+          </a:p>
+        </p:txBody>
+      </p:sp>
+      <p:sp>
+        <p:nvSpPr>
+          <p:cNvPr id="5" name="Text 3"/>
+          <p:cNvSpPr/>
+          <p:nvPr/>
+        </p:nvSpPr>
+        <p:spPr>
+          <a:xfrm>
+            <a:off x="731520" y="3200400"/>
+            <a:ext cx="7315200" cy="548640"/>
+          </a:xfrm>
+          <a:prstGeom prst="rect">
+            <a:avLst/>
+          </a:prstGeom>
+          <a:noFill/>
+          <a:ln/>
+        </p:spPr>
+        <p:txBody>
+          <a:bodyPr wrap="square" rtlCol="0" anchor="ctr"/>
+          <a:lstStyle/>
           <a:p>
             <a:pPr indent="0" marL="0">
               <a:buNone/>
             </a:pPr>
             <a:r>
-              <a:rPr lang="en-US" sz="3800" b="1" dirty="0">
+              <a:rPr lang="en-US" sz="1600" dirty="0">
                 <a:solidFill>
-                  <a:srgbClr val="FFFFFF"/>
+                  <a:srgbClr val="FFFFFF">
+                    <a:alpha val="65000"/>
+                  </a:srgbClr>
                 </a:solidFill>
-                <a:latin typeface="Georgia" pitchFamily="34" charset="0"/>
-                <a:ea typeface="Georgia" pitchFamily="34" charset="-122"/>
-                <a:cs typeface="Georgia" pitchFamily="34" charset="-120"/>
+                <a:latin typeface="Arial" pitchFamily="34" charset="0"/>
+                <a:ea typeface="Arial" pitchFamily="34" charset="-122"/>
+                <a:cs typeface="Arial" pitchFamily="34" charset="-120"/>
               </a:rPr>
-              <a:t>Full Revision</a:t>
-            </a:r>
-            <a:endParaRPr lang="en-US" sz="3800" dirty="0"/>
-          </a:p>
-        </p:txBody>
-      </p:sp>
-      <p:sp>
-        <p:nvSpPr>
-          <p:cNvPr id="7" name="Text 5"/>
+              <a:t>Review all topics from Term 2</a:t>
+            </a:r>
+            <a:endParaRPr lang="en-US" sz="1600" dirty="0"/>
+          </a:p>
+        </p:txBody>
+      </p:sp>
+      <p:sp>
+        <p:nvSpPr>
+          <p:cNvPr id="6" name="Text 4"/>
           <p:cNvSpPr/>
           <p:nvPr/>
         </p:nvSpPr>
         <p:spPr>
           <a:xfrm>
-            <a:off x="731520" y="3200400"/>
-            <a:ext cx="6400800" cy="548640"/>
+            <a:off x="731520" y="4389120"/>
+            <a:ext cx="2743200" cy="320040"/>
           </a:xfrm>
           <a:prstGeom prst="rect">
             <a:avLst/>
@@ -1762,56 +1667,19 @@
               <a:buNone/>
             </a:pPr>
             <a:r>
-              <a:rPr lang="en-US" sz="1600" i="1" dirty="0">
+              <a:rPr lang="en-US" sz="1000" dirty="0">
                 <a:solidFill>
-                  <a:srgbClr val="9B9690"/>
+                  <a:srgbClr val="FFFFFF">
+                    <a:alpha val="40000"/>
+                  </a:srgbClr>
                 </a:solidFill>
-                <a:latin typeface="Calibri" pitchFamily="34" charset="0"/>
-                <a:ea typeface="Calibri" pitchFamily="34" charset="-122"/>
-                <a:cs typeface="Calibri" pitchFamily="34" charset="-120"/>
-              </a:rPr>
-              <a:t>Particles, states, changes, mixtures, and separation</a:t>
-            </a:r>
-            <a:endParaRPr lang="en-US" sz="1600" dirty="0"/>
-          </a:p>
-        </p:txBody>
-      </p:sp>
-      <p:sp>
-        <p:nvSpPr>
-          <p:cNvPr id="8" name="Text 6"/>
-          <p:cNvSpPr/>
-          <p:nvPr/>
-        </p:nvSpPr>
-        <p:spPr>
-          <a:xfrm>
-            <a:off x="731520" y="4297680"/>
-            <a:ext cx="2743200" cy="365760"/>
-          </a:xfrm>
-          <a:prstGeom prst="rect">
-            <a:avLst/>
-          </a:prstGeom>
-          <a:noFill/>
-          <a:ln/>
-        </p:spPr>
-        <p:txBody>
-          <a:bodyPr wrap="square" rtlCol="0" anchor="ctr"/>
-          <a:lstStyle/>
-          <a:p>
-            <a:pPr indent="0" marL="0">
-              <a:buNone/>
-            </a:pPr>
-            <a:r>
-              <a:rPr lang="en-US" sz="1100" dirty="0">
-                <a:solidFill>
-                  <a:srgbClr val="9B9690"/>
-                </a:solidFill>
-                <a:latin typeface="Calibri" pitchFamily="34" charset="0"/>
-                <a:ea typeface="Calibri" pitchFamily="34" charset="-122"/>
-                <a:cs typeface="Calibri" pitchFamily="34" charset="-120"/>
+                <a:latin typeface="Arial" pitchFamily="34" charset="0"/>
+                <a:ea typeface="Arial" pitchFamily="34" charset="-122"/>
+                <a:cs typeface="Arial" pitchFamily="34" charset="-120"/>
               </a:rPr>
               <a:t>mrzocchi.com</a:t>
             </a:r>
-            <a:endParaRPr lang="en-US" sz="1100" dirty="0"/>
+            <a:endParaRPr lang="en-US" sz="1000" dirty="0"/>
           </a:p>
         </p:txBody>
       </p:sp>
@@ -1826,6 +1694,13 @@
 <file path=ppt/slides/slide2.xml><?xml version="1.0" encoding="utf-8"?>
 <p:sld xmlns:a="http://schemas.openxmlformats.org/drawingml/2006/main" xmlns:r="http://schemas.openxmlformats.org/officeDocument/2006/relationships" xmlns:p="http://schemas.openxmlformats.org/presentationml/2006/main">
   <p:cSld name="Slide 2">
+    <p:bg>
+      <p:bgPr>
+        <a:solidFill>
+          <a:srgbClr val="111D35"/>
+        </a:solidFill>
+      </p:bgPr>
+    </p:bg>
     <p:spTree>
       <p:nvGrpSpPr>
         <p:cNvPr id="1" name=""/>
@@ -1842,54 +1717,14 @@
       </p:grpSpPr>
       <p:sp>
         <p:nvSpPr>
-          <p:cNvPr id="2" name="Shape 0"/>
+          <p:cNvPr id="2" name="Text 0"/>
           <p:cNvSpPr/>
           <p:nvPr/>
         </p:nvSpPr>
         <p:spPr>
           <a:xfrm>
-            <a:off x="0" y="0"/>
-            <a:ext cx="9144000" cy="5143500"/>
-          </a:xfrm>
-          <a:prstGeom prst="rect">
-            <a:avLst/>
-          </a:prstGeom>
-          <a:solidFill>
-            <a:srgbClr val="1B2A4A"/>
-          </a:solidFill>
-          <a:ln/>
-        </p:spPr>
-      </p:sp>
-      <p:sp>
-        <p:nvSpPr>
-          <p:cNvPr id="3" name="Shape 1"/>
-          <p:cNvSpPr/>
-          <p:nvPr/>
-        </p:nvSpPr>
-        <p:spPr>
-          <a:xfrm>
-            <a:off x="731520" y="1828800"/>
-            <a:ext cx="73152" cy="1463040"/>
-          </a:xfrm>
-          <a:prstGeom prst="rect">
-            <a:avLst/>
-          </a:prstGeom>
-          <a:solidFill>
-            <a:srgbClr val="2A9D8F"/>
-          </a:solidFill>
-          <a:ln/>
-        </p:spPr>
-      </p:sp>
-      <p:sp>
-        <p:nvSpPr>
-          <p:cNvPr id="4" name="Text 2"/>
-          <p:cNvSpPr/>
-          <p:nvPr/>
-        </p:nvSpPr>
-        <p:spPr>
-          <a:xfrm>
-            <a:off x="1097280" y="1463040"/>
-            <a:ext cx="1097280" cy="1097280"/>
+            <a:off x="731520" y="731520"/>
+            <a:ext cx="2286000" cy="1828800"/>
           </a:xfrm>
           <a:prstGeom prst="rect">
             <a:avLst/>
@@ -1901,34 +1736,36 @@
           <a:bodyPr wrap="square" rtlCol="0" anchor="ctr"/>
           <a:lstStyle/>
           <a:p>
-            <a:pPr algn="l" indent="0" marL="0">
+            <a:pPr indent="0" marL="0">
               <a:buNone/>
             </a:pPr>
             <a:r>
-              <a:rPr lang="en-US" sz="4800" b="1" dirty="0">
+              <a:rPr lang="en-US" sz="7200" b="1" dirty="0">
                 <a:solidFill>
-                  <a:srgbClr val="2A9D8F"/>
+                  <a:srgbClr val="2A9D8F">
+                    <a:alpha val="80000"/>
+                  </a:srgbClr>
                 </a:solidFill>
                 <a:latin typeface="Georgia" pitchFamily="34" charset="0"/>
                 <a:ea typeface="Georgia" pitchFamily="34" charset="-122"/>
                 <a:cs typeface="Georgia" pitchFamily="34" charset="-120"/>
               </a:rPr>
-              <a:t>1</a:t>
-            </a:r>
-            <a:endParaRPr lang="en-US" sz="4800" dirty="0"/>
-          </a:p>
-        </p:txBody>
-      </p:sp>
-      <p:sp>
-        <p:nvSpPr>
-          <p:cNvPr id="5" name="Text 3"/>
+              <a:t>01</a:t>
+            </a:r>
+            <a:endParaRPr lang="en-US" sz="7200" dirty="0"/>
+          </a:p>
+        </p:txBody>
+      </p:sp>
+      <p:sp>
+        <p:nvSpPr>
+          <p:cNvPr id="3" name="Text 1"/>
           <p:cNvSpPr/>
           <p:nvPr/>
         </p:nvSpPr>
         <p:spPr>
           <a:xfrm>
-            <a:off x="2194560" y="1920240"/>
-            <a:ext cx="5943600" cy="1097280"/>
+            <a:off x="731520" y="1828800"/>
+            <a:ext cx="9144000" cy="1097280"/>
           </a:xfrm>
           <a:prstGeom prst="rect">
             <a:avLst/>
@@ -1952,9 +1789,50 @@
                 <a:ea typeface="Georgia" pitchFamily="34" charset="-122"/>
                 <a:cs typeface="Georgia" pitchFamily="34" charset="-120"/>
               </a:rPr>
-              <a:t>Particle Model &amp; States</a:t>
+              <a:t>Particle Model</a:t>
             </a:r>
             <a:endParaRPr lang="en-US" sz="3200" dirty="0"/>
+          </a:p>
+        </p:txBody>
+      </p:sp>
+      <p:sp>
+        <p:nvSpPr>
+          <p:cNvPr id="4" name="Text 2"/>
+          <p:cNvSpPr/>
+          <p:nvPr/>
+        </p:nvSpPr>
+        <p:spPr>
+          <a:xfrm>
+            <a:off x="731520" y="3017520"/>
+            <a:ext cx="7315200" cy="457200"/>
+          </a:xfrm>
+          <a:prstGeom prst="rect">
+            <a:avLst/>
+          </a:prstGeom>
+          <a:noFill/>
+          <a:ln/>
+        </p:spPr>
+        <p:txBody>
+          <a:bodyPr wrap="square" rtlCol="0" anchor="ctr"/>
+          <a:lstStyle/>
+          <a:p>
+            <a:pPr indent="0" marL="0">
+              <a:buNone/>
+            </a:pPr>
+            <a:r>
+              <a:rPr lang="en-US" sz="1400" dirty="0">
+                <a:solidFill>
+                  <a:srgbClr val="FFFFFF">
+                    <a:alpha val="60000"/>
+                  </a:srgbClr>
+                </a:solidFill>
+                <a:latin typeface="Arial" pitchFamily="34" charset="0"/>
+                <a:ea typeface="Arial" pitchFamily="34" charset="-122"/>
+                <a:cs typeface="Arial" pitchFamily="34" charset="-120"/>
+              </a:rPr>
+              <a:t>Solids, liquids, gases</a:t>
+            </a:r>
+            <a:endParaRPr lang="en-US" sz="1400" dirty="0"/>
           </a:p>
         </p:txBody>
       </p:sp>
@@ -1999,47 +1877,7 @@
         <p:spPr>
           <a:xfrm>
             <a:off x="0" y="0"/>
-            <a:ext cx="9144000" cy="822960"/>
-          </a:xfrm>
-          <a:prstGeom prst="rect">
-            <a:avLst/>
-          </a:prstGeom>
-          <a:solidFill>
-            <a:srgbClr val="FFFFFF"/>
-          </a:solidFill>
-          <a:ln/>
-        </p:spPr>
-      </p:sp>
-      <p:sp>
-        <p:nvSpPr>
-          <p:cNvPr id="3" name="Shape 1"/>
-          <p:cNvSpPr/>
-          <p:nvPr/>
-        </p:nvSpPr>
-        <p:spPr>
-          <a:xfrm>
-            <a:off x="0" y="804672"/>
-            <a:ext cx="9144000" cy="27432"/>
-          </a:xfrm>
-          <a:prstGeom prst="rect">
-            <a:avLst/>
-          </a:prstGeom>
-          <a:solidFill>
-            <a:srgbClr val="E5E2DC"/>
-          </a:solidFill>
-          <a:ln/>
-        </p:spPr>
-      </p:sp>
-      <p:sp>
-        <p:nvSpPr>
-          <p:cNvPr id="4" name="Shape 2"/>
-          <p:cNvSpPr/>
-          <p:nvPr/>
-        </p:nvSpPr>
-        <p:spPr>
-          <a:xfrm>
-            <a:off x="548640" y="201168"/>
-            <a:ext cx="54864" cy="420624"/>
+            <a:ext cx="73152" cy="5148072"/>
           </a:xfrm>
           <a:prstGeom prst="rect">
             <a:avLst/>
@@ -2052,14 +1890,14 @@
       </p:sp>
       <p:sp>
         <p:nvSpPr>
-          <p:cNvPr id="5" name="Text 3"/>
+          <p:cNvPr id="3" name="Text 1"/>
           <p:cNvSpPr/>
           <p:nvPr/>
         </p:nvSpPr>
         <p:spPr>
           <a:xfrm>
-            <a:off x="777240" y="137160"/>
-            <a:ext cx="7772400" cy="548640"/>
+            <a:off x="548640" y="274320"/>
+            <a:ext cx="9144000" cy="640080"/>
           </a:xfrm>
           <a:prstGeom prst="rect">
             <a:avLst/>
@@ -2068,14 +1906,14 @@
           <a:ln/>
         </p:spPr>
         <p:txBody>
-          <a:bodyPr wrap="square" lIns="0" tIns="0" rIns="0" bIns="0" rtlCol="0" anchor="ctr"/>
+          <a:bodyPr wrap="square" rtlCol="0" anchor="ctr"/>
           <a:lstStyle/>
           <a:p>
             <a:pPr indent="0" marL="0">
               <a:buNone/>
             </a:pPr>
             <a:r>
-              <a:rPr lang="en-US" sz="2000" b="1" dirty="0">
+              <a:rPr lang="en-US" sz="2400" b="1" dirty="0">
                 <a:solidFill>
                   <a:srgbClr val="1B2A4A"/>
                 </a:solidFill>
@@ -2083,22 +1921,42 @@
                 <a:ea typeface="Georgia" pitchFamily="34" charset="-122"/>
                 <a:cs typeface="Georgia" pitchFamily="34" charset="-120"/>
               </a:rPr>
-              <a:t>Particles &amp; States Review</a:t>
-            </a:r>
-            <a:endParaRPr lang="en-US" sz="2000" dirty="0"/>
-          </a:p>
-        </p:txBody>
-      </p:sp>
-      <p:sp>
-        <p:nvSpPr>
-          <p:cNvPr id="6" name="Text 4"/>
+              <a:t>Particle Model Recap</a:t>
+            </a:r>
+            <a:endParaRPr lang="en-US" sz="2400" dirty="0"/>
+          </a:p>
+        </p:txBody>
+      </p:sp>
+      <p:sp>
+        <p:nvSpPr>
+          <p:cNvPr id="4" name="Shape 2"/>
           <p:cNvSpPr/>
           <p:nvPr/>
         </p:nvSpPr>
         <p:spPr>
           <a:xfrm>
-            <a:off x="731520" y="1051560"/>
-            <a:ext cx="7680960" cy="3108960"/>
+            <a:off x="548640" y="960120"/>
+            <a:ext cx="2286000" cy="36576"/>
+          </a:xfrm>
+          <a:prstGeom prst="rect">
+            <a:avLst/>
+          </a:prstGeom>
+          <a:solidFill>
+            <a:srgbClr val="2A9D8F"/>
+          </a:solidFill>
+          <a:ln/>
+        </p:spPr>
+      </p:sp>
+      <p:sp>
+        <p:nvSpPr>
+          <p:cNvPr id="5" name="Text 3"/>
+          <p:cNvSpPr/>
+          <p:nvPr/>
+        </p:nvSpPr>
+        <p:spPr>
+          <a:xfrm>
+            <a:off x="548640" y="1188720"/>
+            <a:ext cx="10058400" cy="3474720"/>
           </a:xfrm>
           <a:prstGeom prst="rect">
             <a:avLst/>
@@ -2110,107 +1968,90 @@
           <a:bodyPr wrap="square" rtlCol="0" anchor="t"/>
           <a:lstStyle/>
           <a:p>
-            <a:pPr marL="342900" indent="-342900">
+            <a:pPr>
+              <a:lnSpc>
+                <a:spcPct val="150000"/>
+              </a:lnSpc>
               <a:spcAft>
-                <a:spcPts val="800"/>
+                <a:spcPts val="600"/>
               </a:spcAft>
-              <a:buSzPct val="100000"/>
-              <a:buChar char="•"/>
             </a:pPr>
             <a:r>
               <a:rPr lang="en-US" sz="1500" dirty="0">
                 <a:solidFill>
                   <a:srgbClr val="3D3A36"/>
                 </a:solidFill>
-                <a:latin typeface="Calibri" pitchFamily="34" charset="0"/>
-                <a:ea typeface="Calibri" pitchFamily="34" charset="-122"/>
-                <a:cs typeface="Calibri" pitchFamily="34" charset="-120"/>
+                <a:latin typeface="Arial" pitchFamily="34" charset="0"/>
+                <a:ea typeface="Arial" pitchFamily="34" charset="-122"/>
+                <a:cs typeface="Arial" pitchFamily="34" charset="-120"/>
               </a:rPr>
-              <a:t>All matter is made of tiny particles that are ALWAYS moving.</a:t>
+              <a:t>Solid: particles close, regular, vibrate. Fixed shape and volume.</a:t>
             </a:r>
             <a:endParaRPr lang="en-US" sz="1500" dirty="0"/>
           </a:p>
           <a:p>
-            <a:pPr marL="342900" indent="-342900">
+            <a:pPr>
+              <a:lnSpc>
+                <a:spcPct val="150000"/>
+              </a:lnSpc>
               <a:spcAft>
-                <a:spcPts val="800"/>
+                <a:spcPts val="600"/>
               </a:spcAft>
-              <a:buSzPct val="100000"/>
-              <a:buChar char="•"/>
             </a:pPr>
             <a:r>
               <a:rPr lang="en-US" sz="1500" dirty="0">
                 <a:solidFill>
                   <a:srgbClr val="3D3A36"/>
                 </a:solidFill>
-                <a:latin typeface="Calibri" pitchFamily="34" charset="0"/>
-                <a:ea typeface="Calibri" pitchFamily="34" charset="-122"/>
-                <a:cs typeface="Calibri" pitchFamily="34" charset="-120"/>
+                <a:latin typeface="Arial" pitchFamily="34" charset="0"/>
+                <a:ea typeface="Arial" pitchFamily="34" charset="-122"/>
+                <a:cs typeface="Arial" pitchFamily="34" charset="-120"/>
               </a:rPr>
-              <a:t>Solid: particles vibrate in fixed positions (fixed shape, fixed volume).</a:t>
+              <a:t>Liquid: particles close, random, slide. Fixed volume, flows.</a:t>
             </a:r>
             <a:endParaRPr lang="en-US" sz="1500" dirty="0"/>
           </a:p>
           <a:p>
-            <a:pPr marL="342900" indent="-342900">
+            <a:pPr>
+              <a:lnSpc>
+                <a:spcPct val="150000"/>
+              </a:lnSpc>
               <a:spcAft>
-                <a:spcPts val="800"/>
+                <a:spcPts val="600"/>
               </a:spcAft>
-              <a:buSzPct val="100000"/>
-              <a:buChar char="•"/>
             </a:pPr>
             <a:r>
               <a:rPr lang="en-US" sz="1500" dirty="0">
                 <a:solidFill>
                   <a:srgbClr val="3D3A36"/>
                 </a:solidFill>
-                <a:latin typeface="Calibri" pitchFamily="34" charset="0"/>
-                <a:ea typeface="Calibri" pitchFamily="34" charset="-122"/>
-                <a:cs typeface="Calibri" pitchFamily="34" charset="-120"/>
+                <a:latin typeface="Arial" pitchFamily="34" charset="0"/>
+                <a:ea typeface="Arial" pitchFamily="34" charset="-122"/>
+                <a:cs typeface="Arial" pitchFamily="34" charset="-120"/>
               </a:rPr>
-              <a:t>Liquid: particles slide past each other (fixed volume, takes container shape).</a:t>
+              <a:t>Gas: particles far apart, fast, random. Fills any container.</a:t>
             </a:r>
             <a:endParaRPr lang="en-US" sz="1500" dirty="0"/>
           </a:p>
           <a:p>
-            <a:pPr marL="342900" indent="-342900">
+            <a:pPr>
+              <a:lnSpc>
+                <a:spcPct val="150000"/>
+              </a:lnSpc>
               <a:spcAft>
-                <a:spcPts val="800"/>
+                <a:spcPts val="600"/>
               </a:spcAft>
-              <a:buSzPct val="100000"/>
-              <a:buChar char="•"/>
             </a:pPr>
             <a:r>
               <a:rPr lang="en-US" sz="1500" dirty="0">
                 <a:solidFill>
                   <a:srgbClr val="3D3A36"/>
                 </a:solidFill>
-                <a:latin typeface="Calibri" pitchFamily="34" charset="0"/>
-                <a:ea typeface="Calibri" pitchFamily="34" charset="-122"/>
-                <a:cs typeface="Calibri" pitchFamily="34" charset="-120"/>
+                <a:latin typeface="Arial" pitchFamily="34" charset="0"/>
+                <a:ea typeface="Arial" pitchFamily="34" charset="-122"/>
+                <a:cs typeface="Arial" pitchFamily="34" charset="-120"/>
               </a:rPr>
-              <a:t>Gas: particles move fast, spread far apart (no fixed shape or volume).</a:t>
-            </a:r>
-            <a:endParaRPr lang="en-US" sz="1500" dirty="0"/>
-          </a:p>
-          <a:p>
-            <a:pPr marL="342900" indent="-342900">
-              <a:spcAft>
-                <a:spcPts val="800"/>
-              </a:spcAft>
-              <a:buSzPct val="100000"/>
-              <a:buChar char="•"/>
-            </a:pPr>
-            <a:r>
-              <a:rPr lang="en-US" sz="1500" dirty="0">
-                <a:solidFill>
-                  <a:srgbClr val="3D3A36"/>
-                </a:solidFill>
-                <a:latin typeface="Calibri" pitchFamily="34" charset="0"/>
-                <a:ea typeface="Calibri" pitchFamily="34" charset="-122"/>
-                <a:cs typeface="Calibri" pitchFamily="34" charset="-120"/>
-              </a:rPr>
-              <a:t>Higher temperature = particles move faster = more energy.</a:t>
+              <a:t>Higher temperature = faster particles = more kinetic energy.</a:t>
             </a:r>
             <a:endParaRPr lang="en-US" sz="1500" dirty="0"/>
           </a:p>
@@ -2227,6 +2068,13 @@
 <file path=ppt/slides/slide4.xml><?xml version="1.0" encoding="utf-8"?>
 <p:sld xmlns:a="http://schemas.openxmlformats.org/drawingml/2006/main" xmlns:r="http://schemas.openxmlformats.org/officeDocument/2006/relationships" xmlns:p="http://schemas.openxmlformats.org/presentationml/2006/main">
   <p:cSld name="Slide 4">
+    <p:bg>
+      <p:bgPr>
+        <a:solidFill>
+          <a:srgbClr val="111D35"/>
+        </a:solidFill>
+      </p:bgPr>
+    </p:bg>
     <p:spTree>
       <p:nvGrpSpPr>
         <p:cNvPr id="1" name=""/>
@@ -2243,54 +2091,14 @@
       </p:grpSpPr>
       <p:sp>
         <p:nvSpPr>
-          <p:cNvPr id="2" name="Shape 0"/>
+          <p:cNvPr id="2" name="Text 0"/>
           <p:cNvSpPr/>
           <p:nvPr/>
         </p:nvSpPr>
         <p:spPr>
           <a:xfrm>
-            <a:off x="0" y="0"/>
-            <a:ext cx="9144000" cy="5143500"/>
-          </a:xfrm>
-          <a:prstGeom prst="rect">
-            <a:avLst/>
-          </a:prstGeom>
-          <a:solidFill>
-            <a:srgbClr val="1B2A4A"/>
-          </a:solidFill>
-          <a:ln/>
-        </p:spPr>
-      </p:sp>
-      <p:sp>
-        <p:nvSpPr>
-          <p:cNvPr id="3" name="Shape 1"/>
-          <p:cNvSpPr/>
-          <p:nvPr/>
-        </p:nvSpPr>
-        <p:spPr>
-          <a:xfrm>
-            <a:off x="731520" y="1828800"/>
-            <a:ext cx="73152" cy="1463040"/>
-          </a:xfrm>
-          <a:prstGeom prst="rect">
-            <a:avLst/>
-          </a:prstGeom>
-          <a:solidFill>
-            <a:srgbClr val="2A9D8F"/>
-          </a:solidFill>
-          <a:ln/>
-        </p:spPr>
-      </p:sp>
-      <p:sp>
-        <p:nvSpPr>
-          <p:cNvPr id="4" name="Text 2"/>
-          <p:cNvSpPr/>
-          <p:nvPr/>
-        </p:nvSpPr>
-        <p:spPr>
-          <a:xfrm>
-            <a:off x="1097280" y="1463040"/>
-            <a:ext cx="1097280" cy="1097280"/>
+            <a:off x="731520" y="731520"/>
+            <a:ext cx="2286000" cy="1828800"/>
           </a:xfrm>
           <a:prstGeom prst="rect">
             <a:avLst/>
@@ -2302,34 +2110,36 @@
           <a:bodyPr wrap="square" rtlCol="0" anchor="ctr"/>
           <a:lstStyle/>
           <a:p>
-            <a:pPr algn="l" indent="0" marL="0">
+            <a:pPr indent="0" marL="0">
               <a:buNone/>
             </a:pPr>
             <a:r>
-              <a:rPr lang="en-US" sz="4800" b="1" dirty="0">
+              <a:rPr lang="en-US" sz="7200" b="1" dirty="0">
                 <a:solidFill>
-                  <a:srgbClr val="2A9D8F"/>
+                  <a:srgbClr val="2A9D8F">
+                    <a:alpha val="80000"/>
+                  </a:srgbClr>
                 </a:solidFill>
                 <a:latin typeface="Georgia" pitchFamily="34" charset="0"/>
                 <a:ea typeface="Georgia" pitchFamily="34" charset="-122"/>
                 <a:cs typeface="Georgia" pitchFamily="34" charset="-120"/>
               </a:rPr>
-              <a:t>2</a:t>
-            </a:r>
-            <a:endParaRPr lang="en-US" sz="4800" dirty="0"/>
-          </a:p>
-        </p:txBody>
-      </p:sp>
-      <p:sp>
-        <p:nvSpPr>
-          <p:cNvPr id="5" name="Text 3"/>
+              <a:t>02</a:t>
+            </a:r>
+            <a:endParaRPr lang="en-US" sz="7200" dirty="0"/>
+          </a:p>
+        </p:txBody>
+      </p:sp>
+      <p:sp>
+        <p:nvSpPr>
+          <p:cNvPr id="3" name="Text 1"/>
           <p:cNvSpPr/>
           <p:nvPr/>
         </p:nvSpPr>
         <p:spPr>
           <a:xfrm>
-            <a:off x="2194560" y="1920240"/>
-            <a:ext cx="5943600" cy="1097280"/>
+            <a:off x="731520" y="1828800"/>
+            <a:ext cx="9144000" cy="1097280"/>
           </a:xfrm>
           <a:prstGeom prst="rect">
             <a:avLst/>
@@ -2356,6 +2166,47 @@
               <a:t>Changes of State</a:t>
             </a:r>
             <a:endParaRPr lang="en-US" sz="3200" dirty="0"/>
+          </a:p>
+        </p:txBody>
+      </p:sp>
+      <p:sp>
+        <p:nvSpPr>
+          <p:cNvPr id="4" name="Text 2"/>
+          <p:cNvSpPr/>
+          <p:nvPr/>
+        </p:nvSpPr>
+        <p:spPr>
+          <a:xfrm>
+            <a:off x="731520" y="3017520"/>
+            <a:ext cx="7315200" cy="457200"/>
+          </a:xfrm>
+          <a:prstGeom prst="rect">
+            <a:avLst/>
+          </a:prstGeom>
+          <a:noFill/>
+          <a:ln/>
+        </p:spPr>
+        <p:txBody>
+          <a:bodyPr wrap="square" rtlCol="0" anchor="ctr"/>
+          <a:lstStyle/>
+          <a:p>
+            <a:pPr indent="0" marL="0">
+              <a:buNone/>
+            </a:pPr>
+            <a:r>
+              <a:rPr lang="en-US" sz="1400" dirty="0">
+                <a:solidFill>
+                  <a:srgbClr val="FFFFFF">
+                    <a:alpha val="60000"/>
+                  </a:srgbClr>
+                </a:solidFill>
+                <a:latin typeface="Arial" pitchFamily="34" charset="0"/>
+                <a:ea typeface="Arial" pitchFamily="34" charset="-122"/>
+                <a:cs typeface="Arial" pitchFamily="34" charset="-120"/>
+              </a:rPr>
+              <a:t>Melting, boiling, freezing, condensing</a:t>
+            </a:r>
+            <a:endParaRPr lang="en-US" sz="1400" dirty="0"/>
           </a:p>
         </p:txBody>
       </p:sp>
@@ -2400,47 +2251,7 @@
         <p:spPr>
           <a:xfrm>
             <a:off x="0" y="0"/>
-            <a:ext cx="9144000" cy="822960"/>
-          </a:xfrm>
-          <a:prstGeom prst="rect">
-            <a:avLst/>
-          </a:prstGeom>
-          <a:solidFill>
-            <a:srgbClr val="FFFFFF"/>
-          </a:solidFill>
-          <a:ln/>
-        </p:spPr>
-      </p:sp>
-      <p:sp>
-        <p:nvSpPr>
-          <p:cNvPr id="3" name="Shape 1"/>
-          <p:cNvSpPr/>
-          <p:nvPr/>
-        </p:nvSpPr>
-        <p:spPr>
-          <a:xfrm>
-            <a:off x="0" y="804672"/>
-            <a:ext cx="9144000" cy="27432"/>
-          </a:xfrm>
-          <a:prstGeom prst="rect">
-            <a:avLst/>
-          </a:prstGeom>
-          <a:solidFill>
-            <a:srgbClr val="E5E2DC"/>
-          </a:solidFill>
-          <a:ln/>
-        </p:spPr>
-      </p:sp>
-      <p:sp>
-        <p:nvSpPr>
-          <p:cNvPr id="4" name="Shape 2"/>
-          <p:cNvSpPr/>
-          <p:nvPr/>
-        </p:nvSpPr>
-        <p:spPr>
-          <a:xfrm>
-            <a:off x="548640" y="201168"/>
-            <a:ext cx="54864" cy="420624"/>
+            <a:ext cx="73152" cy="5148072"/>
           </a:xfrm>
           <a:prstGeom prst="rect">
             <a:avLst/>
@@ -2453,14 +2264,14 @@
       </p:sp>
       <p:sp>
         <p:nvSpPr>
-          <p:cNvPr id="5" name="Text 3"/>
+          <p:cNvPr id="3" name="Text 1"/>
           <p:cNvSpPr/>
           <p:nvPr/>
         </p:nvSpPr>
         <p:spPr>
           <a:xfrm>
-            <a:off x="777240" y="137160"/>
-            <a:ext cx="7772400" cy="548640"/>
+            <a:off x="548640" y="274320"/>
+            <a:ext cx="9144000" cy="640080"/>
           </a:xfrm>
           <a:prstGeom prst="rect">
             <a:avLst/>
@@ -2469,14 +2280,14 @@
           <a:ln/>
         </p:spPr>
         <p:txBody>
-          <a:bodyPr wrap="square" lIns="0" tIns="0" rIns="0" bIns="0" rtlCol="0" anchor="ctr"/>
+          <a:bodyPr wrap="square" rtlCol="0" anchor="ctr"/>
           <a:lstStyle/>
           <a:p>
             <a:pPr indent="0" marL="0">
               <a:buNone/>
             </a:pPr>
             <a:r>
-              <a:rPr lang="en-US" sz="2000" b="1" dirty="0">
+              <a:rPr lang="en-US" sz="2400" b="1" dirty="0">
                 <a:solidFill>
                   <a:srgbClr val="1B2A4A"/>
                 </a:solidFill>
@@ -2484,22 +2295,42 @@
                 <a:ea typeface="Georgia" pitchFamily="34" charset="-122"/>
                 <a:cs typeface="Georgia" pitchFamily="34" charset="-120"/>
               </a:rPr>
-              <a:t>State Changes Review</a:t>
-            </a:r>
-            <a:endParaRPr lang="en-US" sz="2000" dirty="0"/>
-          </a:p>
-        </p:txBody>
-      </p:sp>
-      <p:sp>
-        <p:nvSpPr>
-          <p:cNvPr id="6" name="Text 4"/>
+              <a:t>Changes of State Recap</a:t>
+            </a:r>
+            <a:endParaRPr lang="en-US" sz="2400" dirty="0"/>
+          </a:p>
+        </p:txBody>
+      </p:sp>
+      <p:sp>
+        <p:nvSpPr>
+          <p:cNvPr id="4" name="Shape 2"/>
           <p:cNvSpPr/>
           <p:nvPr/>
         </p:nvSpPr>
         <p:spPr>
           <a:xfrm>
-            <a:off x="731520" y="1051560"/>
-            <a:ext cx="7680960" cy="3108960"/>
+            <a:off x="548640" y="960120"/>
+            <a:ext cx="2286000" cy="36576"/>
+          </a:xfrm>
+          <a:prstGeom prst="rect">
+            <a:avLst/>
+          </a:prstGeom>
+          <a:solidFill>
+            <a:srgbClr val="2A9D8F"/>
+          </a:solidFill>
+          <a:ln/>
+        </p:spPr>
+      </p:sp>
+      <p:sp>
+        <p:nvSpPr>
+          <p:cNvPr id="5" name="Text 3"/>
+          <p:cNvSpPr/>
+          <p:nvPr/>
+        </p:nvSpPr>
+        <p:spPr>
+          <a:xfrm>
+            <a:off x="548640" y="1188720"/>
+            <a:ext cx="10058400" cy="3474720"/>
           </a:xfrm>
           <a:prstGeom prst="rect">
             <a:avLst/>
@@ -2511,107 +2342,90 @@
           <a:bodyPr wrap="square" rtlCol="0" anchor="t"/>
           <a:lstStyle/>
           <a:p>
-            <a:pPr marL="342900" indent="-342900">
+            <a:pPr>
+              <a:lnSpc>
+                <a:spcPct val="150000"/>
+              </a:lnSpc>
               <a:spcAft>
-                <a:spcPts val="800"/>
+                <a:spcPts val="600"/>
               </a:spcAft>
-              <a:buSzPct val="100000"/>
-              <a:buChar char="•"/>
             </a:pPr>
             <a:r>
               <a:rPr lang="en-US" sz="1500" dirty="0">
                 <a:solidFill>
                   <a:srgbClr val="3D3A36"/>
                 </a:solidFill>
-                <a:latin typeface="Calibri" pitchFamily="34" charset="0"/>
-                <a:ea typeface="Calibri" pitchFamily="34" charset="-122"/>
-                <a:cs typeface="Calibri" pitchFamily="34" charset="-120"/>
+                <a:latin typeface="Arial" pitchFamily="34" charset="0"/>
+                <a:ea typeface="Arial" pitchFamily="34" charset="-122"/>
+                <a:cs typeface="Arial" pitchFamily="34" charset="-120"/>
               </a:rPr>
-              <a:t>Melting (solid→liquid), Freezing (liquid→solid), Boiling (liquid→gas).</a:t>
+              <a:t>Melting (solid→liquid), Boiling (liquid→gas), Evaporation (surface only).</a:t>
             </a:r>
             <a:endParaRPr lang="en-US" sz="1500" dirty="0"/>
           </a:p>
           <a:p>
-            <a:pPr marL="342900" indent="-342900">
+            <a:pPr>
+              <a:lnSpc>
+                <a:spcPct val="150000"/>
+              </a:lnSpc>
               <a:spcAft>
-                <a:spcPts val="800"/>
+                <a:spcPts val="600"/>
               </a:spcAft>
-              <a:buSzPct val="100000"/>
-              <a:buChar char="•"/>
             </a:pPr>
             <a:r>
               <a:rPr lang="en-US" sz="1500" dirty="0">
                 <a:solidFill>
                   <a:srgbClr val="3D3A36"/>
                 </a:solidFill>
-                <a:latin typeface="Calibri" pitchFamily="34" charset="0"/>
-                <a:ea typeface="Calibri" pitchFamily="34" charset="-122"/>
-                <a:cs typeface="Calibri" pitchFamily="34" charset="-120"/>
+                <a:latin typeface="Arial" pitchFamily="34" charset="0"/>
+                <a:ea typeface="Arial" pitchFamily="34" charset="-122"/>
+                <a:cs typeface="Arial" pitchFamily="34" charset="-120"/>
               </a:rPr>
-              <a:t>Evaporation (surface only, any temp) vs Boiling (throughout, at boiling point).</a:t>
+              <a:t>Freezing (liquid→solid), Condensation (gas→liquid).</a:t>
             </a:r>
             <a:endParaRPr lang="en-US" sz="1500" dirty="0"/>
           </a:p>
           <a:p>
-            <a:pPr marL="342900" indent="-342900">
+            <a:pPr>
+              <a:lnSpc>
+                <a:spcPct val="150000"/>
+              </a:lnSpc>
               <a:spcAft>
-                <a:spcPts val="800"/>
+                <a:spcPts val="600"/>
               </a:spcAft>
-              <a:buSzPct val="100000"/>
-              <a:buChar char="•"/>
             </a:pPr>
             <a:r>
               <a:rPr lang="en-US" sz="1500" dirty="0">
                 <a:solidFill>
                   <a:srgbClr val="3D3A36"/>
                 </a:solidFill>
-                <a:latin typeface="Calibri" pitchFamily="34" charset="0"/>
-                <a:ea typeface="Calibri" pitchFamily="34" charset="-122"/>
-                <a:cs typeface="Calibri" pitchFamily="34" charset="-120"/>
+                <a:latin typeface="Arial" pitchFamily="34" charset="0"/>
+                <a:ea typeface="Arial" pitchFamily="34" charset="-122"/>
+                <a:cs typeface="Arial" pitchFamily="34" charset="-120"/>
               </a:rPr>
-              <a:t>Condensation (gas→liquid), Sublimation (solid→gas, skipping liquid).</a:t>
+              <a:t>Temperature stays CONSTANT during a change of state.</a:t>
             </a:r>
             <a:endParaRPr lang="en-US" sz="1500" dirty="0"/>
           </a:p>
           <a:p>
-            <a:pPr marL="342900" indent="-342900">
+            <a:pPr>
+              <a:lnSpc>
+                <a:spcPct val="150000"/>
+              </a:lnSpc>
               <a:spcAft>
-                <a:spcPts val="800"/>
+                <a:spcPts val="600"/>
               </a:spcAft>
-              <a:buSzPct val="100000"/>
-              <a:buChar char="•"/>
             </a:pPr>
             <a:r>
               <a:rPr lang="en-US" sz="1500" dirty="0">
                 <a:solidFill>
                   <a:srgbClr val="3D3A36"/>
                 </a:solidFill>
-                <a:latin typeface="Calibri" pitchFamily="34" charset="0"/>
-                <a:ea typeface="Calibri" pitchFamily="34" charset="-122"/>
-                <a:cs typeface="Calibri" pitchFamily="34" charset="-120"/>
+                <a:latin typeface="Arial" pitchFamily="34" charset="0"/>
+                <a:ea typeface="Arial" pitchFamily="34" charset="-122"/>
+                <a:cs typeface="Arial" pitchFamily="34" charset="-120"/>
               </a:rPr>
-              <a:t>Temperature STAYS CONSTANT during a state change.</a:t>
-            </a:r>
-            <a:endParaRPr lang="en-US" sz="1500" dirty="0"/>
-          </a:p>
-          <a:p>
-            <a:pPr marL="342900" indent="-342900">
-              <a:spcAft>
-                <a:spcPts val="800"/>
-              </a:spcAft>
-              <a:buSzPct val="100000"/>
-              <a:buChar char="•"/>
-            </a:pPr>
-            <a:r>
-              <a:rPr lang="en-US" sz="1500" dirty="0">
-                <a:solidFill>
-                  <a:srgbClr val="3D3A36"/>
-                </a:solidFill>
-                <a:latin typeface="Calibri" pitchFamily="34" charset="0"/>
-                <a:ea typeface="Calibri" pitchFamily="34" charset="-122"/>
-                <a:cs typeface="Calibri" pitchFamily="34" charset="-120"/>
-              </a:rPr>
-              <a:t>Water: melts at 0°C, boils at 100°C.</a:t>
+              <a:t>Energy is used to break/form bonds between particles.</a:t>
             </a:r>
             <a:endParaRPr lang="en-US" sz="1500" dirty="0"/>
           </a:p>
@@ -2628,6 +2442,13 @@
 <file path=ppt/slides/slide6.xml><?xml version="1.0" encoding="utf-8"?>
 <p:sld xmlns:a="http://schemas.openxmlformats.org/drawingml/2006/main" xmlns:r="http://schemas.openxmlformats.org/officeDocument/2006/relationships" xmlns:p="http://schemas.openxmlformats.org/presentationml/2006/main">
   <p:cSld name="Slide 6">
+    <p:bg>
+      <p:bgPr>
+        <a:solidFill>
+          <a:srgbClr val="111D35"/>
+        </a:solidFill>
+      </p:bgPr>
+    </p:bg>
     <p:spTree>
       <p:nvGrpSpPr>
         <p:cNvPr id="1" name=""/>
@@ -2644,54 +2465,14 @@
       </p:grpSpPr>
       <p:sp>
         <p:nvSpPr>
-          <p:cNvPr id="2" name="Shape 0"/>
+          <p:cNvPr id="2" name="Text 0"/>
           <p:cNvSpPr/>
           <p:nvPr/>
         </p:nvSpPr>
         <p:spPr>
           <a:xfrm>
-            <a:off x="0" y="0"/>
-            <a:ext cx="9144000" cy="5143500"/>
-          </a:xfrm>
-          <a:prstGeom prst="rect">
-            <a:avLst/>
-          </a:prstGeom>
-          <a:solidFill>
-            <a:srgbClr val="1B2A4A"/>
-          </a:solidFill>
-          <a:ln/>
-        </p:spPr>
-      </p:sp>
-      <p:sp>
-        <p:nvSpPr>
-          <p:cNvPr id="3" name="Shape 1"/>
-          <p:cNvSpPr/>
-          <p:nvPr/>
-        </p:nvSpPr>
-        <p:spPr>
-          <a:xfrm>
-            <a:off x="731520" y="1828800"/>
-            <a:ext cx="73152" cy="1463040"/>
-          </a:xfrm>
-          <a:prstGeom prst="rect">
-            <a:avLst/>
-          </a:prstGeom>
-          <a:solidFill>
-            <a:srgbClr val="2A9D8F"/>
-          </a:solidFill>
-          <a:ln/>
-        </p:spPr>
-      </p:sp>
-      <p:sp>
-        <p:nvSpPr>
-          <p:cNvPr id="4" name="Text 2"/>
-          <p:cNvSpPr/>
-          <p:nvPr/>
-        </p:nvSpPr>
-        <p:spPr>
-          <a:xfrm>
-            <a:off x="1097280" y="1463040"/>
-            <a:ext cx="1097280" cy="1097280"/>
+            <a:off x="731520" y="731520"/>
+            <a:ext cx="2286000" cy="1828800"/>
           </a:xfrm>
           <a:prstGeom prst="rect">
             <a:avLst/>
@@ -2703,34 +2484,36 @@
           <a:bodyPr wrap="square" rtlCol="0" anchor="ctr"/>
           <a:lstStyle/>
           <a:p>
-            <a:pPr algn="l" indent="0" marL="0">
+            <a:pPr indent="0" marL="0">
               <a:buNone/>
             </a:pPr>
             <a:r>
-              <a:rPr lang="en-US" sz="4800" b="1" dirty="0">
+              <a:rPr lang="en-US" sz="7200" b="1" dirty="0">
                 <a:solidFill>
-                  <a:srgbClr val="2A9D8F"/>
+                  <a:srgbClr val="2A9D8F">
+                    <a:alpha val="80000"/>
+                  </a:srgbClr>
                 </a:solidFill>
                 <a:latin typeface="Georgia" pitchFamily="34" charset="0"/>
                 <a:ea typeface="Georgia" pitchFamily="34" charset="-122"/>
                 <a:cs typeface="Georgia" pitchFamily="34" charset="-120"/>
               </a:rPr>
-              <a:t>3</a:t>
-            </a:r>
-            <a:endParaRPr lang="en-US" sz="4800" dirty="0"/>
-          </a:p>
-        </p:txBody>
-      </p:sp>
-      <p:sp>
-        <p:nvSpPr>
-          <p:cNvPr id="5" name="Text 3"/>
+              <a:t>03</a:t>
+            </a:r>
+            <a:endParaRPr lang="en-US" sz="7200" dirty="0"/>
+          </a:p>
+        </p:txBody>
+      </p:sp>
+      <p:sp>
+        <p:nvSpPr>
+          <p:cNvPr id="3" name="Text 1"/>
           <p:cNvSpPr/>
           <p:nvPr/>
         </p:nvSpPr>
         <p:spPr>
           <a:xfrm>
-            <a:off x="2194560" y="1920240"/>
-            <a:ext cx="5943600" cy="1097280"/>
+            <a:off x="731520" y="1828800"/>
+            <a:ext cx="9144000" cy="1097280"/>
           </a:xfrm>
           <a:prstGeom prst="rect">
             <a:avLst/>
@@ -2754,9 +2537,50 @@
                 <a:ea typeface="Georgia" pitchFamily="34" charset="-122"/>
                 <a:cs typeface="Georgia" pitchFamily="34" charset="-120"/>
               </a:rPr>
-              <a:t>Mixtures &amp; Separation</a:t>
+              <a:t>Mixtures &amp; Separating</a:t>
             </a:r>
             <a:endParaRPr lang="en-US" sz="3200" dirty="0"/>
+          </a:p>
+        </p:txBody>
+      </p:sp>
+      <p:sp>
+        <p:nvSpPr>
+          <p:cNvPr id="4" name="Text 2"/>
+          <p:cNvSpPr/>
+          <p:nvPr/>
+        </p:nvSpPr>
+        <p:spPr>
+          <a:xfrm>
+            <a:off x="731520" y="3017520"/>
+            <a:ext cx="7315200" cy="457200"/>
+          </a:xfrm>
+          <a:prstGeom prst="rect">
+            <a:avLst/>
+          </a:prstGeom>
+          <a:noFill/>
+          <a:ln/>
+        </p:spPr>
+        <p:txBody>
+          <a:bodyPr wrap="square" rtlCol="0" anchor="ctr"/>
+          <a:lstStyle/>
+          <a:p>
+            <a:pPr indent="0" marL="0">
+              <a:buNone/>
+            </a:pPr>
+            <a:r>
+              <a:rPr lang="en-US" sz="1400" dirty="0">
+                <a:solidFill>
+                  <a:srgbClr val="FFFFFF">
+                    <a:alpha val="60000"/>
+                  </a:srgbClr>
+                </a:solidFill>
+                <a:latin typeface="Arial" pitchFamily="34" charset="0"/>
+                <a:ea typeface="Arial" pitchFamily="34" charset="-122"/>
+                <a:cs typeface="Arial" pitchFamily="34" charset="-120"/>
+              </a:rPr>
+              <a:t>Solutions, filtration, distillation</a:t>
+            </a:r>
+            <a:endParaRPr lang="en-US" sz="1400" dirty="0"/>
           </a:p>
         </p:txBody>
       </p:sp>
@@ -2801,47 +2625,7 @@
         <p:spPr>
           <a:xfrm>
             <a:off x="0" y="0"/>
-            <a:ext cx="9144000" cy="822960"/>
-          </a:xfrm>
-          <a:prstGeom prst="rect">
-            <a:avLst/>
-          </a:prstGeom>
-          <a:solidFill>
-            <a:srgbClr val="FFFFFF"/>
-          </a:solidFill>
-          <a:ln/>
-        </p:spPr>
-      </p:sp>
-      <p:sp>
-        <p:nvSpPr>
-          <p:cNvPr id="3" name="Shape 1"/>
-          <p:cNvSpPr/>
-          <p:nvPr/>
-        </p:nvSpPr>
-        <p:spPr>
-          <a:xfrm>
-            <a:off x="0" y="804672"/>
-            <a:ext cx="9144000" cy="27432"/>
-          </a:xfrm>
-          <a:prstGeom prst="rect">
-            <a:avLst/>
-          </a:prstGeom>
-          <a:solidFill>
-            <a:srgbClr val="E5E2DC"/>
-          </a:solidFill>
-          <a:ln/>
-        </p:spPr>
-      </p:sp>
-      <p:sp>
-        <p:nvSpPr>
-          <p:cNvPr id="4" name="Shape 2"/>
-          <p:cNvSpPr/>
-          <p:nvPr/>
-        </p:nvSpPr>
-        <p:spPr>
-          <a:xfrm>
-            <a:off x="548640" y="201168"/>
-            <a:ext cx="54864" cy="420624"/>
+            <a:ext cx="73152" cy="5148072"/>
           </a:xfrm>
           <a:prstGeom prst="rect">
             <a:avLst/>
@@ -2854,14 +2638,14 @@
       </p:sp>
       <p:sp>
         <p:nvSpPr>
-          <p:cNvPr id="5" name="Text 3"/>
+          <p:cNvPr id="3" name="Text 1"/>
           <p:cNvSpPr/>
           <p:nvPr/>
         </p:nvSpPr>
         <p:spPr>
           <a:xfrm>
-            <a:off x="777240" y="137160"/>
-            <a:ext cx="7772400" cy="548640"/>
+            <a:off x="548640" y="274320"/>
+            <a:ext cx="9144000" cy="640080"/>
           </a:xfrm>
           <a:prstGeom prst="rect">
             <a:avLst/>
@@ -2870,14 +2654,14 @@
           <a:ln/>
         </p:spPr>
         <p:txBody>
-          <a:bodyPr wrap="square" lIns="0" tIns="0" rIns="0" bIns="0" rtlCol="0" anchor="ctr"/>
+          <a:bodyPr wrap="square" rtlCol="0" anchor="ctr"/>
           <a:lstStyle/>
           <a:p>
             <a:pPr indent="0" marL="0">
               <a:buNone/>
             </a:pPr>
             <a:r>
-              <a:rPr lang="en-US" sz="2000" b="1" dirty="0">
+              <a:rPr lang="en-US" sz="2400" b="1" dirty="0">
                 <a:solidFill>
                   <a:srgbClr val="1B2A4A"/>
                 </a:solidFill>
@@ -2885,22 +2669,42 @@
                 <a:ea typeface="Georgia" pitchFamily="34" charset="-122"/>
                 <a:cs typeface="Georgia" pitchFamily="34" charset="-120"/>
               </a:rPr>
-              <a:t>Mixtures &amp; Separation Review</a:t>
-            </a:r>
-            <a:endParaRPr lang="en-US" sz="2000" dirty="0"/>
-          </a:p>
-        </p:txBody>
-      </p:sp>
-      <p:sp>
-        <p:nvSpPr>
-          <p:cNvPr id="6" name="Text 4"/>
+              <a:t>Mixtures &amp; Separation Recap</a:t>
+            </a:r>
+            <a:endParaRPr lang="en-US" sz="2400" dirty="0"/>
+          </a:p>
+        </p:txBody>
+      </p:sp>
+      <p:sp>
+        <p:nvSpPr>
+          <p:cNvPr id="4" name="Shape 2"/>
           <p:cNvSpPr/>
           <p:nvPr/>
         </p:nvSpPr>
         <p:spPr>
           <a:xfrm>
-            <a:off x="731520" y="1051560"/>
-            <a:ext cx="7680960" cy="3108960"/>
+            <a:off x="548640" y="960120"/>
+            <a:ext cx="2286000" cy="36576"/>
+          </a:xfrm>
+          <a:prstGeom prst="rect">
+            <a:avLst/>
+          </a:prstGeom>
+          <a:solidFill>
+            <a:srgbClr val="2A9D8F"/>
+          </a:solidFill>
+          <a:ln/>
+        </p:spPr>
+      </p:sp>
+      <p:sp>
+        <p:nvSpPr>
+          <p:cNvPr id="5" name="Text 3"/>
+          <p:cNvSpPr/>
+          <p:nvPr/>
+        </p:nvSpPr>
+        <p:spPr>
+          <a:xfrm>
+            <a:off x="548640" y="1188720"/>
+            <a:ext cx="10058400" cy="3474720"/>
           </a:xfrm>
           <a:prstGeom prst="rect">
             <a:avLst/>
@@ -2912,107 +2716,90 @@
           <a:bodyPr wrap="square" rtlCol="0" anchor="t"/>
           <a:lstStyle/>
           <a:p>
-            <a:pPr marL="342900" indent="-342900">
+            <a:pPr>
+              <a:lnSpc>
+                <a:spcPct val="150000"/>
+              </a:lnSpc>
               <a:spcAft>
-                <a:spcPts val="800"/>
+                <a:spcPts val="600"/>
               </a:spcAft>
-              <a:buSzPct val="100000"/>
-              <a:buChar char="•"/>
             </a:pPr>
             <a:r>
               <a:rPr lang="en-US" sz="1500" dirty="0">
                 <a:solidFill>
                   <a:srgbClr val="3D3A36"/>
                 </a:solidFill>
-                <a:latin typeface="Calibri" pitchFamily="34" charset="0"/>
-                <a:ea typeface="Calibri" pitchFamily="34" charset="-122"/>
-                <a:cs typeface="Calibri" pitchFamily="34" charset="-120"/>
+                <a:latin typeface="Arial" pitchFamily="34" charset="0"/>
+                <a:ea typeface="Arial" pitchFamily="34" charset="-122"/>
+                <a:cs typeface="Arial" pitchFamily="34" charset="-120"/>
               </a:rPr>
-              <a:t>Pure substance = one type of particle. Mixture = two or more types, not chemically joined.</a:t>
+              <a:t>Mixture: substances NOT chemically bonded. Keep own properties.</a:t>
             </a:r>
             <a:endParaRPr lang="en-US" sz="1500" dirty="0"/>
           </a:p>
           <a:p>
-            <a:pPr marL="342900" indent="-342900">
+            <a:pPr>
+              <a:lnSpc>
+                <a:spcPct val="150000"/>
+              </a:lnSpc>
               <a:spcAft>
-                <a:spcPts val="800"/>
+                <a:spcPts val="600"/>
               </a:spcAft>
-              <a:buSzPct val="100000"/>
-              <a:buChar char="•"/>
             </a:pPr>
             <a:r>
               <a:rPr lang="en-US" sz="1500" dirty="0">
                 <a:solidFill>
                   <a:srgbClr val="3D3A36"/>
                 </a:solidFill>
-                <a:latin typeface="Calibri" pitchFamily="34" charset="0"/>
-                <a:ea typeface="Calibri" pitchFamily="34" charset="-122"/>
-                <a:cs typeface="Calibri" pitchFamily="34" charset="-120"/>
+                <a:latin typeface="Arial" pitchFamily="34" charset="0"/>
+                <a:ea typeface="Arial" pitchFamily="34" charset="-122"/>
+                <a:cs typeface="Arial" pitchFamily="34" charset="-120"/>
               </a:rPr>
-              <a:t>Solution = solute + solvent. Saturated = no more will dissolve.</a:t>
+              <a:t>Solution: solute dissolves in solvent. Soluble vs insoluble.</a:t>
             </a:r>
             <a:endParaRPr lang="en-US" sz="1500" dirty="0"/>
           </a:p>
           <a:p>
-            <a:pPr marL="342900" indent="-342900">
+            <a:pPr>
+              <a:lnSpc>
+                <a:spcPct val="150000"/>
+              </a:lnSpc>
               <a:spcAft>
-                <a:spcPts val="800"/>
+                <a:spcPts val="600"/>
               </a:spcAft>
-              <a:buSzPct val="100000"/>
-              <a:buChar char="•"/>
             </a:pPr>
             <a:r>
               <a:rPr lang="en-US" sz="1500" dirty="0">
                 <a:solidFill>
                   <a:srgbClr val="3D3A36"/>
                 </a:solidFill>
-                <a:latin typeface="Calibri" pitchFamily="34" charset="0"/>
-                <a:ea typeface="Calibri" pitchFamily="34" charset="-122"/>
-                <a:cs typeface="Calibri" pitchFamily="34" charset="-120"/>
+                <a:latin typeface="Arial" pitchFamily="34" charset="0"/>
+                <a:ea typeface="Arial" pitchFamily="34" charset="-122"/>
+                <a:cs typeface="Arial" pitchFamily="34" charset="-120"/>
               </a:rPr>
-              <a:t>Filtration = insoluble solid from liquid. Evaporation = dissolved solid from liquid.</a:t>
+              <a:t>Filtration = solid + liquid. Evaporation = dissolved solid.</a:t>
             </a:r>
             <a:endParaRPr lang="en-US" sz="1500" dirty="0"/>
           </a:p>
           <a:p>
-            <a:pPr marL="342900" indent="-342900">
+            <a:pPr>
+              <a:lnSpc>
+                <a:spcPct val="150000"/>
+              </a:lnSpc>
               <a:spcAft>
-                <a:spcPts val="800"/>
+                <a:spcPts val="600"/>
               </a:spcAft>
-              <a:buSzPct val="100000"/>
-              <a:buChar char="•"/>
             </a:pPr>
             <a:r>
               <a:rPr lang="en-US" sz="1500" dirty="0">
                 <a:solidFill>
                   <a:srgbClr val="3D3A36"/>
                 </a:solidFill>
-                <a:latin typeface="Calibri" pitchFamily="34" charset="0"/>
-                <a:ea typeface="Calibri" pitchFamily="34" charset="-122"/>
-                <a:cs typeface="Calibri" pitchFamily="34" charset="-120"/>
+                <a:latin typeface="Arial" pitchFamily="34" charset="0"/>
+                <a:ea typeface="Arial" pitchFamily="34" charset="-122"/>
+                <a:cs typeface="Arial" pitchFamily="34" charset="-120"/>
               </a:rPr>
-              <a:t>Distillation = separating by boiling point (keeps the liquid).</a:t>
-            </a:r>
-            <a:endParaRPr lang="en-US" sz="1500" dirty="0"/>
-          </a:p>
-          <a:p>
-            <a:pPr marL="342900" indent="-342900">
-              <a:spcAft>
-                <a:spcPts val="800"/>
-              </a:spcAft>
-              <a:buSzPct val="100000"/>
-              <a:buChar char="•"/>
-            </a:pPr>
-            <a:r>
-              <a:rPr lang="en-US" sz="1500" dirty="0">
-                <a:solidFill>
-                  <a:srgbClr val="3D3A36"/>
-                </a:solidFill>
-                <a:latin typeface="Calibri" pitchFamily="34" charset="0"/>
-                <a:ea typeface="Calibri" pitchFamily="34" charset="-122"/>
-                <a:cs typeface="Calibri" pitchFamily="34" charset="-120"/>
-              </a:rPr>
-              <a:t>Chromatography = separating dissolved coloured substances.</a:t>
+              <a:t>Distillation = get the liquid. Chromatography = coloured dyes.</a:t>
             </a:r>
             <a:endParaRPr lang="en-US" sz="1500" dirty="0"/>
           </a:p>
@@ -3032,7 +2819,7 @@
     <p:bg>
       <p:bgPr>
         <a:solidFill>
-          <a:srgbClr val="FAF8F5"/>
+          <a:srgbClr val="111D35"/>
         </a:solidFill>
       </p:bgPr>
     </p:bg>
@@ -3052,74 +2839,14 @@
       </p:grpSpPr>
       <p:sp>
         <p:nvSpPr>
-          <p:cNvPr id="2" name="Shape 0"/>
+          <p:cNvPr id="2" name="Text 0"/>
           <p:cNvSpPr/>
           <p:nvPr/>
         </p:nvSpPr>
         <p:spPr>
           <a:xfrm>
-            <a:off x="0" y="0"/>
-            <a:ext cx="9144000" cy="822960"/>
-          </a:xfrm>
-          <a:prstGeom prst="rect">
-            <a:avLst/>
-          </a:prstGeom>
-          <a:solidFill>
-            <a:srgbClr val="FFFFFF"/>
-          </a:solidFill>
-          <a:ln/>
-        </p:spPr>
-      </p:sp>
-      <p:sp>
-        <p:nvSpPr>
-          <p:cNvPr id="3" name="Shape 1"/>
-          <p:cNvSpPr/>
-          <p:nvPr/>
-        </p:nvSpPr>
-        <p:spPr>
-          <a:xfrm>
-            <a:off x="0" y="804672"/>
-            <a:ext cx="9144000" cy="27432"/>
-          </a:xfrm>
-          <a:prstGeom prst="rect">
-            <a:avLst/>
-          </a:prstGeom>
-          <a:solidFill>
-            <a:srgbClr val="E5E2DC"/>
-          </a:solidFill>
-          <a:ln/>
-        </p:spPr>
-      </p:sp>
-      <p:sp>
-        <p:nvSpPr>
-          <p:cNvPr id="4" name="Shape 2"/>
-          <p:cNvSpPr/>
-          <p:nvPr/>
-        </p:nvSpPr>
-        <p:spPr>
-          <a:xfrm>
-            <a:off x="548640" y="201168"/>
-            <a:ext cx="54864" cy="420624"/>
-          </a:xfrm>
-          <a:prstGeom prst="rect">
-            <a:avLst/>
-          </a:prstGeom>
-          <a:solidFill>
-            <a:srgbClr val="2A9D8F"/>
-          </a:solidFill>
-          <a:ln/>
-        </p:spPr>
-      </p:sp>
-      <p:sp>
-        <p:nvSpPr>
-          <p:cNvPr id="5" name="Text 3"/>
-          <p:cNvSpPr/>
-          <p:nvPr/>
-        </p:nvSpPr>
-        <p:spPr>
-          <a:xfrm>
-            <a:off x="777240" y="137160"/>
-            <a:ext cx="7772400" cy="548640"/>
+            <a:off x="731520" y="1371600"/>
+            <a:ext cx="9144000" cy="914400"/>
           </a:xfrm>
           <a:prstGeom prst="rect">
             <a:avLst/>
@@ -3128,695 +2855,14 @@
           <a:ln/>
         </p:spPr>
         <p:txBody>
-          <a:bodyPr wrap="square" lIns="0" tIns="0" rIns="0" bIns="0" rtlCol="0" anchor="ctr"/>
+          <a:bodyPr wrap="square" rtlCol="0" anchor="ctr"/>
           <a:lstStyle/>
           <a:p>
             <a:pPr indent="0" marL="0">
               <a:buNone/>
             </a:pPr>
             <a:r>
-              <a:rPr lang="en-US" sz="2000" b="1" dirty="0">
-                <a:solidFill>
-                  <a:srgbClr val="1B2A4A"/>
-                </a:solidFill>
-                <a:latin typeface="Georgia" pitchFamily="34" charset="0"/>
-                <a:ea typeface="Georgia" pitchFamily="34" charset="-122"/>
-                <a:cs typeface="Georgia" pitchFamily="34" charset="-120"/>
-              </a:rPr>
-              <a:t>Final Revision Checklist</a:t>
-            </a:r>
-            <a:endParaRPr lang="en-US" sz="2000" dirty="0"/>
-          </a:p>
-        </p:txBody>
-      </p:sp>
-      <p:sp>
-        <p:nvSpPr>
-          <p:cNvPr id="6" name="Shape 4"/>
-          <p:cNvSpPr/>
-          <p:nvPr/>
-        </p:nvSpPr>
-        <p:spPr>
-          <a:xfrm>
-            <a:off x="731520" y="1051560"/>
-            <a:ext cx="7680960" cy="438912"/>
-          </a:xfrm>
-          <a:prstGeom prst="rect">
-            <a:avLst/>
-          </a:prstGeom>
-          <a:solidFill>
-            <a:srgbClr val="FFFFFF"/>
-          </a:solidFill>
-          <a:ln/>
-        </p:spPr>
-      </p:sp>
-      <p:sp>
-        <p:nvSpPr>
-          <p:cNvPr id="7" name="Text 5"/>
-          <p:cNvSpPr/>
-          <p:nvPr/>
-        </p:nvSpPr>
-        <p:spPr>
-          <a:xfrm>
-            <a:off x="868680" y="1051560"/>
-            <a:ext cx="320040" cy="438912"/>
-          </a:xfrm>
-          <a:prstGeom prst="rect">
-            <a:avLst/>
-          </a:prstGeom>
-          <a:noFill/>
-          <a:ln/>
-        </p:spPr>
-        <p:txBody>
-          <a:bodyPr wrap="square" rtlCol="0" anchor="ctr"/>
-          <a:lstStyle/>
-          <a:p>
-            <a:pPr indent="0" marL="0">
-              <a:buNone/>
-            </a:pPr>
-            <a:r>
-              <a:rPr lang="en-US" sz="1400" dirty="0">
-                <a:solidFill>
-                  <a:srgbClr val="2A9D8F"/>
-                </a:solidFill>
-              </a:rPr>
-              <a:t>☐</a:t>
-            </a:r>
-            <a:endParaRPr lang="en-US" sz="1400" dirty="0"/>
-          </a:p>
-        </p:txBody>
-      </p:sp>
-      <p:sp>
-        <p:nvSpPr>
-          <p:cNvPr id="8" name="Text 6"/>
-          <p:cNvSpPr/>
-          <p:nvPr/>
-        </p:nvSpPr>
-        <p:spPr>
-          <a:xfrm>
-            <a:off x="1234440" y="1051560"/>
-            <a:ext cx="6949440" cy="438912"/>
-          </a:xfrm>
-          <a:prstGeom prst="rect">
-            <a:avLst/>
-          </a:prstGeom>
-          <a:noFill/>
-          <a:ln/>
-        </p:spPr>
-        <p:txBody>
-          <a:bodyPr wrap="square" rtlCol="0" anchor="ctr"/>
-          <a:lstStyle/>
-          <a:p>
-            <a:pPr indent="0" marL="0">
-              <a:buNone/>
-            </a:pPr>
-            <a:r>
-              <a:rPr lang="en-US" sz="1300" dirty="0">
-                <a:solidFill>
-                  <a:srgbClr val="3D3A36"/>
-                </a:solidFill>
-                <a:latin typeface="Calibri" pitchFamily="34" charset="0"/>
-                <a:ea typeface="Calibri" pitchFamily="34" charset="-122"/>
-                <a:cs typeface="Calibri" pitchFamily="34" charset="-120"/>
-              </a:rPr>
-              <a:t>Particle model — arrangement and movement in each state</a:t>
-            </a:r>
-            <a:endParaRPr lang="en-US" sz="1300" dirty="0"/>
-          </a:p>
-        </p:txBody>
-      </p:sp>
-      <p:sp>
-        <p:nvSpPr>
-          <p:cNvPr id="9" name="Shape 7"/>
-          <p:cNvSpPr/>
-          <p:nvPr/>
-        </p:nvSpPr>
-        <p:spPr>
-          <a:xfrm>
-            <a:off x="731520" y="1554480"/>
-            <a:ext cx="7680960" cy="438912"/>
-          </a:xfrm>
-          <a:prstGeom prst="rect">
-            <a:avLst/>
-          </a:prstGeom>
-          <a:solidFill>
-            <a:srgbClr val="F8F6F3"/>
-          </a:solidFill>
-          <a:ln/>
-        </p:spPr>
-      </p:sp>
-      <p:sp>
-        <p:nvSpPr>
-          <p:cNvPr id="10" name="Text 8"/>
-          <p:cNvSpPr/>
-          <p:nvPr/>
-        </p:nvSpPr>
-        <p:spPr>
-          <a:xfrm>
-            <a:off x="868680" y="1554480"/>
-            <a:ext cx="320040" cy="438912"/>
-          </a:xfrm>
-          <a:prstGeom prst="rect">
-            <a:avLst/>
-          </a:prstGeom>
-          <a:noFill/>
-          <a:ln/>
-        </p:spPr>
-        <p:txBody>
-          <a:bodyPr wrap="square" rtlCol="0" anchor="ctr"/>
-          <a:lstStyle/>
-          <a:p>
-            <a:pPr indent="0" marL="0">
-              <a:buNone/>
-            </a:pPr>
-            <a:r>
-              <a:rPr lang="en-US" sz="1400" dirty="0">
-                <a:solidFill>
-                  <a:srgbClr val="2A9D8F"/>
-                </a:solidFill>
-              </a:rPr>
-              <a:t>☐</a:t>
-            </a:r>
-            <a:endParaRPr lang="en-US" sz="1400" dirty="0"/>
-          </a:p>
-        </p:txBody>
-      </p:sp>
-      <p:sp>
-        <p:nvSpPr>
-          <p:cNvPr id="11" name="Text 9"/>
-          <p:cNvSpPr/>
-          <p:nvPr/>
-        </p:nvSpPr>
-        <p:spPr>
-          <a:xfrm>
-            <a:off x="1234440" y="1554480"/>
-            <a:ext cx="6949440" cy="438912"/>
-          </a:xfrm>
-          <a:prstGeom prst="rect">
-            <a:avLst/>
-          </a:prstGeom>
-          <a:noFill/>
-          <a:ln/>
-        </p:spPr>
-        <p:txBody>
-          <a:bodyPr wrap="square" rtlCol="0" anchor="ctr"/>
-          <a:lstStyle/>
-          <a:p>
-            <a:pPr indent="0" marL="0">
-              <a:buNone/>
-            </a:pPr>
-            <a:r>
-              <a:rPr lang="en-US" sz="1300" dirty="0">
-                <a:solidFill>
-                  <a:srgbClr val="3D3A36"/>
-                </a:solidFill>
-                <a:latin typeface="Calibri" pitchFamily="34" charset="0"/>
-                <a:ea typeface="Calibri" pitchFamily="34" charset="-122"/>
-                <a:cs typeface="Calibri" pitchFamily="34" charset="-120"/>
-              </a:rPr>
-              <a:t>All 6 changes of state and particle explanations</a:t>
-            </a:r>
-            <a:endParaRPr lang="en-US" sz="1300" dirty="0"/>
-          </a:p>
-        </p:txBody>
-      </p:sp>
-      <p:sp>
-        <p:nvSpPr>
-          <p:cNvPr id="12" name="Shape 10"/>
-          <p:cNvSpPr/>
-          <p:nvPr/>
-        </p:nvSpPr>
-        <p:spPr>
-          <a:xfrm>
-            <a:off x="731520" y="2057400"/>
-            <a:ext cx="7680960" cy="438912"/>
-          </a:xfrm>
-          <a:prstGeom prst="rect">
-            <a:avLst/>
-          </a:prstGeom>
-          <a:solidFill>
-            <a:srgbClr val="FFFFFF"/>
-          </a:solidFill>
-          <a:ln/>
-        </p:spPr>
-      </p:sp>
-      <p:sp>
-        <p:nvSpPr>
-          <p:cNvPr id="13" name="Text 11"/>
-          <p:cNvSpPr/>
-          <p:nvPr/>
-        </p:nvSpPr>
-        <p:spPr>
-          <a:xfrm>
-            <a:off x="868680" y="2057400"/>
-            <a:ext cx="320040" cy="438912"/>
-          </a:xfrm>
-          <a:prstGeom prst="rect">
-            <a:avLst/>
-          </a:prstGeom>
-          <a:noFill/>
-          <a:ln/>
-        </p:spPr>
-        <p:txBody>
-          <a:bodyPr wrap="square" rtlCol="0" anchor="ctr"/>
-          <a:lstStyle/>
-          <a:p>
-            <a:pPr indent="0" marL="0">
-              <a:buNone/>
-            </a:pPr>
-            <a:r>
-              <a:rPr lang="en-US" sz="1400" dirty="0">
-                <a:solidFill>
-                  <a:srgbClr val="2A9D8F"/>
-                </a:solidFill>
-              </a:rPr>
-              <a:t>☐</a:t>
-            </a:r>
-            <a:endParaRPr lang="en-US" sz="1400" dirty="0"/>
-          </a:p>
-        </p:txBody>
-      </p:sp>
-      <p:sp>
-        <p:nvSpPr>
-          <p:cNvPr id="14" name="Text 12"/>
-          <p:cNvSpPr/>
-          <p:nvPr/>
-        </p:nvSpPr>
-        <p:spPr>
-          <a:xfrm>
-            <a:off x="1234440" y="2057400"/>
-            <a:ext cx="6949440" cy="438912"/>
-          </a:xfrm>
-          <a:prstGeom prst="rect">
-            <a:avLst/>
-          </a:prstGeom>
-          <a:noFill/>
-          <a:ln/>
-        </p:spPr>
-        <p:txBody>
-          <a:bodyPr wrap="square" rtlCol="0" anchor="ctr"/>
-          <a:lstStyle/>
-          <a:p>
-            <a:pPr indent="0" marL="0">
-              <a:buNone/>
-            </a:pPr>
-            <a:r>
-              <a:rPr lang="en-US" sz="1300" dirty="0">
-                <a:solidFill>
-                  <a:srgbClr val="3D3A36"/>
-                </a:solidFill>
-                <a:latin typeface="Calibri" pitchFamily="34" charset="0"/>
-                <a:ea typeface="Calibri" pitchFamily="34" charset="-122"/>
-                <a:cs typeface="Calibri" pitchFamily="34" charset="-120"/>
-              </a:rPr>
-              <a:t>Heating/cooling curves — flat sections = state change</a:t>
-            </a:r>
-            <a:endParaRPr lang="en-US" sz="1300" dirty="0"/>
-          </a:p>
-        </p:txBody>
-      </p:sp>
-      <p:sp>
-        <p:nvSpPr>
-          <p:cNvPr id="15" name="Shape 13"/>
-          <p:cNvSpPr/>
-          <p:nvPr/>
-        </p:nvSpPr>
-        <p:spPr>
-          <a:xfrm>
-            <a:off x="731520" y="2560320"/>
-            <a:ext cx="7680960" cy="438912"/>
-          </a:xfrm>
-          <a:prstGeom prst="rect">
-            <a:avLst/>
-          </a:prstGeom>
-          <a:solidFill>
-            <a:srgbClr val="F8F6F3"/>
-          </a:solidFill>
-          <a:ln/>
-        </p:spPr>
-      </p:sp>
-      <p:sp>
-        <p:nvSpPr>
-          <p:cNvPr id="16" name="Text 14"/>
-          <p:cNvSpPr/>
-          <p:nvPr/>
-        </p:nvSpPr>
-        <p:spPr>
-          <a:xfrm>
-            <a:off x="868680" y="2560320"/>
-            <a:ext cx="320040" cy="438912"/>
-          </a:xfrm>
-          <a:prstGeom prst="rect">
-            <a:avLst/>
-          </a:prstGeom>
-          <a:noFill/>
-          <a:ln/>
-        </p:spPr>
-        <p:txBody>
-          <a:bodyPr wrap="square" rtlCol="0" anchor="ctr"/>
-          <a:lstStyle/>
-          <a:p>
-            <a:pPr indent="0" marL="0">
-              <a:buNone/>
-            </a:pPr>
-            <a:r>
-              <a:rPr lang="en-US" sz="1400" dirty="0">
-                <a:solidFill>
-                  <a:srgbClr val="2A9D8F"/>
-                </a:solidFill>
-              </a:rPr>
-              <a:t>☐</a:t>
-            </a:r>
-            <a:endParaRPr lang="en-US" sz="1400" dirty="0"/>
-          </a:p>
-        </p:txBody>
-      </p:sp>
-      <p:sp>
-        <p:nvSpPr>
-          <p:cNvPr id="17" name="Text 15"/>
-          <p:cNvSpPr/>
-          <p:nvPr/>
-        </p:nvSpPr>
-        <p:spPr>
-          <a:xfrm>
-            <a:off x="1234440" y="2560320"/>
-            <a:ext cx="6949440" cy="438912"/>
-          </a:xfrm>
-          <a:prstGeom prst="rect">
-            <a:avLst/>
-          </a:prstGeom>
-          <a:noFill/>
-          <a:ln/>
-        </p:spPr>
-        <p:txBody>
-          <a:bodyPr wrap="square" rtlCol="0" anchor="ctr"/>
-          <a:lstStyle/>
-          <a:p>
-            <a:pPr indent="0" marL="0">
-              <a:buNone/>
-            </a:pPr>
-            <a:r>
-              <a:rPr lang="en-US" sz="1300" dirty="0">
-                <a:solidFill>
-                  <a:srgbClr val="3D3A36"/>
-                </a:solidFill>
-                <a:latin typeface="Calibri" pitchFamily="34" charset="0"/>
-                <a:ea typeface="Calibri" pitchFamily="34" charset="-122"/>
-                <a:cs typeface="Calibri" pitchFamily="34" charset="-120"/>
-              </a:rPr>
-              <a:t>Pure vs mixture, solute vs solvent, soluble vs insoluble</a:t>
-            </a:r>
-            <a:endParaRPr lang="en-US" sz="1300" dirty="0"/>
-          </a:p>
-        </p:txBody>
-      </p:sp>
-      <p:sp>
-        <p:nvSpPr>
-          <p:cNvPr id="18" name="Shape 16"/>
-          <p:cNvSpPr/>
-          <p:nvPr/>
-        </p:nvSpPr>
-        <p:spPr>
-          <a:xfrm>
-            <a:off x="731520" y="3063240"/>
-            <a:ext cx="7680960" cy="438912"/>
-          </a:xfrm>
-          <a:prstGeom prst="rect">
-            <a:avLst/>
-          </a:prstGeom>
-          <a:solidFill>
-            <a:srgbClr val="FFFFFF"/>
-          </a:solidFill>
-          <a:ln/>
-        </p:spPr>
-      </p:sp>
-      <p:sp>
-        <p:nvSpPr>
-          <p:cNvPr id="19" name="Text 17"/>
-          <p:cNvSpPr/>
-          <p:nvPr/>
-        </p:nvSpPr>
-        <p:spPr>
-          <a:xfrm>
-            <a:off x="868680" y="3063240"/>
-            <a:ext cx="320040" cy="438912"/>
-          </a:xfrm>
-          <a:prstGeom prst="rect">
-            <a:avLst/>
-          </a:prstGeom>
-          <a:noFill/>
-          <a:ln/>
-        </p:spPr>
-        <p:txBody>
-          <a:bodyPr wrap="square" rtlCol="0" anchor="ctr"/>
-          <a:lstStyle/>
-          <a:p>
-            <a:pPr indent="0" marL="0">
-              <a:buNone/>
-            </a:pPr>
-            <a:r>
-              <a:rPr lang="en-US" sz="1400" dirty="0">
-                <a:solidFill>
-                  <a:srgbClr val="2A9D8F"/>
-                </a:solidFill>
-              </a:rPr>
-              <a:t>☐</a:t>
-            </a:r>
-            <a:endParaRPr lang="en-US" sz="1400" dirty="0"/>
-          </a:p>
-        </p:txBody>
-      </p:sp>
-      <p:sp>
-        <p:nvSpPr>
-          <p:cNvPr id="20" name="Text 18"/>
-          <p:cNvSpPr/>
-          <p:nvPr/>
-        </p:nvSpPr>
-        <p:spPr>
-          <a:xfrm>
-            <a:off x="1234440" y="3063240"/>
-            <a:ext cx="6949440" cy="438912"/>
-          </a:xfrm>
-          <a:prstGeom prst="rect">
-            <a:avLst/>
-          </a:prstGeom>
-          <a:noFill/>
-          <a:ln/>
-        </p:spPr>
-        <p:txBody>
-          <a:bodyPr wrap="square" rtlCol="0" anchor="ctr"/>
-          <a:lstStyle/>
-          <a:p>
-            <a:pPr indent="0" marL="0">
-              <a:buNone/>
-            </a:pPr>
-            <a:r>
-              <a:rPr lang="en-US" sz="1300" dirty="0">
-                <a:solidFill>
-                  <a:srgbClr val="3D3A36"/>
-                </a:solidFill>
-                <a:latin typeface="Calibri" pitchFamily="34" charset="0"/>
-                <a:ea typeface="Calibri" pitchFamily="34" charset="-122"/>
-                <a:cs typeface="Calibri" pitchFamily="34" charset="-120"/>
-              </a:rPr>
-              <a:t>All separation techniques and when to use each</a:t>
-            </a:r>
-            <a:endParaRPr lang="en-US" sz="1300" dirty="0"/>
-          </a:p>
-        </p:txBody>
-      </p:sp>
-      <p:sp>
-        <p:nvSpPr>
-          <p:cNvPr id="21" name="Shape 19"/>
-          <p:cNvSpPr/>
-          <p:nvPr/>
-        </p:nvSpPr>
-        <p:spPr>
-          <a:xfrm>
-            <a:off x="731520" y="3749040"/>
-            <a:ext cx="7680960" cy="594360"/>
-          </a:xfrm>
-          <a:prstGeom prst="rect">
-            <a:avLst/>
-          </a:prstGeom>
-          <a:solidFill>
-            <a:srgbClr val="E8F5F3"/>
-          </a:solidFill>
-          <a:ln/>
-          <a:effectLst>
-            <a:outerShdw sx="100000" sy="100000" kx="0" ky="0" algn="bl" rotWithShape="0" blurRad="50800" dist="25400" dir="8100000">
-              <a:srgbClr val="000000">
-                <a:alpha val="10000"/>
-              </a:srgbClr>
-            </a:outerShdw>
-          </a:effectLst>
-        </p:spPr>
-      </p:sp>
-      <p:sp>
-        <p:nvSpPr>
-          <p:cNvPr id="22" name="Text 20"/>
-          <p:cNvSpPr/>
-          <p:nvPr/>
-        </p:nvSpPr>
-        <p:spPr>
-          <a:xfrm>
-            <a:off x="914400" y="3749040"/>
-            <a:ext cx="7315200" cy="594360"/>
-          </a:xfrm>
-          <a:prstGeom prst="rect">
-            <a:avLst/>
-          </a:prstGeom>
-          <a:noFill/>
-          <a:ln/>
-        </p:spPr>
-        <p:txBody>
-          <a:bodyPr wrap="square" rtlCol="0" anchor="ctr"/>
-          <a:lstStyle/>
-          <a:p>
-            <a:pPr indent="0" marL="0">
-              <a:buNone/>
-            </a:pPr>
-            <a:r>
-              <a:rPr lang="en-US" sz="1200" b="1" dirty="0">
-                <a:solidFill>
-                  <a:srgbClr val="2A9D8F"/>
-                </a:solidFill>
-                <a:latin typeface="Calibri" pitchFamily="34" charset="0"/>
-                <a:ea typeface="Calibri" pitchFamily="34" charset="-122"/>
-                <a:cs typeface="Calibri" pitchFamily="34" charset="-120"/>
-              </a:rPr>
-              <a:t>Key Idea: </a:t>
-            </a:r>
-            <a:pPr indent="0" marL="0">
-              <a:buNone/>
-            </a:pPr>
-            <a:r>
-              <a:rPr lang="en-US" sz="1200" i="1" dirty="0">
-                <a:solidFill>
-                  <a:srgbClr val="3D3A36"/>
-                </a:solidFill>
-                <a:latin typeface="Calibri" pitchFamily="34" charset="0"/>
-                <a:ea typeface="Calibri" pitchFamily="34" charset="-122"/>
-                <a:cs typeface="Calibri" pitchFamily="34" charset="-120"/>
-              </a:rPr>
-              <a:t>Test yourself with the Self-Quiz and Review Games on mrzocchi.com.</a:t>
-            </a:r>
-            <a:endParaRPr lang="en-US" sz="1200" dirty="0"/>
-          </a:p>
-        </p:txBody>
-      </p:sp>
-    </p:spTree>
-  </p:cSld>
-  <p:clrMapOvr>
-    <a:masterClrMapping/>
-  </p:clrMapOvr>
-</p:sld>
-</file>
-
-<file path=ppt/slides/slide9.xml><?xml version="1.0" encoding="utf-8"?>
-<p:sld xmlns:a="http://schemas.openxmlformats.org/drawingml/2006/main" xmlns:r="http://schemas.openxmlformats.org/officeDocument/2006/relationships" xmlns:p="http://schemas.openxmlformats.org/presentationml/2006/main">
-  <p:cSld name="Slide 9">
-    <p:spTree>
-      <p:nvGrpSpPr>
-        <p:cNvPr id="1" name=""/>
-        <p:cNvGrpSpPr/>
-        <p:nvPr/>
-      </p:nvGrpSpPr>
-      <p:grpSpPr>
-        <a:xfrm>
-          <a:off x="0" y="0"/>
-          <a:ext cx="0" cy="0"/>
-          <a:chOff x="0" y="0"/>
-          <a:chExt cx="0" cy="0"/>
-        </a:xfrm>
-      </p:grpSpPr>
-      <p:sp>
-        <p:nvSpPr>
-          <p:cNvPr id="2" name="Shape 0"/>
-          <p:cNvSpPr/>
-          <p:nvPr/>
-        </p:nvSpPr>
-        <p:spPr>
-          <a:xfrm>
-            <a:off x="0" y="0"/>
-            <a:ext cx="9144000" cy="5143500"/>
-          </a:xfrm>
-          <a:prstGeom prst="rect">
-            <a:avLst/>
-          </a:prstGeom>
-          <a:solidFill>
-            <a:srgbClr val="1B2A4A"/>
-          </a:solidFill>
-          <a:ln/>
-        </p:spPr>
-      </p:sp>
-      <p:sp>
-        <p:nvSpPr>
-          <p:cNvPr id="3" name="Shape 1"/>
-          <p:cNvSpPr/>
-          <p:nvPr/>
-        </p:nvSpPr>
-        <p:spPr>
-          <a:xfrm>
-            <a:off x="0" y="4777740"/>
-            <a:ext cx="9144000" cy="365760"/>
-          </a:xfrm>
-          <a:prstGeom prst="rect">
-            <a:avLst/>
-          </a:prstGeom>
-          <a:solidFill>
-            <a:srgbClr val="2A9D8F"/>
-          </a:solidFill>
-          <a:ln/>
-        </p:spPr>
-      </p:sp>
-      <p:sp>
-        <p:nvSpPr>
-          <p:cNvPr id="4" name="Shape 2"/>
-          <p:cNvSpPr/>
-          <p:nvPr/>
-        </p:nvSpPr>
-        <p:spPr>
-          <a:xfrm>
-            <a:off x="-914400" y="-914400"/>
-            <a:ext cx="3657600" cy="3657600"/>
-          </a:xfrm>
-          <a:prstGeom prst="ellipse">
-            <a:avLst/>
-          </a:prstGeom>
-          <a:solidFill>
-            <a:srgbClr val="2A9D8F">
-              <a:alpha val="10000"/>
-            </a:srgbClr>
-          </a:solidFill>
-          <a:ln/>
-        </p:spPr>
-      </p:sp>
-      <p:sp>
-        <p:nvSpPr>
-          <p:cNvPr id="5" name="Text 3"/>
-          <p:cNvSpPr/>
-          <p:nvPr/>
-        </p:nvSpPr>
-        <p:spPr>
-          <a:xfrm>
-            <a:off x="731520" y="1463040"/>
-            <a:ext cx="7680960" cy="822960"/>
-          </a:xfrm>
-          <a:prstGeom prst="rect">
-            <a:avLst/>
-          </a:prstGeom>
-          <a:noFill/>
-          <a:ln/>
-        </p:spPr>
-        <p:txBody>
-          <a:bodyPr wrap="square" rtlCol="0" anchor="ctr"/>
-          <a:lstStyle/>
-          <a:p>
-            <a:pPr algn="ctr" indent="0" marL="0">
-              <a:buNone/>
-            </a:pPr>
-            <a:r>
-              <a:rPr lang="en-US" sz="3400" b="1" dirty="0">
+              <a:rPr lang="en-US" sz="3200" b="1" dirty="0">
                 <a:solidFill>
                   <a:srgbClr val="FFFFFF"/>
                 </a:solidFill>
@@ -3826,20 +2872,20 @@
               </a:rPr>
               <a:t>Review &amp; Practise</a:t>
             </a:r>
-            <a:endParaRPr lang="en-US" sz="3400" dirty="0"/>
-          </a:p>
-        </p:txBody>
-      </p:sp>
-      <p:sp>
-        <p:nvSpPr>
-          <p:cNvPr id="6" name="Text 4"/>
+            <a:endParaRPr lang="en-US" sz="3200" dirty="0"/>
+          </a:p>
+        </p:txBody>
+      </p:sp>
+      <p:sp>
+        <p:nvSpPr>
+          <p:cNvPr id="3" name="Text 1"/>
           <p:cNvSpPr/>
           <p:nvPr/>
         </p:nvSpPr>
         <p:spPr>
           <a:xfrm>
-            <a:off x="731520" y="2468880"/>
-            <a:ext cx="7680960" cy="457200"/>
+            <a:off x="731520" y="2377440"/>
+            <a:ext cx="7315200" cy="548640"/>
           </a:xfrm>
           <a:prstGeom prst="rect">
             <a:avLst/>
@@ -3851,60 +2897,62 @@
           <a:bodyPr wrap="square" rtlCol="0" anchor="ctr"/>
           <a:lstStyle/>
           <a:p>
-            <a:pPr algn="ctr" indent="0" marL="0">
+            <a:pPr indent="0" marL="0">
               <a:buNone/>
             </a:pPr>
             <a:r>
-              <a:rPr lang="en-US" sz="1800" dirty="0">
+              <a:rPr lang="en-US" sz="1500" dirty="0">
                 <a:solidFill>
-                  <a:srgbClr val="2A9D8F"/>
+                  <a:srgbClr val="FFFFFF">
+                    <a:alpha val="60000"/>
+                  </a:srgbClr>
                 </a:solidFill>
-                <a:latin typeface="Calibri" pitchFamily="34" charset="0"/>
-                <a:ea typeface="Calibri" pitchFamily="34" charset="-122"/>
-                <a:cs typeface="Calibri" pitchFamily="34" charset="-120"/>
+                <a:latin typeface="Arial" pitchFamily="34" charset="0"/>
+                <a:ea typeface="Arial" pitchFamily="34" charset="-122"/>
+                <a:cs typeface="Arial" pitchFamily="34" charset="-120"/>
+              </a:rPr>
+              <a:t>Use the Self-Quiz, Review Games, and Practice Builder to test yourself.</a:t>
+            </a:r>
+            <a:endParaRPr lang="en-US" sz="1500" dirty="0"/>
+          </a:p>
+        </p:txBody>
+      </p:sp>
+      <p:sp>
+        <p:nvSpPr>
+          <p:cNvPr id="4" name="Text 2"/>
+          <p:cNvSpPr/>
+          <p:nvPr/>
+        </p:nvSpPr>
+        <p:spPr>
+          <a:xfrm>
+            <a:off x="731520" y="3291840"/>
+            <a:ext cx="3657600" cy="457200"/>
+          </a:xfrm>
+          <a:prstGeom prst="rect">
+            <a:avLst/>
+          </a:prstGeom>
+          <a:noFill/>
+          <a:ln/>
+        </p:spPr>
+        <p:txBody>
+          <a:bodyPr wrap="square" rtlCol="0" anchor="ctr"/>
+          <a:lstStyle/>
+          <a:p>
+            <a:pPr indent="0" marL="0">
+              <a:buNone/>
+            </a:pPr>
+            <a:r>
+              <a:rPr lang="en-US" sz="1800" b="1" dirty="0">
+                <a:solidFill>
+                  <a:srgbClr val="E9C46A"/>
+                </a:solidFill>
+                <a:latin typeface="Georgia" pitchFamily="34" charset="0"/>
+                <a:ea typeface="Georgia" pitchFamily="34" charset="-122"/>
+                <a:cs typeface="Georgia" pitchFamily="34" charset="-120"/>
               </a:rPr>
               <a:t>mrzocchi.com</a:t>
             </a:r>
             <a:endParaRPr lang="en-US" sz="1800" dirty="0"/>
-          </a:p>
-        </p:txBody>
-      </p:sp>
-      <p:sp>
-        <p:nvSpPr>
-          <p:cNvPr id="7" name="Text 5"/>
-          <p:cNvSpPr/>
-          <p:nvPr/>
-        </p:nvSpPr>
-        <p:spPr>
-          <a:xfrm>
-            <a:off x="731520" y="3108960"/>
-            <a:ext cx="7680960" cy="457200"/>
-          </a:xfrm>
-          <a:prstGeom prst="rect">
-            <a:avLst/>
-          </a:prstGeom>
-          <a:noFill/>
-          <a:ln/>
-        </p:spPr>
-        <p:txBody>
-          <a:bodyPr wrap="square" rtlCol="0" anchor="ctr"/>
-          <a:lstStyle/>
-          <a:p>
-            <a:pPr algn="ctr" indent="0" marL="0">
-              <a:buNone/>
-            </a:pPr>
-            <a:r>
-              <a:rPr lang="en-US" sz="1300" dirty="0">
-                <a:solidFill>
-                  <a:srgbClr val="9B9690"/>
-                </a:solidFill>
-                <a:latin typeface="Calibri" pitchFamily="34" charset="0"/>
-                <a:ea typeface="Calibri" pitchFamily="34" charset="-122"/>
-                <a:cs typeface="Calibri" pitchFamily="34" charset="-120"/>
-              </a:rPr>
-              <a:t>Use the Self-Quiz, Review Games, and Practice Builder to test yourself.</a:t>
-            </a:r>
-            <a:endParaRPr lang="en-US" sz="1300" dirty="0"/>
           </a:p>
         </p:txBody>
       </p:sp>
